--- a/files/inst414_spring2026/lectures/lecture_9c_AUC.pptx
+++ b/files/inst414_spring2026/lectures/lecture_9c_AUC.pptx
@@ -18,11 +18,6 @@
     <p:sldId id="664" r:id="rId12"/>
     <p:sldId id="665" r:id="rId13"/>
     <p:sldId id="666" r:id="rId14"/>
-    <p:sldId id="867" r:id="rId15"/>
-    <p:sldId id="868" r:id="rId16"/>
-    <p:sldId id="869" r:id="rId17"/>
-    <p:sldId id="870" r:id="rId18"/>
-    <p:sldId id="871" r:id="rId19"/>
   </p:sldIdLst>
   <p:sldSz cx="12192000" cy="6858000"/>
   <p:notesSz cx="6858000" cy="9144000"/>
@@ -121,6 +116,11 @@
       </a:defRPr>
     </a:lvl9pPr>
   </p:defaultTextStyle>
+  <p:extLst>
+    <p:ext uri="{EFAFB233-063F-42B5-8137-9DF3F51BA10A}">
+      <p15:sldGuideLst xmlns:p15="http://schemas.microsoft.com/office/powerpoint/2012/main"/>
+    </p:ext>
+  </p:extLst>
 </p:presentation>
 </file>
 
@@ -271,7 +271,7 @@
           <a:p>
             <a:fld id="{D7BAAD77-0952-4A0F-B406-0526A080BBE6}" type="datetimeFigureOut">
               <a:rPr lang="en-US" smtClean="0"/>
-              <a:t>3/30/2026</a:t>
+              <a:t>3/31/2026</a:t>
             </a:fld>
             <a:endParaRPr lang="en-US"/>
           </a:p>
@@ -469,7 +469,7 @@
           <a:p>
             <a:fld id="{D7BAAD77-0952-4A0F-B406-0526A080BBE6}" type="datetimeFigureOut">
               <a:rPr lang="en-US" smtClean="0"/>
-              <a:t>3/30/2026</a:t>
+              <a:t>3/31/2026</a:t>
             </a:fld>
             <a:endParaRPr lang="en-US"/>
           </a:p>
@@ -677,7 +677,7 @@
           <a:p>
             <a:fld id="{D7BAAD77-0952-4A0F-B406-0526A080BBE6}" type="datetimeFigureOut">
               <a:rPr lang="en-US" smtClean="0"/>
-              <a:t>3/30/2026</a:t>
+              <a:t>3/31/2026</a:t>
             </a:fld>
             <a:endParaRPr lang="en-US"/>
           </a:p>
@@ -875,7 +875,7 @@
           <a:p>
             <a:fld id="{D7BAAD77-0952-4A0F-B406-0526A080BBE6}" type="datetimeFigureOut">
               <a:rPr lang="en-US" smtClean="0"/>
-              <a:t>3/30/2026</a:t>
+              <a:t>3/31/2026</a:t>
             </a:fld>
             <a:endParaRPr lang="en-US"/>
           </a:p>
@@ -1150,7 +1150,7 @@
           <a:p>
             <a:fld id="{D7BAAD77-0952-4A0F-B406-0526A080BBE6}" type="datetimeFigureOut">
               <a:rPr lang="en-US" smtClean="0"/>
-              <a:t>3/30/2026</a:t>
+              <a:t>3/31/2026</a:t>
             </a:fld>
             <a:endParaRPr lang="en-US"/>
           </a:p>
@@ -1415,7 +1415,7 @@
           <a:p>
             <a:fld id="{D7BAAD77-0952-4A0F-B406-0526A080BBE6}" type="datetimeFigureOut">
               <a:rPr lang="en-US" smtClean="0"/>
-              <a:t>3/30/2026</a:t>
+              <a:t>3/31/2026</a:t>
             </a:fld>
             <a:endParaRPr lang="en-US"/>
           </a:p>
@@ -1827,7 +1827,7 @@
           <a:p>
             <a:fld id="{D7BAAD77-0952-4A0F-B406-0526A080BBE6}" type="datetimeFigureOut">
               <a:rPr lang="en-US" smtClean="0"/>
-              <a:t>3/30/2026</a:t>
+              <a:t>3/31/2026</a:t>
             </a:fld>
             <a:endParaRPr lang="en-US"/>
           </a:p>
@@ -1968,7 +1968,7 @@
           <a:p>
             <a:fld id="{D7BAAD77-0952-4A0F-B406-0526A080BBE6}" type="datetimeFigureOut">
               <a:rPr lang="en-US" smtClean="0"/>
-              <a:t>3/30/2026</a:t>
+              <a:t>3/31/2026</a:t>
             </a:fld>
             <a:endParaRPr lang="en-US"/>
           </a:p>
@@ -2081,7 +2081,7 @@
           <a:p>
             <a:fld id="{D7BAAD77-0952-4A0F-B406-0526A080BBE6}" type="datetimeFigureOut">
               <a:rPr lang="en-US" smtClean="0"/>
-              <a:t>3/30/2026</a:t>
+              <a:t>3/31/2026</a:t>
             </a:fld>
             <a:endParaRPr lang="en-US"/>
           </a:p>
@@ -2392,7 +2392,7 @@
           <a:p>
             <a:fld id="{D7BAAD77-0952-4A0F-B406-0526A080BBE6}" type="datetimeFigureOut">
               <a:rPr lang="en-US" smtClean="0"/>
-              <a:t>3/30/2026</a:t>
+              <a:t>3/31/2026</a:t>
             </a:fld>
             <a:endParaRPr lang="en-US"/>
           </a:p>
@@ -2680,7 +2680,7 @@
           <a:p>
             <a:fld id="{D7BAAD77-0952-4A0F-B406-0526A080BBE6}" type="datetimeFigureOut">
               <a:rPr lang="en-US" smtClean="0"/>
-              <a:t>3/30/2026</a:t>
+              <a:t>3/31/2026</a:t>
             </a:fld>
             <a:endParaRPr lang="en-US"/>
           </a:p>
@@ -2924,7 +2924,7 @@
             <a:fld id="{D7BAAD77-0952-4A0F-B406-0526A080BBE6}" type="datetimeFigureOut">
               <a:rPr lang="en-US" smtClean="0"/>
               <a:pPr/>
-              <a:t>3/30/2026</a:t>
+              <a:t>3/31/2026</a:t>
             </a:fld>
             <a:endParaRPr lang="en-US"/>
           </a:p>
@@ -6515,5231 +6515,6 @@
       </p:transition>
     </mc:Fallback>
   </mc:AlternateContent>
-</p:sld>
-</file>
-
-<file path=ppt/slides/slide14.xml><?xml version="1.0" encoding="utf-8"?>
-<p:sld xmlns:a="http://schemas.openxmlformats.org/drawingml/2006/main" xmlns:r="http://schemas.openxmlformats.org/officeDocument/2006/relationships" xmlns:p="http://schemas.openxmlformats.org/presentationml/2006/main">
-  <p:cSld>
-    <p:spTree>
-      <p:nvGrpSpPr>
-        <p:cNvPr id="1" name=""/>
-        <p:cNvGrpSpPr/>
-        <p:nvPr/>
-      </p:nvGrpSpPr>
-      <p:grpSpPr>
-        <a:xfrm>
-          <a:off x="0" y="0"/>
-          <a:ext cx="0" cy="0"/>
-          <a:chOff x="0" y="0"/>
-          <a:chExt cx="0" cy="0"/>
-        </a:xfrm>
-      </p:grpSpPr>
-      <p:sp>
-        <p:nvSpPr>
-          <p:cNvPr id="2" name="Title 1">
-            <a:extLst>
-              <a:ext uri="{FF2B5EF4-FFF2-40B4-BE49-F238E27FC236}">
-                <a16:creationId xmlns:a16="http://schemas.microsoft.com/office/drawing/2014/main" id="{38AD36AB-AA77-30AC-1262-AAB8697C7AEC}"/>
-              </a:ext>
-            </a:extLst>
-          </p:cNvPr>
-          <p:cNvSpPr>
-            <a:spLocks noGrp="1"/>
-          </p:cNvSpPr>
-          <p:nvPr>
-            <p:ph type="title"/>
-          </p:nvPr>
-        </p:nvSpPr>
-        <p:spPr/>
-        <p:txBody>
-          <a:bodyPr/>
-          <a:lstStyle/>
-          <a:p>
-            <a:r>
-              <a:rPr lang="en-US" dirty="0"/>
-              <a:t>Practice Computing AUC</a:t>
-            </a:r>
-          </a:p>
-        </p:txBody>
-      </p:sp>
-      <mc:AlternateContent xmlns:mc="http://schemas.openxmlformats.org/markup-compatibility/2006" xmlns:a14="http://schemas.microsoft.com/office/drawing/2010/main">
-        <mc:Choice Requires="a14">
-          <p:sp>
-            <p:nvSpPr>
-              <p:cNvPr id="3" name="Content Placeholder 2">
-                <a:extLst>
-                  <a:ext uri="{FF2B5EF4-FFF2-40B4-BE49-F238E27FC236}">
-                    <a16:creationId xmlns:a16="http://schemas.microsoft.com/office/drawing/2014/main" id="{69FEC08B-830D-DDAD-7E2A-74533C9D636A}"/>
-                  </a:ext>
-                </a:extLst>
-              </p:cNvPr>
-              <p:cNvSpPr>
-                <a:spLocks noGrp="1"/>
-              </p:cNvSpPr>
-              <p:nvPr>
-                <p:ph idx="1"/>
-              </p:nvPr>
-            </p:nvSpPr>
-            <p:spPr>
-              <a:xfrm>
-                <a:off x="838200" y="1825625"/>
-                <a:ext cx="4342466" cy="4351338"/>
-              </a:xfrm>
-            </p:spPr>
-            <p:txBody>
-              <a:bodyPr/>
-              <a:lstStyle/>
-              <a:p>
-                <a:r>
-                  <a:rPr lang="en-US" dirty="0"/>
-                  <a:t>First threshold is 0.17</a:t>
-                </a:r>
-              </a:p>
-              <a:p>
-                <a:pPr lvl="1"/>
-                <a14:m>
-                  <m:oMath xmlns:m="http://schemas.openxmlformats.org/officeDocument/2006/math">
-                    <m:r>
-                      <a:rPr lang="en-US" b="0" i="1" smtClean="0">
-                        <a:latin typeface="Cambria Math" panose="02040503050406030204" pitchFamily="18" charset="0"/>
-                      </a:rPr>
-                      <m:t>𝑇𝑃𝑅</m:t>
-                    </m:r>
-                    <m:r>
-                      <a:rPr lang="en-US" b="0" i="1" smtClean="0">
-                        <a:latin typeface="Cambria Math" panose="02040503050406030204" pitchFamily="18" charset="0"/>
-                      </a:rPr>
-                      <m:t>=</m:t>
-                    </m:r>
-                    <m:f>
-                      <m:fPr>
-                        <m:ctrlPr>
-                          <a:rPr lang="en-US" b="0" i="1" smtClean="0">
-                            <a:latin typeface="Cambria Math" panose="02040503050406030204" pitchFamily="18" charset="0"/>
-                          </a:rPr>
-                        </m:ctrlPr>
-                      </m:fPr>
-                      <m:num>
-                        <m:r>
-                          <a:rPr lang="en-US" b="0" i="1" smtClean="0">
-                            <a:latin typeface="Cambria Math" panose="02040503050406030204" pitchFamily="18" charset="0"/>
-                          </a:rPr>
-                          <m:t>50</m:t>
-                        </m:r>
-                      </m:num>
-                      <m:den>
-                        <m:r>
-                          <a:rPr lang="en-US" b="0" i="1" smtClean="0">
-                            <a:latin typeface="Cambria Math" panose="02040503050406030204" pitchFamily="18" charset="0"/>
-                          </a:rPr>
-                          <m:t>50</m:t>
-                        </m:r>
-                      </m:den>
-                    </m:f>
-                    <m:r>
-                      <a:rPr lang="en-US" b="0" i="1" smtClean="0">
-                        <a:latin typeface="Cambria Math" panose="02040503050406030204" pitchFamily="18" charset="0"/>
-                      </a:rPr>
-                      <m:t>=1</m:t>
-                    </m:r>
-                  </m:oMath>
-                </a14:m>
-                <a:endParaRPr lang="en-US" b="0" dirty="0"/>
-              </a:p>
-              <a:p>
-                <a:pPr lvl="1"/>
-                <a14:m>
-                  <m:oMath xmlns:m="http://schemas.openxmlformats.org/officeDocument/2006/math">
-                    <m:r>
-                      <a:rPr lang="en-US" b="0" i="1" smtClean="0">
-                        <a:latin typeface="Cambria Math" panose="02040503050406030204" pitchFamily="18" charset="0"/>
-                      </a:rPr>
-                      <m:t>𝐹𝑃𝑅</m:t>
-                    </m:r>
-                    <m:r>
-                      <a:rPr lang="en-US" b="0" i="1" smtClean="0">
-                        <a:latin typeface="Cambria Math" panose="02040503050406030204" pitchFamily="18" charset="0"/>
-                      </a:rPr>
-                      <m:t>=</m:t>
-                    </m:r>
-                    <m:f>
-                      <m:fPr>
-                        <m:ctrlPr>
-                          <a:rPr lang="en-US" b="0" i="1" smtClean="0">
-                            <a:latin typeface="Cambria Math" panose="02040503050406030204" pitchFamily="18" charset="0"/>
-                          </a:rPr>
-                        </m:ctrlPr>
-                      </m:fPr>
-                      <m:num>
-                        <m:r>
-                          <a:rPr lang="en-US" b="0" i="1" smtClean="0">
-                            <a:latin typeface="Cambria Math" panose="02040503050406030204" pitchFamily="18" charset="0"/>
-                          </a:rPr>
-                          <m:t>350</m:t>
-                        </m:r>
-                      </m:num>
-                      <m:den>
-                        <m:r>
-                          <a:rPr lang="en-US" b="0" i="1" smtClean="0">
-                            <a:latin typeface="Cambria Math" panose="02040503050406030204" pitchFamily="18" charset="0"/>
-                          </a:rPr>
-                          <m:t>400</m:t>
-                        </m:r>
-                      </m:den>
-                    </m:f>
-                    <m:r>
-                      <a:rPr lang="en-US" b="0" i="1" smtClean="0">
-                        <a:latin typeface="Cambria Math" panose="02040503050406030204" pitchFamily="18" charset="0"/>
-                      </a:rPr>
-                      <m:t>=0.875</m:t>
-                    </m:r>
-                  </m:oMath>
-                </a14:m>
-                <a:endParaRPr lang="en-US" dirty="0"/>
-              </a:p>
-            </p:txBody>
-          </p:sp>
-        </mc:Choice>
-        <mc:Fallback xmlns="">
-          <p:sp>
-            <p:nvSpPr>
-              <p:cNvPr id="3" name="Content Placeholder 2">
-                <a:extLst>
-                  <a:ext uri="{FF2B5EF4-FFF2-40B4-BE49-F238E27FC236}">
-                    <a16:creationId xmlns:a16="http://schemas.microsoft.com/office/drawing/2014/main" id="{69FEC08B-830D-DDAD-7E2A-74533C9D636A}"/>
-                  </a:ext>
-                </a:extLst>
-              </p:cNvPr>
-              <p:cNvSpPr>
-                <a:spLocks noGrp="1" noRot="1" noChangeAspect="1" noMove="1" noResize="1" noEditPoints="1" noAdjustHandles="1" noChangeArrowheads="1" noChangeShapeType="1" noTextEdit="1"/>
-              </p:cNvSpPr>
-              <p:nvPr>
-                <p:ph idx="1"/>
-              </p:nvPr>
-            </p:nvSpPr>
-            <p:spPr>
-              <a:xfrm>
-                <a:off x="838200" y="1825625"/>
-                <a:ext cx="4342466" cy="4351338"/>
-              </a:xfrm>
-              <a:blipFill>
-                <a:blip r:embed="rId2"/>
-                <a:stretch>
-                  <a:fillRect l="-2528" t="-2381"/>
-                </a:stretch>
-              </a:blipFill>
-            </p:spPr>
-            <p:txBody>
-              <a:bodyPr/>
-              <a:lstStyle/>
-              <a:p>
-                <a:r>
-                  <a:rPr lang="en-US">
-                    <a:noFill/>
-                  </a:rPr>
-                  <a:t> </a:t>
-                </a:r>
-              </a:p>
-            </p:txBody>
-          </p:sp>
-        </mc:Fallback>
-      </mc:AlternateContent>
-      <p:pic>
-        <p:nvPicPr>
-          <p:cNvPr id="4" name="Picture 2">
-            <a:extLst>
-              <a:ext uri="{FF2B5EF4-FFF2-40B4-BE49-F238E27FC236}">
-                <a16:creationId xmlns:a16="http://schemas.microsoft.com/office/drawing/2014/main" id="{A1F17147-DC3E-3B8B-1D59-C318551DB2C4}"/>
-              </a:ext>
-            </a:extLst>
-          </p:cNvPr>
-          <p:cNvPicPr>
-            <a:picLocks noChangeAspect="1" noChangeArrowheads="1"/>
-          </p:cNvPicPr>
-          <p:nvPr/>
-        </p:nvPicPr>
-        <p:blipFill>
-          <a:blip r:embed="rId3">
-            <a:alphaModFix amt="57000"/>
-            <a:extLst>
-              <a:ext uri="{28A0092B-C50C-407E-A947-70E740481C1C}">
-                <a14:useLocalDpi xmlns:a14="http://schemas.microsoft.com/office/drawing/2010/main" val="0"/>
-              </a:ext>
-            </a:extLst>
-          </a:blip>
-          <a:srcRect/>
-          <a:stretch>
-            <a:fillRect/>
-          </a:stretch>
-        </p:blipFill>
-        <p:spPr bwMode="auto">
-          <a:xfrm>
-            <a:off x="5742804" y="2245421"/>
-            <a:ext cx="5946616" cy="3418265"/>
-          </a:xfrm>
-          <a:prstGeom prst="rect">
-            <a:avLst/>
-          </a:prstGeom>
-          <a:noFill/>
-          <a:extLst>
-            <a:ext uri="{909E8E84-426E-40DD-AFC4-6F175D3DCCD1}">
-              <a14:hiddenFill xmlns:a14="http://schemas.microsoft.com/office/drawing/2010/main">
-                <a:solidFill>
-                  <a:srgbClr val="FFFFFF"/>
-                </a:solidFill>
-              </a14:hiddenFill>
-            </a:ext>
-          </a:extLst>
-        </p:spPr>
-      </p:pic>
-      <p:cxnSp>
-        <p:nvCxnSpPr>
-          <p:cNvPr id="5" name="Straight Connector 4">
-            <a:extLst>
-              <a:ext uri="{FF2B5EF4-FFF2-40B4-BE49-F238E27FC236}">
-                <a16:creationId xmlns:a16="http://schemas.microsoft.com/office/drawing/2014/main" id="{93AC20D3-2C9A-84D7-6ACD-F099213C501D}"/>
-              </a:ext>
-            </a:extLst>
-          </p:cNvPr>
-          <p:cNvCxnSpPr>
-            <a:cxnSpLocks/>
-          </p:cNvCxnSpPr>
-          <p:nvPr/>
-        </p:nvCxnSpPr>
-        <p:spPr>
-          <a:xfrm>
-            <a:off x="5976813" y="3617678"/>
-            <a:ext cx="5784351" cy="0"/>
-          </a:xfrm>
-          <a:prstGeom prst="line">
-            <a:avLst/>
-          </a:prstGeom>
-          <a:ln w="53975">
-            <a:solidFill>
-              <a:schemeClr val="accent6"/>
-            </a:solidFill>
-          </a:ln>
-        </p:spPr>
-        <p:style>
-          <a:lnRef idx="1">
-            <a:schemeClr val="accent1"/>
-          </a:lnRef>
-          <a:fillRef idx="0">
-            <a:schemeClr val="accent1"/>
-          </a:fillRef>
-          <a:effectRef idx="0">
-            <a:schemeClr val="accent1"/>
-          </a:effectRef>
-          <a:fontRef idx="minor">
-            <a:schemeClr val="tx1"/>
-          </a:fontRef>
-        </p:style>
-      </p:cxnSp>
-      <p:cxnSp>
-        <p:nvCxnSpPr>
-          <p:cNvPr id="6" name="Straight Connector 5">
-            <a:extLst>
-              <a:ext uri="{FF2B5EF4-FFF2-40B4-BE49-F238E27FC236}">
-                <a16:creationId xmlns:a16="http://schemas.microsoft.com/office/drawing/2014/main" id="{EAA8A685-36D2-3E5E-C9C7-05F762E8639B}"/>
-              </a:ext>
-            </a:extLst>
-          </p:cNvPr>
-          <p:cNvCxnSpPr>
-            <a:cxnSpLocks/>
-          </p:cNvCxnSpPr>
-          <p:nvPr/>
-        </p:nvCxnSpPr>
-        <p:spPr>
-          <a:xfrm>
-            <a:off x="5955299" y="4398570"/>
-            <a:ext cx="5784351" cy="0"/>
-          </a:xfrm>
-          <a:prstGeom prst="line">
-            <a:avLst/>
-          </a:prstGeom>
-          <a:ln w="53975">
-            <a:solidFill>
-              <a:schemeClr val="accent6"/>
-            </a:solidFill>
-          </a:ln>
-        </p:spPr>
-        <p:style>
-          <a:lnRef idx="1">
-            <a:schemeClr val="accent1"/>
-          </a:lnRef>
-          <a:fillRef idx="0">
-            <a:schemeClr val="accent1"/>
-          </a:fillRef>
-          <a:effectRef idx="0">
-            <a:schemeClr val="accent1"/>
-          </a:effectRef>
-          <a:fontRef idx="minor">
-            <a:schemeClr val="tx1"/>
-          </a:fontRef>
-        </p:style>
-      </p:cxnSp>
-      <p:cxnSp>
-        <p:nvCxnSpPr>
-          <p:cNvPr id="7" name="Straight Connector 6">
-            <a:extLst>
-              <a:ext uri="{FF2B5EF4-FFF2-40B4-BE49-F238E27FC236}">
-                <a16:creationId xmlns:a16="http://schemas.microsoft.com/office/drawing/2014/main" id="{B22E7F41-C3D3-0E39-7BDF-81D37816D9E1}"/>
-              </a:ext>
-            </a:extLst>
-          </p:cNvPr>
-          <p:cNvCxnSpPr>
-            <a:cxnSpLocks/>
-          </p:cNvCxnSpPr>
-          <p:nvPr/>
-        </p:nvCxnSpPr>
-        <p:spPr>
-          <a:xfrm flipV="1">
-            <a:off x="8040130" y="2352697"/>
-            <a:ext cx="0" cy="3193227"/>
-          </a:xfrm>
-          <a:prstGeom prst="line">
-            <a:avLst/>
-          </a:prstGeom>
-          <a:ln w="53975">
-            <a:solidFill>
-              <a:schemeClr val="accent6"/>
-            </a:solidFill>
-          </a:ln>
-        </p:spPr>
-        <p:style>
-          <a:lnRef idx="1">
-            <a:schemeClr val="accent1"/>
-          </a:lnRef>
-          <a:fillRef idx="0">
-            <a:schemeClr val="accent1"/>
-          </a:fillRef>
-          <a:effectRef idx="0">
-            <a:schemeClr val="accent1"/>
-          </a:effectRef>
-          <a:fontRef idx="minor">
-            <a:schemeClr val="tx1"/>
-          </a:fontRef>
-        </p:style>
-      </p:cxnSp>
-      <p:cxnSp>
-        <p:nvCxnSpPr>
-          <p:cNvPr id="8" name="Straight Connector 7">
-            <a:extLst>
-              <a:ext uri="{FF2B5EF4-FFF2-40B4-BE49-F238E27FC236}">
-                <a16:creationId xmlns:a16="http://schemas.microsoft.com/office/drawing/2014/main" id="{55A732EF-4B9F-E31C-EA68-E177A80DC2F6}"/>
-              </a:ext>
-            </a:extLst>
-          </p:cNvPr>
-          <p:cNvCxnSpPr>
-            <a:cxnSpLocks/>
-          </p:cNvCxnSpPr>
-          <p:nvPr/>
-        </p:nvCxnSpPr>
-        <p:spPr>
-          <a:xfrm>
-            <a:off x="9490372" y="2352697"/>
-            <a:ext cx="0" cy="3193227"/>
-          </a:xfrm>
-          <a:prstGeom prst="line">
-            <a:avLst/>
-          </a:prstGeom>
-          <a:ln w="53975">
-            <a:solidFill>
-              <a:schemeClr val="accent6"/>
-            </a:solidFill>
-          </a:ln>
-        </p:spPr>
-        <p:style>
-          <a:lnRef idx="1">
-            <a:schemeClr val="accent1"/>
-          </a:lnRef>
-          <a:fillRef idx="0">
-            <a:schemeClr val="accent1"/>
-          </a:fillRef>
-          <a:effectRef idx="0">
-            <a:schemeClr val="accent1"/>
-          </a:effectRef>
-          <a:fontRef idx="minor">
-            <a:schemeClr val="tx1"/>
-          </a:fontRef>
-        </p:style>
-      </p:cxnSp>
-      <p:sp>
-        <p:nvSpPr>
-          <p:cNvPr id="9" name="TextBox 8">
-            <a:extLst>
-              <a:ext uri="{FF2B5EF4-FFF2-40B4-BE49-F238E27FC236}">
-                <a16:creationId xmlns:a16="http://schemas.microsoft.com/office/drawing/2014/main" id="{040CA625-BB1A-13B1-ABE8-4A4FD9BD6FD9}"/>
-              </a:ext>
-            </a:extLst>
-          </p:cNvPr>
-          <p:cNvSpPr txBox="1"/>
-          <p:nvPr/>
-        </p:nvSpPr>
-        <p:spPr>
-          <a:xfrm>
-            <a:off x="6094818" y="2292535"/>
-            <a:ext cx="1519982" cy="584775"/>
-          </a:xfrm>
-          <a:prstGeom prst="rect">
-            <a:avLst/>
-          </a:prstGeom>
-          <a:noFill/>
-        </p:spPr>
-        <p:txBody>
-          <a:bodyPr wrap="square" rtlCol="0">
-            <a:spAutoFit/>
-          </a:bodyPr>
-          <a:lstStyle/>
-          <a:p>
-            <a:pPr marL="0" marR="0" lvl="0" indent="0" algn="l" defTabSz="914400" rtl="0" eaLnBrk="1" fontAlgn="auto" latinLnBrk="0" hangingPunct="1">
-              <a:lnSpc>
-                <a:spcPct val="100000"/>
-              </a:lnSpc>
-              <a:spcBef>
-                <a:spcPts val="0"/>
-              </a:spcBef>
-              <a:spcAft>
-                <a:spcPts val="0"/>
-              </a:spcAft>
-              <a:buClrTx/>
-              <a:buSzTx/>
-              <a:buFontTx/>
-              <a:buNone/>
-              <a:tabLst/>
-              <a:defRPr/>
-            </a:pPr>
-            <a:r>
-              <a:rPr kumimoji="0" lang="en-US" sz="3200" b="1" i="0" u="none" strike="noStrike" kern="1200" cap="none" spc="0" normalizeH="0" baseline="0" noProof="0" dirty="0">
-                <a:ln>
-                  <a:noFill/>
-                </a:ln>
-                <a:solidFill>
-                  <a:prstClr val="black"/>
-                </a:solidFill>
-                <a:effectLst/>
-                <a:uLnTx/>
-                <a:uFillTx/>
-                <a:latin typeface="Calibri" panose="020F0502020204030204"/>
-                <a:ea typeface="+mn-ea"/>
-                <a:cs typeface="+mn-cs"/>
-              </a:rPr>
-              <a:t>0.1825</a:t>
-            </a:r>
-          </a:p>
-        </p:txBody>
-      </p:sp>
-      <p:sp>
-        <p:nvSpPr>
-          <p:cNvPr id="10" name="TextBox 9">
-            <a:extLst>
-              <a:ext uri="{FF2B5EF4-FFF2-40B4-BE49-F238E27FC236}">
-                <a16:creationId xmlns:a16="http://schemas.microsoft.com/office/drawing/2014/main" id="{118F478A-C678-7216-1A9E-1D1A71C34AB9}"/>
-              </a:ext>
-            </a:extLst>
-          </p:cNvPr>
-          <p:cNvSpPr txBox="1"/>
-          <p:nvPr/>
-        </p:nvSpPr>
-        <p:spPr>
-          <a:xfrm>
-            <a:off x="8037572" y="3580290"/>
-            <a:ext cx="1093819" cy="584775"/>
-          </a:xfrm>
-          <a:prstGeom prst="rect">
-            <a:avLst/>
-          </a:prstGeom>
-          <a:noFill/>
-        </p:spPr>
-        <p:txBody>
-          <a:bodyPr wrap="square" rtlCol="0">
-            <a:spAutoFit/>
-          </a:bodyPr>
-          <a:lstStyle/>
-          <a:p>
-            <a:pPr marL="0" marR="0" lvl="0" indent="0" algn="l" defTabSz="914400" rtl="0" eaLnBrk="1" fontAlgn="auto" latinLnBrk="0" hangingPunct="1">
-              <a:lnSpc>
-                <a:spcPct val="100000"/>
-              </a:lnSpc>
-              <a:spcBef>
-                <a:spcPts val="0"/>
-              </a:spcBef>
-              <a:spcAft>
-                <a:spcPts val="0"/>
-              </a:spcAft>
-              <a:buClrTx/>
-              <a:buSzTx/>
-              <a:buFontTx/>
-              <a:buNone/>
-              <a:tabLst/>
-              <a:defRPr/>
-            </a:pPr>
-            <a:r>
-              <a:rPr kumimoji="0" lang="en-US" sz="3200" b="1" i="0" u="none" strike="noStrike" kern="1200" cap="none" spc="0" normalizeH="0" baseline="0" noProof="0" dirty="0">
-                <a:ln>
-                  <a:noFill/>
-                </a:ln>
-                <a:solidFill>
-                  <a:prstClr val="black"/>
-                </a:solidFill>
-                <a:effectLst/>
-                <a:uLnTx/>
-                <a:uFillTx/>
-                <a:latin typeface="Calibri" panose="020F0502020204030204"/>
-                <a:ea typeface="+mn-ea"/>
-                <a:cs typeface="+mn-cs"/>
-              </a:rPr>
-              <a:t>0.39</a:t>
-            </a:r>
-          </a:p>
-        </p:txBody>
-      </p:sp>
-      <p:sp>
-        <p:nvSpPr>
-          <p:cNvPr id="11" name="TextBox 10">
-            <a:extLst>
-              <a:ext uri="{FF2B5EF4-FFF2-40B4-BE49-F238E27FC236}">
-                <a16:creationId xmlns:a16="http://schemas.microsoft.com/office/drawing/2014/main" id="{CBD2BC6D-E002-76EA-F0A5-BD206B010518}"/>
-              </a:ext>
-            </a:extLst>
-          </p:cNvPr>
-          <p:cNvSpPr txBox="1"/>
-          <p:nvPr/>
-        </p:nvSpPr>
-        <p:spPr>
-          <a:xfrm>
-            <a:off x="8067704" y="2295305"/>
-            <a:ext cx="1519982" cy="584775"/>
-          </a:xfrm>
-          <a:prstGeom prst="rect">
-            <a:avLst/>
-          </a:prstGeom>
-          <a:noFill/>
-        </p:spPr>
-        <p:txBody>
-          <a:bodyPr wrap="square" rtlCol="0">
-            <a:spAutoFit/>
-          </a:bodyPr>
-          <a:lstStyle/>
-          <a:p>
-            <a:pPr marL="0" marR="0" lvl="0" indent="0" algn="l" defTabSz="914400" rtl="0" eaLnBrk="1" fontAlgn="auto" latinLnBrk="0" hangingPunct="1">
-              <a:lnSpc>
-                <a:spcPct val="100000"/>
-              </a:lnSpc>
-              <a:spcBef>
-                <a:spcPts val="0"/>
-              </a:spcBef>
-              <a:spcAft>
-                <a:spcPts val="0"/>
-              </a:spcAft>
-              <a:buClrTx/>
-              <a:buSzTx/>
-              <a:buFontTx/>
-              <a:buNone/>
-              <a:tabLst/>
-              <a:defRPr/>
-            </a:pPr>
-            <a:r>
-              <a:rPr kumimoji="0" lang="en-US" sz="3200" b="1" i="0" u="none" strike="noStrike" kern="1200" cap="none" spc="0" normalizeH="0" baseline="0" noProof="0" dirty="0">
-                <a:ln>
-                  <a:noFill/>
-                </a:ln>
-                <a:solidFill>
-                  <a:prstClr val="black"/>
-                </a:solidFill>
-                <a:effectLst/>
-                <a:uLnTx/>
-                <a:uFillTx/>
-                <a:latin typeface="Calibri" panose="020F0502020204030204"/>
-                <a:ea typeface="+mn-ea"/>
-                <a:cs typeface="+mn-cs"/>
-              </a:rPr>
-              <a:t>0.165</a:t>
-            </a:r>
-          </a:p>
-        </p:txBody>
-      </p:sp>
-      <p:sp>
-        <p:nvSpPr>
-          <p:cNvPr id="12" name="TextBox 11">
-            <a:extLst>
-              <a:ext uri="{FF2B5EF4-FFF2-40B4-BE49-F238E27FC236}">
-                <a16:creationId xmlns:a16="http://schemas.microsoft.com/office/drawing/2014/main" id="{0A68A798-D518-1DC1-10E2-C25421ACC8D2}"/>
-              </a:ext>
-            </a:extLst>
-          </p:cNvPr>
-          <p:cNvSpPr txBox="1"/>
-          <p:nvPr/>
-        </p:nvSpPr>
-        <p:spPr>
-          <a:xfrm>
-            <a:off x="8206317" y="4917004"/>
-            <a:ext cx="1519982" cy="584775"/>
-          </a:xfrm>
-          <a:prstGeom prst="rect">
-            <a:avLst/>
-          </a:prstGeom>
-          <a:noFill/>
-        </p:spPr>
-        <p:txBody>
-          <a:bodyPr wrap="square" rtlCol="0">
-            <a:spAutoFit/>
-          </a:bodyPr>
-          <a:lstStyle/>
-          <a:p>
-            <a:pPr marL="0" marR="0" lvl="0" indent="0" algn="l" defTabSz="914400" rtl="0" eaLnBrk="1" fontAlgn="auto" latinLnBrk="0" hangingPunct="1">
-              <a:lnSpc>
-                <a:spcPct val="100000"/>
-              </a:lnSpc>
-              <a:spcBef>
-                <a:spcPts val="0"/>
-              </a:spcBef>
-              <a:spcAft>
-                <a:spcPts val="0"/>
-              </a:spcAft>
-              <a:buClrTx/>
-              <a:buSzTx/>
-              <a:buFontTx/>
-              <a:buNone/>
-              <a:tabLst/>
-              <a:defRPr/>
-            </a:pPr>
-            <a:r>
-              <a:rPr kumimoji="0" lang="en-US" sz="3200" b="1" i="0" u="none" strike="noStrike" kern="1200" cap="none" spc="0" normalizeH="0" baseline="0" noProof="0" dirty="0">
-                <a:ln>
-                  <a:noFill/>
-                </a:ln>
-                <a:solidFill>
-                  <a:prstClr val="black"/>
-                </a:solidFill>
-                <a:effectLst/>
-                <a:uLnTx/>
-                <a:uFillTx/>
-                <a:latin typeface="Calibri" panose="020F0502020204030204"/>
-                <a:ea typeface="+mn-ea"/>
-                <a:cs typeface="+mn-cs"/>
-              </a:rPr>
-              <a:t>0.29</a:t>
-            </a:r>
-          </a:p>
-        </p:txBody>
-      </p:sp>
-      <p:sp>
-        <p:nvSpPr>
-          <p:cNvPr id="13" name="TextBox 12">
-            <a:extLst>
-              <a:ext uri="{FF2B5EF4-FFF2-40B4-BE49-F238E27FC236}">
-                <a16:creationId xmlns:a16="http://schemas.microsoft.com/office/drawing/2014/main" id="{5C579F48-E01D-589B-0AB6-222704EB2010}"/>
-              </a:ext>
-            </a:extLst>
-          </p:cNvPr>
-          <p:cNvSpPr txBox="1"/>
-          <p:nvPr/>
-        </p:nvSpPr>
-        <p:spPr>
-          <a:xfrm>
-            <a:off x="10383833" y="2302673"/>
-            <a:ext cx="1519982" cy="584775"/>
-          </a:xfrm>
-          <a:prstGeom prst="rect">
-            <a:avLst/>
-          </a:prstGeom>
-          <a:noFill/>
-        </p:spPr>
-        <p:txBody>
-          <a:bodyPr wrap="square" rtlCol="0">
-            <a:spAutoFit/>
-          </a:bodyPr>
-          <a:lstStyle/>
-          <a:p>
-            <a:pPr marL="0" marR="0" lvl="0" indent="0" algn="l" defTabSz="914400" rtl="0" eaLnBrk="1" fontAlgn="auto" latinLnBrk="0" hangingPunct="1">
-              <a:lnSpc>
-                <a:spcPct val="100000"/>
-              </a:lnSpc>
-              <a:spcBef>
-                <a:spcPts val="0"/>
-              </a:spcBef>
-              <a:spcAft>
-                <a:spcPts val="0"/>
-              </a:spcAft>
-              <a:buClrTx/>
-              <a:buSzTx/>
-              <a:buFontTx/>
-              <a:buNone/>
-              <a:tabLst/>
-              <a:defRPr/>
-            </a:pPr>
-            <a:r>
-              <a:rPr kumimoji="0" lang="en-US" sz="3200" b="1" i="0" u="none" strike="noStrike" kern="1200" cap="none" spc="0" normalizeH="0" baseline="0" noProof="0" dirty="0">
-                <a:ln>
-                  <a:noFill/>
-                </a:ln>
-                <a:solidFill>
-                  <a:prstClr val="black"/>
-                </a:solidFill>
-                <a:effectLst/>
-                <a:uLnTx/>
-                <a:uFillTx/>
-                <a:latin typeface="Calibri" panose="020F0502020204030204"/>
-                <a:ea typeface="+mn-ea"/>
-                <a:cs typeface="+mn-cs"/>
-              </a:rPr>
-              <a:t>0.1825</a:t>
-            </a:r>
-          </a:p>
-        </p:txBody>
-      </p:sp>
-      <p:sp>
-        <p:nvSpPr>
-          <p:cNvPr id="14" name="TextBox 13">
-            <a:extLst>
-              <a:ext uri="{FF2B5EF4-FFF2-40B4-BE49-F238E27FC236}">
-                <a16:creationId xmlns:a16="http://schemas.microsoft.com/office/drawing/2014/main" id="{A714FC9D-B733-CF92-4051-4618106C7A9B}"/>
-              </a:ext>
-            </a:extLst>
-          </p:cNvPr>
-          <p:cNvSpPr txBox="1"/>
-          <p:nvPr/>
-        </p:nvSpPr>
-        <p:spPr>
-          <a:xfrm>
-            <a:off x="6064616" y="3661364"/>
-            <a:ext cx="1519982" cy="584775"/>
-          </a:xfrm>
-          <a:prstGeom prst="rect">
-            <a:avLst/>
-          </a:prstGeom>
-          <a:noFill/>
-        </p:spPr>
-        <p:txBody>
-          <a:bodyPr wrap="square" rtlCol="0">
-            <a:spAutoFit/>
-          </a:bodyPr>
-          <a:lstStyle/>
-          <a:p>
-            <a:pPr marL="0" marR="0" lvl="0" indent="0" algn="l" defTabSz="914400" rtl="0" eaLnBrk="1" fontAlgn="auto" latinLnBrk="0" hangingPunct="1">
-              <a:lnSpc>
-                <a:spcPct val="100000"/>
-              </a:lnSpc>
-              <a:spcBef>
-                <a:spcPts val="0"/>
-              </a:spcBef>
-              <a:spcAft>
-                <a:spcPts val="0"/>
-              </a:spcAft>
-              <a:buClrTx/>
-              <a:buSzTx/>
-              <a:buFontTx/>
-              <a:buNone/>
-              <a:tabLst/>
-              <a:defRPr/>
-            </a:pPr>
-            <a:r>
-              <a:rPr kumimoji="0" lang="en-US" sz="3200" b="1" i="0" u="none" strike="noStrike" kern="1200" cap="none" spc="0" normalizeH="0" baseline="0" noProof="0" dirty="0">
-                <a:ln>
-                  <a:noFill/>
-                </a:ln>
-                <a:solidFill>
-                  <a:prstClr val="black"/>
-                </a:solidFill>
-                <a:effectLst/>
-                <a:uLnTx/>
-                <a:uFillTx/>
-                <a:latin typeface="Calibri" panose="020F0502020204030204"/>
-                <a:ea typeface="+mn-ea"/>
-                <a:cs typeface="+mn-cs"/>
-              </a:rPr>
-              <a:t>0.3075</a:t>
-            </a:r>
-          </a:p>
-        </p:txBody>
-      </p:sp>
-      <p:sp>
-        <p:nvSpPr>
-          <p:cNvPr id="15" name="TextBox 14">
-            <a:extLst>
-              <a:ext uri="{FF2B5EF4-FFF2-40B4-BE49-F238E27FC236}">
-                <a16:creationId xmlns:a16="http://schemas.microsoft.com/office/drawing/2014/main" id="{20101914-8EC1-4BF3-D61A-9DE245186DAB}"/>
-              </a:ext>
-            </a:extLst>
-          </p:cNvPr>
-          <p:cNvSpPr txBox="1"/>
-          <p:nvPr/>
-        </p:nvSpPr>
-        <p:spPr>
-          <a:xfrm>
-            <a:off x="6025450" y="4868798"/>
-            <a:ext cx="1519982" cy="584775"/>
-          </a:xfrm>
-          <a:prstGeom prst="rect">
-            <a:avLst/>
-          </a:prstGeom>
-          <a:noFill/>
-        </p:spPr>
-        <p:txBody>
-          <a:bodyPr wrap="square" rtlCol="0">
-            <a:spAutoFit/>
-          </a:bodyPr>
-          <a:lstStyle/>
-          <a:p>
-            <a:pPr marL="0" marR="0" lvl="0" indent="0" algn="l" defTabSz="914400" rtl="0" eaLnBrk="1" fontAlgn="auto" latinLnBrk="0" hangingPunct="1">
-              <a:lnSpc>
-                <a:spcPct val="100000"/>
-              </a:lnSpc>
-              <a:spcBef>
-                <a:spcPts val="0"/>
-              </a:spcBef>
-              <a:spcAft>
-                <a:spcPts val="0"/>
-              </a:spcAft>
-              <a:buClrTx/>
-              <a:buSzTx/>
-              <a:buFontTx/>
-              <a:buNone/>
-              <a:tabLst/>
-              <a:defRPr/>
-            </a:pPr>
-            <a:r>
-              <a:rPr kumimoji="0" lang="en-US" sz="3200" b="1" i="0" u="none" strike="noStrike" kern="1200" cap="none" spc="0" normalizeH="0" baseline="0" noProof="0" dirty="0">
-                <a:ln>
-                  <a:noFill/>
-                </a:ln>
-                <a:solidFill>
-                  <a:prstClr val="black"/>
-                </a:solidFill>
-                <a:effectLst/>
-                <a:uLnTx/>
-                <a:uFillTx/>
-                <a:latin typeface="Calibri" panose="020F0502020204030204"/>
-                <a:ea typeface="+mn-ea"/>
-                <a:cs typeface="+mn-cs"/>
-              </a:rPr>
-              <a:t>0.2075</a:t>
-            </a:r>
-          </a:p>
-        </p:txBody>
-      </p:sp>
-      <p:sp>
-        <p:nvSpPr>
-          <p:cNvPr id="16" name="TextBox 15">
-            <a:extLst>
-              <a:ext uri="{FF2B5EF4-FFF2-40B4-BE49-F238E27FC236}">
-                <a16:creationId xmlns:a16="http://schemas.microsoft.com/office/drawing/2014/main" id="{B4F50B5D-8A6C-6E04-E31C-73711B146937}"/>
-              </a:ext>
-            </a:extLst>
-          </p:cNvPr>
-          <p:cNvSpPr txBox="1"/>
-          <p:nvPr/>
-        </p:nvSpPr>
-        <p:spPr>
-          <a:xfrm>
-            <a:off x="10379748" y="3695445"/>
-            <a:ext cx="1519982" cy="584775"/>
-          </a:xfrm>
-          <a:prstGeom prst="rect">
-            <a:avLst/>
-          </a:prstGeom>
-          <a:noFill/>
-        </p:spPr>
-        <p:txBody>
-          <a:bodyPr wrap="square" rtlCol="0">
-            <a:spAutoFit/>
-          </a:bodyPr>
-          <a:lstStyle/>
-          <a:p>
-            <a:pPr marL="0" marR="0" lvl="0" indent="0" algn="l" defTabSz="914400" rtl="0" eaLnBrk="1" fontAlgn="auto" latinLnBrk="0" hangingPunct="1">
-              <a:lnSpc>
-                <a:spcPct val="100000"/>
-              </a:lnSpc>
-              <a:spcBef>
-                <a:spcPts val="0"/>
-              </a:spcBef>
-              <a:spcAft>
-                <a:spcPts val="0"/>
-              </a:spcAft>
-              <a:buClrTx/>
-              <a:buSzTx/>
-              <a:buFontTx/>
-              <a:buNone/>
-              <a:tabLst/>
-              <a:defRPr/>
-            </a:pPr>
-            <a:r>
-              <a:rPr kumimoji="0" lang="en-US" sz="3200" b="1" i="0" u="none" strike="noStrike" kern="1200" cap="none" spc="0" normalizeH="0" baseline="0" noProof="0" dirty="0">
-                <a:ln>
-                  <a:noFill/>
-                </a:ln>
-                <a:solidFill>
-                  <a:prstClr val="black"/>
-                </a:solidFill>
-                <a:effectLst/>
-                <a:uLnTx/>
-                <a:uFillTx/>
-                <a:latin typeface="Calibri" panose="020F0502020204030204"/>
-                <a:ea typeface="+mn-ea"/>
-                <a:cs typeface="+mn-cs"/>
-              </a:rPr>
-              <a:t>0.3075</a:t>
-            </a:r>
-          </a:p>
-        </p:txBody>
-      </p:sp>
-      <p:sp>
-        <p:nvSpPr>
-          <p:cNvPr id="17" name="TextBox 16">
-            <a:extLst>
-              <a:ext uri="{FF2B5EF4-FFF2-40B4-BE49-F238E27FC236}">
-                <a16:creationId xmlns:a16="http://schemas.microsoft.com/office/drawing/2014/main" id="{85DD03A1-DDC1-30F8-F516-596279C46586}"/>
-              </a:ext>
-            </a:extLst>
-          </p:cNvPr>
-          <p:cNvSpPr txBox="1"/>
-          <p:nvPr/>
-        </p:nvSpPr>
-        <p:spPr>
-          <a:xfrm>
-            <a:off x="10368380" y="4882660"/>
-            <a:ext cx="1519982" cy="584775"/>
-          </a:xfrm>
-          <a:prstGeom prst="rect">
-            <a:avLst/>
-          </a:prstGeom>
-          <a:noFill/>
-        </p:spPr>
-        <p:txBody>
-          <a:bodyPr wrap="square" rtlCol="0">
-            <a:spAutoFit/>
-          </a:bodyPr>
-          <a:lstStyle/>
-          <a:p>
-            <a:pPr marL="0" marR="0" lvl="0" indent="0" algn="l" defTabSz="914400" rtl="0" eaLnBrk="1" fontAlgn="auto" latinLnBrk="0" hangingPunct="1">
-              <a:lnSpc>
-                <a:spcPct val="100000"/>
-              </a:lnSpc>
-              <a:spcBef>
-                <a:spcPts val="0"/>
-              </a:spcBef>
-              <a:spcAft>
-                <a:spcPts val="0"/>
-              </a:spcAft>
-              <a:buClrTx/>
-              <a:buSzTx/>
-              <a:buFontTx/>
-              <a:buNone/>
-              <a:tabLst/>
-              <a:defRPr/>
-            </a:pPr>
-            <a:r>
-              <a:rPr kumimoji="0" lang="en-US" sz="3200" b="1" i="0" u="none" strike="noStrike" kern="1200" cap="none" spc="0" normalizeH="0" baseline="0" noProof="0" dirty="0">
-                <a:ln>
-                  <a:noFill/>
-                </a:ln>
-                <a:solidFill>
-                  <a:prstClr val="black"/>
-                </a:solidFill>
-                <a:effectLst/>
-                <a:uLnTx/>
-                <a:uFillTx/>
-                <a:latin typeface="Calibri" panose="020F0502020204030204"/>
-                <a:ea typeface="+mn-ea"/>
-                <a:cs typeface="+mn-cs"/>
-              </a:rPr>
-              <a:t>0.2075</a:t>
-            </a:r>
-          </a:p>
-        </p:txBody>
-      </p:sp>
-    </p:spTree>
-    <p:extLst>
-      <p:ext uri="{BB962C8B-B14F-4D97-AF65-F5344CB8AC3E}">
-        <p14:creationId xmlns:p14="http://schemas.microsoft.com/office/powerpoint/2010/main" val="3135316569"/>
-      </p:ext>
-    </p:extLst>
-  </p:cSld>
-  <p:clrMapOvr>
-    <a:masterClrMapping/>
-  </p:clrMapOvr>
-</p:sld>
-</file>
-
-<file path=ppt/slides/slide15.xml><?xml version="1.0" encoding="utf-8"?>
-<p:sld xmlns:a="http://schemas.openxmlformats.org/drawingml/2006/main" xmlns:r="http://schemas.openxmlformats.org/officeDocument/2006/relationships" xmlns:p="http://schemas.openxmlformats.org/presentationml/2006/main">
-  <p:cSld>
-    <p:spTree>
-      <p:nvGrpSpPr>
-        <p:cNvPr id="1" name=""/>
-        <p:cNvGrpSpPr/>
-        <p:nvPr/>
-      </p:nvGrpSpPr>
-      <p:grpSpPr>
-        <a:xfrm>
-          <a:off x="0" y="0"/>
-          <a:ext cx="0" cy="0"/>
-          <a:chOff x="0" y="0"/>
-          <a:chExt cx="0" cy="0"/>
-        </a:xfrm>
-      </p:grpSpPr>
-      <p:sp>
-        <p:nvSpPr>
-          <p:cNvPr id="2" name="Title 1">
-            <a:extLst>
-              <a:ext uri="{FF2B5EF4-FFF2-40B4-BE49-F238E27FC236}">
-                <a16:creationId xmlns:a16="http://schemas.microsoft.com/office/drawing/2014/main" id="{38AD36AB-AA77-30AC-1262-AAB8697C7AEC}"/>
-              </a:ext>
-            </a:extLst>
-          </p:cNvPr>
-          <p:cNvSpPr>
-            <a:spLocks noGrp="1"/>
-          </p:cNvSpPr>
-          <p:nvPr>
-            <p:ph type="title"/>
-          </p:nvPr>
-        </p:nvSpPr>
-        <p:spPr/>
-        <p:txBody>
-          <a:bodyPr/>
-          <a:lstStyle/>
-          <a:p>
-            <a:r>
-              <a:rPr lang="en-US" dirty="0"/>
-              <a:t>Practice Computing AUC</a:t>
-            </a:r>
-          </a:p>
-        </p:txBody>
-      </p:sp>
-      <mc:AlternateContent xmlns:mc="http://schemas.openxmlformats.org/markup-compatibility/2006" xmlns:a14="http://schemas.microsoft.com/office/drawing/2010/main">
-        <mc:Choice Requires="a14">
-          <p:sp>
-            <p:nvSpPr>
-              <p:cNvPr id="3" name="Content Placeholder 2">
-                <a:extLst>
-                  <a:ext uri="{FF2B5EF4-FFF2-40B4-BE49-F238E27FC236}">
-                    <a16:creationId xmlns:a16="http://schemas.microsoft.com/office/drawing/2014/main" id="{69FEC08B-830D-DDAD-7E2A-74533C9D636A}"/>
-                  </a:ext>
-                </a:extLst>
-              </p:cNvPr>
-              <p:cNvSpPr>
-                <a:spLocks noGrp="1"/>
-              </p:cNvSpPr>
-              <p:nvPr>
-                <p:ph idx="1"/>
-              </p:nvPr>
-            </p:nvSpPr>
-            <p:spPr>
-              <a:xfrm>
-                <a:off x="838200" y="1825625"/>
-                <a:ext cx="4342466" cy="4351338"/>
-              </a:xfrm>
-            </p:spPr>
-            <p:txBody>
-              <a:bodyPr/>
-              <a:lstStyle/>
-              <a:p>
-                <a:r>
-                  <a:rPr lang="en-US" dirty="0"/>
-                  <a:t>Second threshold is 0.19</a:t>
-                </a:r>
-              </a:p>
-              <a:p>
-                <a:pPr lvl="1"/>
-                <a14:m>
-                  <m:oMath xmlns:m="http://schemas.openxmlformats.org/officeDocument/2006/math">
-                    <m:r>
-                      <a:rPr lang="en-US" b="0" i="1" smtClean="0">
-                        <a:latin typeface="Cambria Math" panose="02040503050406030204" pitchFamily="18" charset="0"/>
-                      </a:rPr>
-                      <m:t>𝑇𝑃𝑅</m:t>
-                    </m:r>
-                    <m:r>
-                      <a:rPr lang="en-US" b="0" i="1" smtClean="0">
-                        <a:latin typeface="Cambria Math" panose="02040503050406030204" pitchFamily="18" charset="0"/>
-                      </a:rPr>
-                      <m:t>=</m:t>
-                    </m:r>
-                    <m:f>
-                      <m:fPr>
-                        <m:ctrlPr>
-                          <a:rPr lang="en-US" b="0" i="1" smtClean="0">
-                            <a:latin typeface="Cambria Math" panose="02040503050406030204" pitchFamily="18" charset="0"/>
-                          </a:rPr>
-                        </m:ctrlPr>
-                      </m:fPr>
-                      <m:num>
-                        <m:r>
-                          <a:rPr lang="en-US" b="0" i="1" smtClean="0">
-                            <a:latin typeface="Cambria Math" panose="02040503050406030204" pitchFamily="18" charset="0"/>
-                          </a:rPr>
-                          <m:t>50</m:t>
-                        </m:r>
-                      </m:num>
-                      <m:den>
-                        <m:r>
-                          <a:rPr lang="en-US" b="0" i="1" smtClean="0">
-                            <a:latin typeface="Cambria Math" panose="02040503050406030204" pitchFamily="18" charset="0"/>
-                          </a:rPr>
-                          <m:t>50</m:t>
-                        </m:r>
-                      </m:den>
-                    </m:f>
-                    <m:r>
-                      <a:rPr lang="en-US" b="0" i="1" smtClean="0">
-                        <a:latin typeface="Cambria Math" panose="02040503050406030204" pitchFamily="18" charset="0"/>
-                      </a:rPr>
-                      <m:t>=1</m:t>
-                    </m:r>
-                  </m:oMath>
-                </a14:m>
-                <a:endParaRPr lang="en-US" b="0" dirty="0"/>
-              </a:p>
-              <a:p>
-                <a:pPr lvl="1"/>
-                <a14:m>
-                  <m:oMath xmlns:m="http://schemas.openxmlformats.org/officeDocument/2006/math">
-                    <m:r>
-                      <a:rPr lang="en-US" b="0" i="1" smtClean="0">
-                        <a:latin typeface="Cambria Math" panose="02040503050406030204" pitchFamily="18" charset="0"/>
-                      </a:rPr>
-                      <m:t>𝐹𝑃𝑅</m:t>
-                    </m:r>
-                    <m:r>
-                      <a:rPr lang="en-US" b="0" i="1" smtClean="0">
-                        <a:latin typeface="Cambria Math" panose="02040503050406030204" pitchFamily="18" charset="0"/>
-                      </a:rPr>
-                      <m:t>=</m:t>
-                    </m:r>
-                    <m:f>
-                      <m:fPr>
-                        <m:ctrlPr>
-                          <a:rPr lang="en-US" b="0" i="1" smtClean="0">
-                            <a:latin typeface="Cambria Math" panose="02040503050406030204" pitchFamily="18" charset="0"/>
-                          </a:rPr>
-                        </m:ctrlPr>
-                      </m:fPr>
-                      <m:num>
-                        <m:r>
-                          <a:rPr lang="en-US" b="0" i="1" smtClean="0">
-                            <a:latin typeface="Cambria Math" panose="02040503050406030204" pitchFamily="18" charset="0"/>
-                          </a:rPr>
-                          <m:t>250</m:t>
-                        </m:r>
-                      </m:num>
-                      <m:den>
-                        <m:r>
-                          <a:rPr lang="en-US" b="0" i="1" smtClean="0">
-                            <a:latin typeface="Cambria Math" panose="02040503050406030204" pitchFamily="18" charset="0"/>
-                          </a:rPr>
-                          <m:t>400</m:t>
-                        </m:r>
-                      </m:den>
-                    </m:f>
-                    <m:r>
-                      <a:rPr lang="en-US" b="0" i="1" smtClean="0">
-                        <a:latin typeface="Cambria Math" panose="02040503050406030204" pitchFamily="18" charset="0"/>
-                      </a:rPr>
-                      <m:t>=0.625</m:t>
-                    </m:r>
-                  </m:oMath>
-                </a14:m>
-                <a:endParaRPr lang="en-US" dirty="0"/>
-              </a:p>
-            </p:txBody>
-          </p:sp>
-        </mc:Choice>
-        <mc:Fallback xmlns="">
-          <p:sp>
-            <p:nvSpPr>
-              <p:cNvPr id="3" name="Content Placeholder 2">
-                <a:extLst>
-                  <a:ext uri="{FF2B5EF4-FFF2-40B4-BE49-F238E27FC236}">
-                    <a16:creationId xmlns:a16="http://schemas.microsoft.com/office/drawing/2014/main" id="{69FEC08B-830D-DDAD-7E2A-74533C9D636A}"/>
-                  </a:ext>
-                </a:extLst>
-              </p:cNvPr>
-              <p:cNvSpPr>
-                <a:spLocks noGrp="1" noRot="1" noChangeAspect="1" noMove="1" noResize="1" noEditPoints="1" noAdjustHandles="1" noChangeArrowheads="1" noChangeShapeType="1" noTextEdit="1"/>
-              </p:cNvSpPr>
-              <p:nvPr>
-                <p:ph idx="1"/>
-              </p:nvPr>
-            </p:nvSpPr>
-            <p:spPr>
-              <a:xfrm>
-                <a:off x="838200" y="1825625"/>
-                <a:ext cx="4342466" cy="4351338"/>
-              </a:xfrm>
-              <a:blipFill>
-                <a:blip r:embed="rId2"/>
-                <a:stretch>
-                  <a:fillRect l="-2528" t="-2381"/>
-                </a:stretch>
-              </a:blipFill>
-            </p:spPr>
-            <p:txBody>
-              <a:bodyPr/>
-              <a:lstStyle/>
-              <a:p>
-                <a:r>
-                  <a:rPr lang="en-US">
-                    <a:noFill/>
-                  </a:rPr>
-                  <a:t> </a:t>
-                </a:r>
-              </a:p>
-            </p:txBody>
-          </p:sp>
-        </mc:Fallback>
-      </mc:AlternateContent>
-      <p:pic>
-        <p:nvPicPr>
-          <p:cNvPr id="4" name="Picture 2">
-            <a:extLst>
-              <a:ext uri="{FF2B5EF4-FFF2-40B4-BE49-F238E27FC236}">
-                <a16:creationId xmlns:a16="http://schemas.microsoft.com/office/drawing/2014/main" id="{A1F17147-DC3E-3B8B-1D59-C318551DB2C4}"/>
-              </a:ext>
-            </a:extLst>
-          </p:cNvPr>
-          <p:cNvPicPr>
-            <a:picLocks noChangeAspect="1" noChangeArrowheads="1"/>
-          </p:cNvPicPr>
-          <p:nvPr/>
-        </p:nvPicPr>
-        <p:blipFill>
-          <a:blip r:embed="rId3">
-            <a:alphaModFix amt="57000"/>
-            <a:extLst>
-              <a:ext uri="{28A0092B-C50C-407E-A947-70E740481C1C}">
-                <a14:useLocalDpi xmlns:a14="http://schemas.microsoft.com/office/drawing/2010/main" val="0"/>
-              </a:ext>
-            </a:extLst>
-          </a:blip>
-          <a:srcRect/>
-          <a:stretch>
-            <a:fillRect/>
-          </a:stretch>
-        </p:blipFill>
-        <p:spPr bwMode="auto">
-          <a:xfrm>
-            <a:off x="5742804" y="2245421"/>
-            <a:ext cx="5946616" cy="3418265"/>
-          </a:xfrm>
-          <a:prstGeom prst="rect">
-            <a:avLst/>
-          </a:prstGeom>
-          <a:noFill/>
-          <a:extLst>
-            <a:ext uri="{909E8E84-426E-40DD-AFC4-6F175D3DCCD1}">
-              <a14:hiddenFill xmlns:a14="http://schemas.microsoft.com/office/drawing/2010/main">
-                <a:solidFill>
-                  <a:srgbClr val="FFFFFF"/>
-                </a:solidFill>
-              </a14:hiddenFill>
-            </a:ext>
-          </a:extLst>
-        </p:spPr>
-      </p:pic>
-      <p:cxnSp>
-        <p:nvCxnSpPr>
-          <p:cNvPr id="5" name="Straight Connector 4">
-            <a:extLst>
-              <a:ext uri="{FF2B5EF4-FFF2-40B4-BE49-F238E27FC236}">
-                <a16:creationId xmlns:a16="http://schemas.microsoft.com/office/drawing/2014/main" id="{93AC20D3-2C9A-84D7-6ACD-F099213C501D}"/>
-              </a:ext>
-            </a:extLst>
-          </p:cNvPr>
-          <p:cNvCxnSpPr>
-            <a:cxnSpLocks/>
-          </p:cNvCxnSpPr>
-          <p:nvPr/>
-        </p:nvCxnSpPr>
-        <p:spPr>
-          <a:xfrm>
-            <a:off x="5976813" y="3617678"/>
-            <a:ext cx="5784351" cy="0"/>
-          </a:xfrm>
-          <a:prstGeom prst="line">
-            <a:avLst/>
-          </a:prstGeom>
-          <a:ln w="53975">
-            <a:solidFill>
-              <a:schemeClr val="accent6"/>
-            </a:solidFill>
-          </a:ln>
-        </p:spPr>
-        <p:style>
-          <a:lnRef idx="1">
-            <a:schemeClr val="accent1"/>
-          </a:lnRef>
-          <a:fillRef idx="0">
-            <a:schemeClr val="accent1"/>
-          </a:fillRef>
-          <a:effectRef idx="0">
-            <a:schemeClr val="accent1"/>
-          </a:effectRef>
-          <a:fontRef idx="minor">
-            <a:schemeClr val="tx1"/>
-          </a:fontRef>
-        </p:style>
-      </p:cxnSp>
-      <p:cxnSp>
-        <p:nvCxnSpPr>
-          <p:cNvPr id="6" name="Straight Connector 5">
-            <a:extLst>
-              <a:ext uri="{FF2B5EF4-FFF2-40B4-BE49-F238E27FC236}">
-                <a16:creationId xmlns:a16="http://schemas.microsoft.com/office/drawing/2014/main" id="{EAA8A685-36D2-3E5E-C9C7-05F762E8639B}"/>
-              </a:ext>
-            </a:extLst>
-          </p:cNvPr>
-          <p:cNvCxnSpPr>
-            <a:cxnSpLocks/>
-          </p:cNvCxnSpPr>
-          <p:nvPr/>
-        </p:nvCxnSpPr>
-        <p:spPr>
-          <a:xfrm>
-            <a:off x="5955299" y="4398570"/>
-            <a:ext cx="5784351" cy="0"/>
-          </a:xfrm>
-          <a:prstGeom prst="line">
-            <a:avLst/>
-          </a:prstGeom>
-          <a:ln w="53975">
-            <a:solidFill>
-              <a:schemeClr val="accent6"/>
-            </a:solidFill>
-          </a:ln>
-        </p:spPr>
-        <p:style>
-          <a:lnRef idx="1">
-            <a:schemeClr val="accent1"/>
-          </a:lnRef>
-          <a:fillRef idx="0">
-            <a:schemeClr val="accent1"/>
-          </a:fillRef>
-          <a:effectRef idx="0">
-            <a:schemeClr val="accent1"/>
-          </a:effectRef>
-          <a:fontRef idx="minor">
-            <a:schemeClr val="tx1"/>
-          </a:fontRef>
-        </p:style>
-      </p:cxnSp>
-      <p:cxnSp>
-        <p:nvCxnSpPr>
-          <p:cNvPr id="7" name="Straight Connector 6">
-            <a:extLst>
-              <a:ext uri="{FF2B5EF4-FFF2-40B4-BE49-F238E27FC236}">
-                <a16:creationId xmlns:a16="http://schemas.microsoft.com/office/drawing/2014/main" id="{B22E7F41-C3D3-0E39-7BDF-81D37816D9E1}"/>
-              </a:ext>
-            </a:extLst>
-          </p:cNvPr>
-          <p:cNvCxnSpPr>
-            <a:cxnSpLocks/>
-          </p:cNvCxnSpPr>
-          <p:nvPr/>
-        </p:nvCxnSpPr>
-        <p:spPr>
-          <a:xfrm flipV="1">
-            <a:off x="8040130" y="2352697"/>
-            <a:ext cx="0" cy="3193227"/>
-          </a:xfrm>
-          <a:prstGeom prst="line">
-            <a:avLst/>
-          </a:prstGeom>
-          <a:ln w="53975">
-            <a:solidFill>
-              <a:schemeClr val="accent6"/>
-            </a:solidFill>
-          </a:ln>
-        </p:spPr>
-        <p:style>
-          <a:lnRef idx="1">
-            <a:schemeClr val="accent1"/>
-          </a:lnRef>
-          <a:fillRef idx="0">
-            <a:schemeClr val="accent1"/>
-          </a:fillRef>
-          <a:effectRef idx="0">
-            <a:schemeClr val="accent1"/>
-          </a:effectRef>
-          <a:fontRef idx="minor">
-            <a:schemeClr val="tx1"/>
-          </a:fontRef>
-        </p:style>
-      </p:cxnSp>
-      <p:cxnSp>
-        <p:nvCxnSpPr>
-          <p:cNvPr id="8" name="Straight Connector 7">
-            <a:extLst>
-              <a:ext uri="{FF2B5EF4-FFF2-40B4-BE49-F238E27FC236}">
-                <a16:creationId xmlns:a16="http://schemas.microsoft.com/office/drawing/2014/main" id="{55A732EF-4B9F-E31C-EA68-E177A80DC2F6}"/>
-              </a:ext>
-            </a:extLst>
-          </p:cNvPr>
-          <p:cNvCxnSpPr>
-            <a:cxnSpLocks/>
-          </p:cNvCxnSpPr>
-          <p:nvPr/>
-        </p:nvCxnSpPr>
-        <p:spPr>
-          <a:xfrm>
-            <a:off x="9490372" y="2352697"/>
-            <a:ext cx="0" cy="3193227"/>
-          </a:xfrm>
-          <a:prstGeom prst="line">
-            <a:avLst/>
-          </a:prstGeom>
-          <a:ln w="53975">
-            <a:solidFill>
-              <a:schemeClr val="accent6"/>
-            </a:solidFill>
-          </a:ln>
-        </p:spPr>
-        <p:style>
-          <a:lnRef idx="1">
-            <a:schemeClr val="accent1"/>
-          </a:lnRef>
-          <a:fillRef idx="0">
-            <a:schemeClr val="accent1"/>
-          </a:fillRef>
-          <a:effectRef idx="0">
-            <a:schemeClr val="accent1"/>
-          </a:effectRef>
-          <a:fontRef idx="minor">
-            <a:schemeClr val="tx1"/>
-          </a:fontRef>
-        </p:style>
-      </p:cxnSp>
-      <p:sp>
-        <p:nvSpPr>
-          <p:cNvPr id="9" name="TextBox 8">
-            <a:extLst>
-              <a:ext uri="{FF2B5EF4-FFF2-40B4-BE49-F238E27FC236}">
-                <a16:creationId xmlns:a16="http://schemas.microsoft.com/office/drawing/2014/main" id="{040CA625-BB1A-13B1-ABE8-4A4FD9BD6FD9}"/>
-              </a:ext>
-            </a:extLst>
-          </p:cNvPr>
-          <p:cNvSpPr txBox="1"/>
-          <p:nvPr/>
-        </p:nvSpPr>
-        <p:spPr>
-          <a:xfrm>
-            <a:off x="6094818" y="2292535"/>
-            <a:ext cx="1519982" cy="584775"/>
-          </a:xfrm>
-          <a:prstGeom prst="rect">
-            <a:avLst/>
-          </a:prstGeom>
-          <a:noFill/>
-        </p:spPr>
-        <p:txBody>
-          <a:bodyPr wrap="square" rtlCol="0">
-            <a:spAutoFit/>
-          </a:bodyPr>
-          <a:lstStyle/>
-          <a:p>
-            <a:pPr marL="0" marR="0" lvl="0" indent="0" algn="l" defTabSz="914400" rtl="0" eaLnBrk="1" fontAlgn="auto" latinLnBrk="0" hangingPunct="1">
-              <a:lnSpc>
-                <a:spcPct val="100000"/>
-              </a:lnSpc>
-              <a:spcBef>
-                <a:spcPts val="0"/>
-              </a:spcBef>
-              <a:spcAft>
-                <a:spcPts val="0"/>
-              </a:spcAft>
-              <a:buClrTx/>
-              <a:buSzTx/>
-              <a:buFontTx/>
-              <a:buNone/>
-              <a:tabLst/>
-              <a:defRPr/>
-            </a:pPr>
-            <a:r>
-              <a:rPr kumimoji="0" lang="en-US" sz="3200" b="1" i="0" u="none" strike="noStrike" kern="1200" cap="none" spc="0" normalizeH="0" baseline="0" noProof="0" dirty="0">
-                <a:ln>
-                  <a:noFill/>
-                </a:ln>
-                <a:solidFill>
-                  <a:prstClr val="black"/>
-                </a:solidFill>
-                <a:effectLst/>
-                <a:uLnTx/>
-                <a:uFillTx/>
-                <a:latin typeface="Calibri" panose="020F0502020204030204"/>
-                <a:ea typeface="+mn-ea"/>
-                <a:cs typeface="+mn-cs"/>
-              </a:rPr>
-              <a:t>0.1825</a:t>
-            </a:r>
-          </a:p>
-        </p:txBody>
-      </p:sp>
-      <p:sp>
-        <p:nvSpPr>
-          <p:cNvPr id="10" name="TextBox 9">
-            <a:extLst>
-              <a:ext uri="{FF2B5EF4-FFF2-40B4-BE49-F238E27FC236}">
-                <a16:creationId xmlns:a16="http://schemas.microsoft.com/office/drawing/2014/main" id="{118F478A-C678-7216-1A9E-1D1A71C34AB9}"/>
-              </a:ext>
-            </a:extLst>
-          </p:cNvPr>
-          <p:cNvSpPr txBox="1"/>
-          <p:nvPr/>
-        </p:nvSpPr>
-        <p:spPr>
-          <a:xfrm>
-            <a:off x="8037572" y="3580290"/>
-            <a:ext cx="1093819" cy="584775"/>
-          </a:xfrm>
-          <a:prstGeom prst="rect">
-            <a:avLst/>
-          </a:prstGeom>
-          <a:noFill/>
-        </p:spPr>
-        <p:txBody>
-          <a:bodyPr wrap="square" rtlCol="0">
-            <a:spAutoFit/>
-          </a:bodyPr>
-          <a:lstStyle/>
-          <a:p>
-            <a:pPr marL="0" marR="0" lvl="0" indent="0" algn="l" defTabSz="914400" rtl="0" eaLnBrk="1" fontAlgn="auto" latinLnBrk="0" hangingPunct="1">
-              <a:lnSpc>
-                <a:spcPct val="100000"/>
-              </a:lnSpc>
-              <a:spcBef>
-                <a:spcPts val="0"/>
-              </a:spcBef>
-              <a:spcAft>
-                <a:spcPts val="0"/>
-              </a:spcAft>
-              <a:buClrTx/>
-              <a:buSzTx/>
-              <a:buFontTx/>
-              <a:buNone/>
-              <a:tabLst/>
-              <a:defRPr/>
-            </a:pPr>
-            <a:r>
-              <a:rPr kumimoji="0" lang="en-US" sz="3200" b="1" i="0" u="none" strike="noStrike" kern="1200" cap="none" spc="0" normalizeH="0" baseline="0" noProof="0" dirty="0">
-                <a:ln>
-                  <a:noFill/>
-                </a:ln>
-                <a:solidFill>
-                  <a:prstClr val="black"/>
-                </a:solidFill>
-                <a:effectLst/>
-                <a:uLnTx/>
-                <a:uFillTx/>
-                <a:latin typeface="Calibri" panose="020F0502020204030204"/>
-                <a:ea typeface="+mn-ea"/>
-                <a:cs typeface="+mn-cs"/>
-              </a:rPr>
-              <a:t>0.39</a:t>
-            </a:r>
-          </a:p>
-        </p:txBody>
-      </p:sp>
-      <p:sp>
-        <p:nvSpPr>
-          <p:cNvPr id="11" name="TextBox 10">
-            <a:extLst>
-              <a:ext uri="{FF2B5EF4-FFF2-40B4-BE49-F238E27FC236}">
-                <a16:creationId xmlns:a16="http://schemas.microsoft.com/office/drawing/2014/main" id="{CBD2BC6D-E002-76EA-F0A5-BD206B010518}"/>
-              </a:ext>
-            </a:extLst>
-          </p:cNvPr>
-          <p:cNvSpPr txBox="1"/>
-          <p:nvPr/>
-        </p:nvSpPr>
-        <p:spPr>
-          <a:xfrm>
-            <a:off x="8067704" y="2295305"/>
-            <a:ext cx="1519982" cy="584775"/>
-          </a:xfrm>
-          <a:prstGeom prst="rect">
-            <a:avLst/>
-          </a:prstGeom>
-          <a:noFill/>
-        </p:spPr>
-        <p:txBody>
-          <a:bodyPr wrap="square" rtlCol="0">
-            <a:spAutoFit/>
-          </a:bodyPr>
-          <a:lstStyle/>
-          <a:p>
-            <a:pPr marL="0" marR="0" lvl="0" indent="0" algn="l" defTabSz="914400" rtl="0" eaLnBrk="1" fontAlgn="auto" latinLnBrk="0" hangingPunct="1">
-              <a:lnSpc>
-                <a:spcPct val="100000"/>
-              </a:lnSpc>
-              <a:spcBef>
-                <a:spcPts val="0"/>
-              </a:spcBef>
-              <a:spcAft>
-                <a:spcPts val="0"/>
-              </a:spcAft>
-              <a:buClrTx/>
-              <a:buSzTx/>
-              <a:buFontTx/>
-              <a:buNone/>
-              <a:tabLst/>
-              <a:defRPr/>
-            </a:pPr>
-            <a:r>
-              <a:rPr kumimoji="0" lang="en-US" sz="3200" b="1" i="0" u="none" strike="noStrike" kern="1200" cap="none" spc="0" normalizeH="0" baseline="0" noProof="0" dirty="0">
-                <a:ln>
-                  <a:noFill/>
-                </a:ln>
-                <a:solidFill>
-                  <a:prstClr val="black"/>
-                </a:solidFill>
-                <a:effectLst/>
-                <a:uLnTx/>
-                <a:uFillTx/>
-                <a:latin typeface="Calibri" panose="020F0502020204030204"/>
-                <a:ea typeface="+mn-ea"/>
-                <a:cs typeface="+mn-cs"/>
-              </a:rPr>
-              <a:t>0.165</a:t>
-            </a:r>
-          </a:p>
-        </p:txBody>
-      </p:sp>
-      <p:sp>
-        <p:nvSpPr>
-          <p:cNvPr id="12" name="TextBox 11">
-            <a:extLst>
-              <a:ext uri="{FF2B5EF4-FFF2-40B4-BE49-F238E27FC236}">
-                <a16:creationId xmlns:a16="http://schemas.microsoft.com/office/drawing/2014/main" id="{0A68A798-D518-1DC1-10E2-C25421ACC8D2}"/>
-              </a:ext>
-            </a:extLst>
-          </p:cNvPr>
-          <p:cNvSpPr txBox="1"/>
-          <p:nvPr/>
-        </p:nvSpPr>
-        <p:spPr>
-          <a:xfrm>
-            <a:off x="8206317" y="4917004"/>
-            <a:ext cx="1519982" cy="584775"/>
-          </a:xfrm>
-          <a:prstGeom prst="rect">
-            <a:avLst/>
-          </a:prstGeom>
-          <a:noFill/>
-        </p:spPr>
-        <p:txBody>
-          <a:bodyPr wrap="square" rtlCol="0">
-            <a:spAutoFit/>
-          </a:bodyPr>
-          <a:lstStyle/>
-          <a:p>
-            <a:pPr marL="0" marR="0" lvl="0" indent="0" algn="l" defTabSz="914400" rtl="0" eaLnBrk="1" fontAlgn="auto" latinLnBrk="0" hangingPunct="1">
-              <a:lnSpc>
-                <a:spcPct val="100000"/>
-              </a:lnSpc>
-              <a:spcBef>
-                <a:spcPts val="0"/>
-              </a:spcBef>
-              <a:spcAft>
-                <a:spcPts val="0"/>
-              </a:spcAft>
-              <a:buClrTx/>
-              <a:buSzTx/>
-              <a:buFontTx/>
-              <a:buNone/>
-              <a:tabLst/>
-              <a:defRPr/>
-            </a:pPr>
-            <a:r>
-              <a:rPr kumimoji="0" lang="en-US" sz="3200" b="1" i="0" u="none" strike="noStrike" kern="1200" cap="none" spc="0" normalizeH="0" baseline="0" noProof="0" dirty="0">
-                <a:ln>
-                  <a:noFill/>
-                </a:ln>
-                <a:solidFill>
-                  <a:prstClr val="black"/>
-                </a:solidFill>
-                <a:effectLst/>
-                <a:uLnTx/>
-                <a:uFillTx/>
-                <a:latin typeface="Calibri" panose="020F0502020204030204"/>
-                <a:ea typeface="+mn-ea"/>
-                <a:cs typeface="+mn-cs"/>
-              </a:rPr>
-              <a:t>0.29</a:t>
-            </a:r>
-          </a:p>
-        </p:txBody>
-      </p:sp>
-      <p:sp>
-        <p:nvSpPr>
-          <p:cNvPr id="13" name="TextBox 12">
-            <a:extLst>
-              <a:ext uri="{FF2B5EF4-FFF2-40B4-BE49-F238E27FC236}">
-                <a16:creationId xmlns:a16="http://schemas.microsoft.com/office/drawing/2014/main" id="{5C579F48-E01D-589B-0AB6-222704EB2010}"/>
-              </a:ext>
-            </a:extLst>
-          </p:cNvPr>
-          <p:cNvSpPr txBox="1"/>
-          <p:nvPr/>
-        </p:nvSpPr>
-        <p:spPr>
-          <a:xfrm>
-            <a:off x="10383833" y="2302673"/>
-            <a:ext cx="1519982" cy="584775"/>
-          </a:xfrm>
-          <a:prstGeom prst="rect">
-            <a:avLst/>
-          </a:prstGeom>
-          <a:noFill/>
-        </p:spPr>
-        <p:txBody>
-          <a:bodyPr wrap="square" rtlCol="0">
-            <a:spAutoFit/>
-          </a:bodyPr>
-          <a:lstStyle/>
-          <a:p>
-            <a:pPr marL="0" marR="0" lvl="0" indent="0" algn="l" defTabSz="914400" rtl="0" eaLnBrk="1" fontAlgn="auto" latinLnBrk="0" hangingPunct="1">
-              <a:lnSpc>
-                <a:spcPct val="100000"/>
-              </a:lnSpc>
-              <a:spcBef>
-                <a:spcPts val="0"/>
-              </a:spcBef>
-              <a:spcAft>
-                <a:spcPts val="0"/>
-              </a:spcAft>
-              <a:buClrTx/>
-              <a:buSzTx/>
-              <a:buFontTx/>
-              <a:buNone/>
-              <a:tabLst/>
-              <a:defRPr/>
-            </a:pPr>
-            <a:r>
-              <a:rPr kumimoji="0" lang="en-US" sz="3200" b="1" i="0" u="none" strike="noStrike" kern="1200" cap="none" spc="0" normalizeH="0" baseline="0" noProof="0" dirty="0">
-                <a:ln>
-                  <a:noFill/>
-                </a:ln>
-                <a:solidFill>
-                  <a:prstClr val="black"/>
-                </a:solidFill>
-                <a:effectLst/>
-                <a:uLnTx/>
-                <a:uFillTx/>
-                <a:latin typeface="Calibri" panose="020F0502020204030204"/>
-                <a:ea typeface="+mn-ea"/>
-                <a:cs typeface="+mn-cs"/>
-              </a:rPr>
-              <a:t>0.1825</a:t>
-            </a:r>
-          </a:p>
-        </p:txBody>
-      </p:sp>
-      <p:sp>
-        <p:nvSpPr>
-          <p:cNvPr id="14" name="TextBox 13">
-            <a:extLst>
-              <a:ext uri="{FF2B5EF4-FFF2-40B4-BE49-F238E27FC236}">
-                <a16:creationId xmlns:a16="http://schemas.microsoft.com/office/drawing/2014/main" id="{A714FC9D-B733-CF92-4051-4618106C7A9B}"/>
-              </a:ext>
-            </a:extLst>
-          </p:cNvPr>
-          <p:cNvSpPr txBox="1"/>
-          <p:nvPr/>
-        </p:nvSpPr>
-        <p:spPr>
-          <a:xfrm>
-            <a:off x="6064616" y="3661364"/>
-            <a:ext cx="1519982" cy="584775"/>
-          </a:xfrm>
-          <a:prstGeom prst="rect">
-            <a:avLst/>
-          </a:prstGeom>
-          <a:noFill/>
-        </p:spPr>
-        <p:txBody>
-          <a:bodyPr wrap="square" rtlCol="0">
-            <a:spAutoFit/>
-          </a:bodyPr>
-          <a:lstStyle/>
-          <a:p>
-            <a:pPr marL="0" marR="0" lvl="0" indent="0" algn="l" defTabSz="914400" rtl="0" eaLnBrk="1" fontAlgn="auto" latinLnBrk="0" hangingPunct="1">
-              <a:lnSpc>
-                <a:spcPct val="100000"/>
-              </a:lnSpc>
-              <a:spcBef>
-                <a:spcPts val="0"/>
-              </a:spcBef>
-              <a:spcAft>
-                <a:spcPts val="0"/>
-              </a:spcAft>
-              <a:buClrTx/>
-              <a:buSzTx/>
-              <a:buFontTx/>
-              <a:buNone/>
-              <a:tabLst/>
-              <a:defRPr/>
-            </a:pPr>
-            <a:r>
-              <a:rPr kumimoji="0" lang="en-US" sz="3200" b="1" i="0" u="none" strike="noStrike" kern="1200" cap="none" spc="0" normalizeH="0" baseline="0" noProof="0" dirty="0">
-                <a:ln>
-                  <a:noFill/>
-                </a:ln>
-                <a:solidFill>
-                  <a:prstClr val="black"/>
-                </a:solidFill>
-                <a:effectLst/>
-                <a:uLnTx/>
-                <a:uFillTx/>
-                <a:latin typeface="Calibri" panose="020F0502020204030204"/>
-                <a:ea typeface="+mn-ea"/>
-                <a:cs typeface="+mn-cs"/>
-              </a:rPr>
-              <a:t>0.3075</a:t>
-            </a:r>
-          </a:p>
-        </p:txBody>
-      </p:sp>
-      <p:sp>
-        <p:nvSpPr>
-          <p:cNvPr id="15" name="TextBox 14">
-            <a:extLst>
-              <a:ext uri="{FF2B5EF4-FFF2-40B4-BE49-F238E27FC236}">
-                <a16:creationId xmlns:a16="http://schemas.microsoft.com/office/drawing/2014/main" id="{20101914-8EC1-4BF3-D61A-9DE245186DAB}"/>
-              </a:ext>
-            </a:extLst>
-          </p:cNvPr>
-          <p:cNvSpPr txBox="1"/>
-          <p:nvPr/>
-        </p:nvSpPr>
-        <p:spPr>
-          <a:xfrm>
-            <a:off x="6025450" y="4868798"/>
-            <a:ext cx="1519982" cy="584775"/>
-          </a:xfrm>
-          <a:prstGeom prst="rect">
-            <a:avLst/>
-          </a:prstGeom>
-          <a:noFill/>
-        </p:spPr>
-        <p:txBody>
-          <a:bodyPr wrap="square" rtlCol="0">
-            <a:spAutoFit/>
-          </a:bodyPr>
-          <a:lstStyle/>
-          <a:p>
-            <a:pPr marL="0" marR="0" lvl="0" indent="0" algn="l" defTabSz="914400" rtl="0" eaLnBrk="1" fontAlgn="auto" latinLnBrk="0" hangingPunct="1">
-              <a:lnSpc>
-                <a:spcPct val="100000"/>
-              </a:lnSpc>
-              <a:spcBef>
-                <a:spcPts val="0"/>
-              </a:spcBef>
-              <a:spcAft>
-                <a:spcPts val="0"/>
-              </a:spcAft>
-              <a:buClrTx/>
-              <a:buSzTx/>
-              <a:buFontTx/>
-              <a:buNone/>
-              <a:tabLst/>
-              <a:defRPr/>
-            </a:pPr>
-            <a:r>
-              <a:rPr kumimoji="0" lang="en-US" sz="3200" b="1" i="0" u="none" strike="noStrike" kern="1200" cap="none" spc="0" normalizeH="0" baseline="0" noProof="0" dirty="0">
-                <a:ln>
-                  <a:noFill/>
-                </a:ln>
-                <a:solidFill>
-                  <a:prstClr val="black"/>
-                </a:solidFill>
-                <a:effectLst/>
-                <a:uLnTx/>
-                <a:uFillTx/>
-                <a:latin typeface="Calibri" panose="020F0502020204030204"/>
-                <a:ea typeface="+mn-ea"/>
-                <a:cs typeface="+mn-cs"/>
-              </a:rPr>
-              <a:t>0.2075</a:t>
-            </a:r>
-          </a:p>
-        </p:txBody>
-      </p:sp>
-      <p:sp>
-        <p:nvSpPr>
-          <p:cNvPr id="16" name="TextBox 15">
-            <a:extLst>
-              <a:ext uri="{FF2B5EF4-FFF2-40B4-BE49-F238E27FC236}">
-                <a16:creationId xmlns:a16="http://schemas.microsoft.com/office/drawing/2014/main" id="{B4F50B5D-8A6C-6E04-E31C-73711B146937}"/>
-              </a:ext>
-            </a:extLst>
-          </p:cNvPr>
-          <p:cNvSpPr txBox="1"/>
-          <p:nvPr/>
-        </p:nvSpPr>
-        <p:spPr>
-          <a:xfrm>
-            <a:off x="10379748" y="3695445"/>
-            <a:ext cx="1519982" cy="584775"/>
-          </a:xfrm>
-          <a:prstGeom prst="rect">
-            <a:avLst/>
-          </a:prstGeom>
-          <a:noFill/>
-        </p:spPr>
-        <p:txBody>
-          <a:bodyPr wrap="square" rtlCol="0">
-            <a:spAutoFit/>
-          </a:bodyPr>
-          <a:lstStyle/>
-          <a:p>
-            <a:pPr marL="0" marR="0" lvl="0" indent="0" algn="l" defTabSz="914400" rtl="0" eaLnBrk="1" fontAlgn="auto" latinLnBrk="0" hangingPunct="1">
-              <a:lnSpc>
-                <a:spcPct val="100000"/>
-              </a:lnSpc>
-              <a:spcBef>
-                <a:spcPts val="0"/>
-              </a:spcBef>
-              <a:spcAft>
-                <a:spcPts val="0"/>
-              </a:spcAft>
-              <a:buClrTx/>
-              <a:buSzTx/>
-              <a:buFontTx/>
-              <a:buNone/>
-              <a:tabLst/>
-              <a:defRPr/>
-            </a:pPr>
-            <a:r>
-              <a:rPr kumimoji="0" lang="en-US" sz="3200" b="1" i="0" u="none" strike="noStrike" kern="1200" cap="none" spc="0" normalizeH="0" baseline="0" noProof="0" dirty="0">
-                <a:ln>
-                  <a:noFill/>
-                </a:ln>
-                <a:solidFill>
-                  <a:prstClr val="black"/>
-                </a:solidFill>
-                <a:effectLst/>
-                <a:uLnTx/>
-                <a:uFillTx/>
-                <a:latin typeface="Calibri" panose="020F0502020204030204"/>
-                <a:ea typeface="+mn-ea"/>
-                <a:cs typeface="+mn-cs"/>
-              </a:rPr>
-              <a:t>0.3075</a:t>
-            </a:r>
-          </a:p>
-        </p:txBody>
-      </p:sp>
-      <p:sp>
-        <p:nvSpPr>
-          <p:cNvPr id="17" name="TextBox 16">
-            <a:extLst>
-              <a:ext uri="{FF2B5EF4-FFF2-40B4-BE49-F238E27FC236}">
-                <a16:creationId xmlns:a16="http://schemas.microsoft.com/office/drawing/2014/main" id="{85DD03A1-DDC1-30F8-F516-596279C46586}"/>
-              </a:ext>
-            </a:extLst>
-          </p:cNvPr>
-          <p:cNvSpPr txBox="1"/>
-          <p:nvPr/>
-        </p:nvSpPr>
-        <p:spPr>
-          <a:xfrm>
-            <a:off x="10368380" y="4882660"/>
-            <a:ext cx="1519982" cy="584775"/>
-          </a:xfrm>
-          <a:prstGeom prst="rect">
-            <a:avLst/>
-          </a:prstGeom>
-          <a:noFill/>
-        </p:spPr>
-        <p:txBody>
-          <a:bodyPr wrap="square" rtlCol="0">
-            <a:spAutoFit/>
-          </a:bodyPr>
-          <a:lstStyle/>
-          <a:p>
-            <a:pPr marL="0" marR="0" lvl="0" indent="0" algn="l" defTabSz="914400" rtl="0" eaLnBrk="1" fontAlgn="auto" latinLnBrk="0" hangingPunct="1">
-              <a:lnSpc>
-                <a:spcPct val="100000"/>
-              </a:lnSpc>
-              <a:spcBef>
-                <a:spcPts val="0"/>
-              </a:spcBef>
-              <a:spcAft>
-                <a:spcPts val="0"/>
-              </a:spcAft>
-              <a:buClrTx/>
-              <a:buSzTx/>
-              <a:buFontTx/>
-              <a:buNone/>
-              <a:tabLst/>
-              <a:defRPr/>
-            </a:pPr>
-            <a:r>
-              <a:rPr kumimoji="0" lang="en-US" sz="3200" b="1" i="0" u="none" strike="noStrike" kern="1200" cap="none" spc="0" normalizeH="0" baseline="0" noProof="0" dirty="0">
-                <a:ln>
-                  <a:noFill/>
-                </a:ln>
-                <a:solidFill>
-                  <a:prstClr val="black"/>
-                </a:solidFill>
-                <a:effectLst/>
-                <a:uLnTx/>
-                <a:uFillTx/>
-                <a:latin typeface="Calibri" panose="020F0502020204030204"/>
-                <a:ea typeface="+mn-ea"/>
-                <a:cs typeface="+mn-cs"/>
-              </a:rPr>
-              <a:t>0.2075</a:t>
-            </a:r>
-          </a:p>
-        </p:txBody>
-      </p:sp>
-    </p:spTree>
-    <p:extLst>
-      <p:ext uri="{BB962C8B-B14F-4D97-AF65-F5344CB8AC3E}">
-        <p14:creationId xmlns:p14="http://schemas.microsoft.com/office/powerpoint/2010/main" val="1404377639"/>
-      </p:ext>
-    </p:extLst>
-  </p:cSld>
-  <p:clrMapOvr>
-    <a:masterClrMapping/>
-  </p:clrMapOvr>
-</p:sld>
-</file>
-
-<file path=ppt/slides/slide16.xml><?xml version="1.0" encoding="utf-8"?>
-<p:sld xmlns:a="http://schemas.openxmlformats.org/drawingml/2006/main" xmlns:r="http://schemas.openxmlformats.org/officeDocument/2006/relationships" xmlns:p="http://schemas.openxmlformats.org/presentationml/2006/main">
-  <p:cSld>
-    <p:spTree>
-      <p:nvGrpSpPr>
-        <p:cNvPr id="1" name=""/>
-        <p:cNvGrpSpPr/>
-        <p:nvPr/>
-      </p:nvGrpSpPr>
-      <p:grpSpPr>
-        <a:xfrm>
-          <a:off x="0" y="0"/>
-          <a:ext cx="0" cy="0"/>
-          <a:chOff x="0" y="0"/>
-          <a:chExt cx="0" cy="0"/>
-        </a:xfrm>
-      </p:grpSpPr>
-      <p:sp>
-        <p:nvSpPr>
-          <p:cNvPr id="2" name="Title 1">
-            <a:extLst>
-              <a:ext uri="{FF2B5EF4-FFF2-40B4-BE49-F238E27FC236}">
-                <a16:creationId xmlns:a16="http://schemas.microsoft.com/office/drawing/2014/main" id="{38AD36AB-AA77-30AC-1262-AAB8697C7AEC}"/>
-              </a:ext>
-            </a:extLst>
-          </p:cNvPr>
-          <p:cNvSpPr>
-            <a:spLocks noGrp="1"/>
-          </p:cNvSpPr>
-          <p:nvPr>
-            <p:ph type="title"/>
-          </p:nvPr>
-        </p:nvSpPr>
-        <p:spPr/>
-        <p:txBody>
-          <a:bodyPr/>
-          <a:lstStyle/>
-          <a:p>
-            <a:r>
-              <a:rPr lang="en-US" dirty="0"/>
-              <a:t>Practice Computing AUC</a:t>
-            </a:r>
-          </a:p>
-        </p:txBody>
-      </p:sp>
-      <mc:AlternateContent xmlns:mc="http://schemas.openxmlformats.org/markup-compatibility/2006" xmlns:a14="http://schemas.microsoft.com/office/drawing/2010/main">
-        <mc:Choice Requires="a14">
-          <p:sp>
-            <p:nvSpPr>
-              <p:cNvPr id="3" name="Content Placeholder 2">
-                <a:extLst>
-                  <a:ext uri="{FF2B5EF4-FFF2-40B4-BE49-F238E27FC236}">
-                    <a16:creationId xmlns:a16="http://schemas.microsoft.com/office/drawing/2014/main" id="{69FEC08B-830D-DDAD-7E2A-74533C9D636A}"/>
-                  </a:ext>
-                </a:extLst>
-              </p:cNvPr>
-              <p:cNvSpPr>
-                <a:spLocks noGrp="1"/>
-              </p:cNvSpPr>
-              <p:nvPr>
-                <p:ph idx="1"/>
-              </p:nvPr>
-            </p:nvSpPr>
-            <p:spPr>
-              <a:xfrm>
-                <a:off x="838200" y="1825625"/>
-                <a:ext cx="4342466" cy="4351338"/>
-              </a:xfrm>
-            </p:spPr>
-            <p:txBody>
-              <a:bodyPr/>
-              <a:lstStyle/>
-              <a:p>
-                <a:r>
-                  <a:rPr lang="en-US" dirty="0"/>
-                  <a:t>Third threshold is 0.21</a:t>
-                </a:r>
-              </a:p>
-              <a:p>
-                <a:pPr lvl="1"/>
-                <a14:m>
-                  <m:oMath xmlns:m="http://schemas.openxmlformats.org/officeDocument/2006/math">
-                    <m:r>
-                      <a:rPr lang="en-US" b="0" i="1" smtClean="0">
-                        <a:latin typeface="Cambria Math" panose="02040503050406030204" pitchFamily="18" charset="0"/>
-                      </a:rPr>
-                      <m:t>𝑇𝑃𝑅</m:t>
-                    </m:r>
-                    <m:r>
-                      <a:rPr lang="en-US" b="0" i="1" smtClean="0">
-                        <a:latin typeface="Cambria Math" panose="02040503050406030204" pitchFamily="18" charset="0"/>
-                      </a:rPr>
-                      <m:t>=</m:t>
-                    </m:r>
-                    <m:f>
-                      <m:fPr>
-                        <m:ctrlPr>
-                          <a:rPr lang="en-US" b="0" i="1" smtClean="0">
-                            <a:latin typeface="Cambria Math" panose="02040503050406030204" pitchFamily="18" charset="0"/>
-                          </a:rPr>
-                        </m:ctrlPr>
-                      </m:fPr>
-                      <m:num>
-                        <m:r>
-                          <a:rPr lang="en-US" b="0" i="1" smtClean="0">
-                            <a:latin typeface="Cambria Math" panose="02040503050406030204" pitchFamily="18" charset="0"/>
-                          </a:rPr>
-                          <m:t>50</m:t>
-                        </m:r>
-                      </m:num>
-                      <m:den>
-                        <m:r>
-                          <a:rPr lang="en-US" b="0" i="1" smtClean="0">
-                            <a:latin typeface="Cambria Math" panose="02040503050406030204" pitchFamily="18" charset="0"/>
-                          </a:rPr>
-                          <m:t>50</m:t>
-                        </m:r>
-                      </m:den>
-                    </m:f>
-                    <m:r>
-                      <a:rPr lang="en-US" b="0" i="1" smtClean="0">
-                        <a:latin typeface="Cambria Math" panose="02040503050406030204" pitchFamily="18" charset="0"/>
-                      </a:rPr>
-                      <m:t>=1</m:t>
-                    </m:r>
-                  </m:oMath>
-                </a14:m>
-                <a:endParaRPr lang="en-US" b="0" dirty="0"/>
-              </a:p>
-              <a:p>
-                <a:pPr lvl="1"/>
-                <a14:m>
-                  <m:oMath xmlns:m="http://schemas.openxmlformats.org/officeDocument/2006/math">
-                    <m:r>
-                      <a:rPr lang="en-US" b="0" i="1" smtClean="0">
-                        <a:latin typeface="Cambria Math" panose="02040503050406030204" pitchFamily="18" charset="0"/>
-                      </a:rPr>
-                      <m:t>𝐹𝑃𝑅</m:t>
-                    </m:r>
-                    <m:r>
-                      <a:rPr lang="en-US" b="0" i="1" smtClean="0">
-                        <a:latin typeface="Cambria Math" panose="02040503050406030204" pitchFamily="18" charset="0"/>
-                      </a:rPr>
-                      <m:t>=</m:t>
-                    </m:r>
-                    <m:f>
-                      <m:fPr>
-                        <m:ctrlPr>
-                          <a:rPr lang="en-US" b="0" i="1" smtClean="0">
-                            <a:latin typeface="Cambria Math" panose="02040503050406030204" pitchFamily="18" charset="0"/>
-                          </a:rPr>
-                        </m:ctrlPr>
-                      </m:fPr>
-                      <m:num>
-                        <m:r>
-                          <a:rPr lang="en-US" b="0" i="1" smtClean="0">
-                            <a:latin typeface="Cambria Math" panose="02040503050406030204" pitchFamily="18" charset="0"/>
-                          </a:rPr>
-                          <m:t>150</m:t>
-                        </m:r>
-                      </m:num>
-                      <m:den>
-                        <m:r>
-                          <a:rPr lang="en-US" b="0" i="1" smtClean="0">
-                            <a:latin typeface="Cambria Math" panose="02040503050406030204" pitchFamily="18" charset="0"/>
-                          </a:rPr>
-                          <m:t>400</m:t>
-                        </m:r>
-                      </m:den>
-                    </m:f>
-                    <m:r>
-                      <a:rPr lang="en-US" b="0" i="1" smtClean="0">
-                        <a:latin typeface="Cambria Math" panose="02040503050406030204" pitchFamily="18" charset="0"/>
-                      </a:rPr>
-                      <m:t>=0.375</m:t>
-                    </m:r>
-                  </m:oMath>
-                </a14:m>
-                <a:endParaRPr lang="en-US" dirty="0"/>
-              </a:p>
-            </p:txBody>
-          </p:sp>
-        </mc:Choice>
-        <mc:Fallback xmlns="">
-          <p:sp>
-            <p:nvSpPr>
-              <p:cNvPr id="3" name="Content Placeholder 2">
-                <a:extLst>
-                  <a:ext uri="{FF2B5EF4-FFF2-40B4-BE49-F238E27FC236}">
-                    <a16:creationId xmlns:a16="http://schemas.microsoft.com/office/drawing/2014/main" id="{69FEC08B-830D-DDAD-7E2A-74533C9D636A}"/>
-                  </a:ext>
-                </a:extLst>
-              </p:cNvPr>
-              <p:cNvSpPr>
-                <a:spLocks noGrp="1" noRot="1" noChangeAspect="1" noMove="1" noResize="1" noEditPoints="1" noAdjustHandles="1" noChangeArrowheads="1" noChangeShapeType="1" noTextEdit="1"/>
-              </p:cNvSpPr>
-              <p:nvPr>
-                <p:ph idx="1"/>
-              </p:nvPr>
-            </p:nvSpPr>
-            <p:spPr>
-              <a:xfrm>
-                <a:off x="838200" y="1825625"/>
-                <a:ext cx="4342466" cy="4351338"/>
-              </a:xfrm>
-              <a:blipFill>
-                <a:blip r:embed="rId2"/>
-                <a:stretch>
-                  <a:fillRect l="-2528" t="-2381"/>
-                </a:stretch>
-              </a:blipFill>
-            </p:spPr>
-            <p:txBody>
-              <a:bodyPr/>
-              <a:lstStyle/>
-              <a:p>
-                <a:r>
-                  <a:rPr lang="en-US">
-                    <a:noFill/>
-                  </a:rPr>
-                  <a:t> </a:t>
-                </a:r>
-              </a:p>
-            </p:txBody>
-          </p:sp>
-        </mc:Fallback>
-      </mc:AlternateContent>
-      <p:pic>
-        <p:nvPicPr>
-          <p:cNvPr id="4" name="Picture 2">
-            <a:extLst>
-              <a:ext uri="{FF2B5EF4-FFF2-40B4-BE49-F238E27FC236}">
-                <a16:creationId xmlns:a16="http://schemas.microsoft.com/office/drawing/2014/main" id="{A1F17147-DC3E-3B8B-1D59-C318551DB2C4}"/>
-              </a:ext>
-            </a:extLst>
-          </p:cNvPr>
-          <p:cNvPicPr>
-            <a:picLocks noChangeAspect="1" noChangeArrowheads="1"/>
-          </p:cNvPicPr>
-          <p:nvPr/>
-        </p:nvPicPr>
-        <p:blipFill>
-          <a:blip r:embed="rId3">
-            <a:alphaModFix amt="57000"/>
-            <a:extLst>
-              <a:ext uri="{28A0092B-C50C-407E-A947-70E740481C1C}">
-                <a14:useLocalDpi xmlns:a14="http://schemas.microsoft.com/office/drawing/2010/main" val="0"/>
-              </a:ext>
-            </a:extLst>
-          </a:blip>
-          <a:srcRect/>
-          <a:stretch>
-            <a:fillRect/>
-          </a:stretch>
-        </p:blipFill>
-        <p:spPr bwMode="auto">
-          <a:xfrm>
-            <a:off x="5742804" y="2245421"/>
-            <a:ext cx="5946616" cy="3418265"/>
-          </a:xfrm>
-          <a:prstGeom prst="rect">
-            <a:avLst/>
-          </a:prstGeom>
-          <a:noFill/>
-          <a:extLst>
-            <a:ext uri="{909E8E84-426E-40DD-AFC4-6F175D3DCCD1}">
-              <a14:hiddenFill xmlns:a14="http://schemas.microsoft.com/office/drawing/2010/main">
-                <a:solidFill>
-                  <a:srgbClr val="FFFFFF"/>
-                </a:solidFill>
-              </a14:hiddenFill>
-            </a:ext>
-          </a:extLst>
-        </p:spPr>
-      </p:pic>
-      <p:cxnSp>
-        <p:nvCxnSpPr>
-          <p:cNvPr id="5" name="Straight Connector 4">
-            <a:extLst>
-              <a:ext uri="{FF2B5EF4-FFF2-40B4-BE49-F238E27FC236}">
-                <a16:creationId xmlns:a16="http://schemas.microsoft.com/office/drawing/2014/main" id="{93AC20D3-2C9A-84D7-6ACD-F099213C501D}"/>
-              </a:ext>
-            </a:extLst>
-          </p:cNvPr>
-          <p:cNvCxnSpPr>
-            <a:cxnSpLocks/>
-          </p:cNvCxnSpPr>
-          <p:nvPr/>
-        </p:nvCxnSpPr>
-        <p:spPr>
-          <a:xfrm>
-            <a:off x="5976813" y="3617678"/>
-            <a:ext cx="5784351" cy="0"/>
-          </a:xfrm>
-          <a:prstGeom prst="line">
-            <a:avLst/>
-          </a:prstGeom>
-          <a:ln w="53975">
-            <a:solidFill>
-              <a:schemeClr val="accent6"/>
-            </a:solidFill>
-          </a:ln>
-        </p:spPr>
-        <p:style>
-          <a:lnRef idx="1">
-            <a:schemeClr val="accent1"/>
-          </a:lnRef>
-          <a:fillRef idx="0">
-            <a:schemeClr val="accent1"/>
-          </a:fillRef>
-          <a:effectRef idx="0">
-            <a:schemeClr val="accent1"/>
-          </a:effectRef>
-          <a:fontRef idx="minor">
-            <a:schemeClr val="tx1"/>
-          </a:fontRef>
-        </p:style>
-      </p:cxnSp>
-      <p:cxnSp>
-        <p:nvCxnSpPr>
-          <p:cNvPr id="6" name="Straight Connector 5">
-            <a:extLst>
-              <a:ext uri="{FF2B5EF4-FFF2-40B4-BE49-F238E27FC236}">
-                <a16:creationId xmlns:a16="http://schemas.microsoft.com/office/drawing/2014/main" id="{EAA8A685-36D2-3E5E-C9C7-05F762E8639B}"/>
-              </a:ext>
-            </a:extLst>
-          </p:cNvPr>
-          <p:cNvCxnSpPr>
-            <a:cxnSpLocks/>
-          </p:cNvCxnSpPr>
-          <p:nvPr/>
-        </p:nvCxnSpPr>
-        <p:spPr>
-          <a:xfrm>
-            <a:off x="5955299" y="4398570"/>
-            <a:ext cx="5784351" cy="0"/>
-          </a:xfrm>
-          <a:prstGeom prst="line">
-            <a:avLst/>
-          </a:prstGeom>
-          <a:ln w="53975">
-            <a:solidFill>
-              <a:schemeClr val="accent6"/>
-            </a:solidFill>
-          </a:ln>
-        </p:spPr>
-        <p:style>
-          <a:lnRef idx="1">
-            <a:schemeClr val="accent1"/>
-          </a:lnRef>
-          <a:fillRef idx="0">
-            <a:schemeClr val="accent1"/>
-          </a:fillRef>
-          <a:effectRef idx="0">
-            <a:schemeClr val="accent1"/>
-          </a:effectRef>
-          <a:fontRef idx="minor">
-            <a:schemeClr val="tx1"/>
-          </a:fontRef>
-        </p:style>
-      </p:cxnSp>
-      <p:cxnSp>
-        <p:nvCxnSpPr>
-          <p:cNvPr id="7" name="Straight Connector 6">
-            <a:extLst>
-              <a:ext uri="{FF2B5EF4-FFF2-40B4-BE49-F238E27FC236}">
-                <a16:creationId xmlns:a16="http://schemas.microsoft.com/office/drawing/2014/main" id="{B22E7F41-C3D3-0E39-7BDF-81D37816D9E1}"/>
-              </a:ext>
-            </a:extLst>
-          </p:cNvPr>
-          <p:cNvCxnSpPr>
-            <a:cxnSpLocks/>
-          </p:cNvCxnSpPr>
-          <p:nvPr/>
-        </p:nvCxnSpPr>
-        <p:spPr>
-          <a:xfrm flipV="1">
-            <a:off x="8040130" y="2352697"/>
-            <a:ext cx="0" cy="3193227"/>
-          </a:xfrm>
-          <a:prstGeom prst="line">
-            <a:avLst/>
-          </a:prstGeom>
-          <a:ln w="53975">
-            <a:solidFill>
-              <a:schemeClr val="accent6"/>
-            </a:solidFill>
-          </a:ln>
-        </p:spPr>
-        <p:style>
-          <a:lnRef idx="1">
-            <a:schemeClr val="accent1"/>
-          </a:lnRef>
-          <a:fillRef idx="0">
-            <a:schemeClr val="accent1"/>
-          </a:fillRef>
-          <a:effectRef idx="0">
-            <a:schemeClr val="accent1"/>
-          </a:effectRef>
-          <a:fontRef idx="minor">
-            <a:schemeClr val="tx1"/>
-          </a:fontRef>
-        </p:style>
-      </p:cxnSp>
-      <p:cxnSp>
-        <p:nvCxnSpPr>
-          <p:cNvPr id="8" name="Straight Connector 7">
-            <a:extLst>
-              <a:ext uri="{FF2B5EF4-FFF2-40B4-BE49-F238E27FC236}">
-                <a16:creationId xmlns:a16="http://schemas.microsoft.com/office/drawing/2014/main" id="{55A732EF-4B9F-E31C-EA68-E177A80DC2F6}"/>
-              </a:ext>
-            </a:extLst>
-          </p:cNvPr>
-          <p:cNvCxnSpPr>
-            <a:cxnSpLocks/>
-          </p:cNvCxnSpPr>
-          <p:nvPr/>
-        </p:nvCxnSpPr>
-        <p:spPr>
-          <a:xfrm>
-            <a:off x="9490372" y="2352697"/>
-            <a:ext cx="0" cy="3193227"/>
-          </a:xfrm>
-          <a:prstGeom prst="line">
-            <a:avLst/>
-          </a:prstGeom>
-          <a:ln w="53975">
-            <a:solidFill>
-              <a:schemeClr val="accent6"/>
-            </a:solidFill>
-          </a:ln>
-        </p:spPr>
-        <p:style>
-          <a:lnRef idx="1">
-            <a:schemeClr val="accent1"/>
-          </a:lnRef>
-          <a:fillRef idx="0">
-            <a:schemeClr val="accent1"/>
-          </a:fillRef>
-          <a:effectRef idx="0">
-            <a:schemeClr val="accent1"/>
-          </a:effectRef>
-          <a:fontRef idx="minor">
-            <a:schemeClr val="tx1"/>
-          </a:fontRef>
-        </p:style>
-      </p:cxnSp>
-      <p:sp>
-        <p:nvSpPr>
-          <p:cNvPr id="9" name="TextBox 8">
-            <a:extLst>
-              <a:ext uri="{FF2B5EF4-FFF2-40B4-BE49-F238E27FC236}">
-                <a16:creationId xmlns:a16="http://schemas.microsoft.com/office/drawing/2014/main" id="{040CA625-BB1A-13B1-ABE8-4A4FD9BD6FD9}"/>
-              </a:ext>
-            </a:extLst>
-          </p:cNvPr>
-          <p:cNvSpPr txBox="1"/>
-          <p:nvPr/>
-        </p:nvSpPr>
-        <p:spPr>
-          <a:xfrm>
-            <a:off x="6094818" y="2292535"/>
-            <a:ext cx="1519982" cy="584775"/>
-          </a:xfrm>
-          <a:prstGeom prst="rect">
-            <a:avLst/>
-          </a:prstGeom>
-          <a:noFill/>
-        </p:spPr>
-        <p:txBody>
-          <a:bodyPr wrap="square" rtlCol="0">
-            <a:spAutoFit/>
-          </a:bodyPr>
-          <a:lstStyle/>
-          <a:p>
-            <a:pPr marL="0" marR="0" lvl="0" indent="0" algn="l" defTabSz="914400" rtl="0" eaLnBrk="1" fontAlgn="auto" latinLnBrk="0" hangingPunct="1">
-              <a:lnSpc>
-                <a:spcPct val="100000"/>
-              </a:lnSpc>
-              <a:spcBef>
-                <a:spcPts val="0"/>
-              </a:spcBef>
-              <a:spcAft>
-                <a:spcPts val="0"/>
-              </a:spcAft>
-              <a:buClrTx/>
-              <a:buSzTx/>
-              <a:buFontTx/>
-              <a:buNone/>
-              <a:tabLst/>
-              <a:defRPr/>
-            </a:pPr>
-            <a:r>
-              <a:rPr kumimoji="0" lang="en-US" sz="3200" b="1" i="0" u="none" strike="noStrike" kern="1200" cap="none" spc="0" normalizeH="0" baseline="0" noProof="0" dirty="0">
-                <a:ln>
-                  <a:noFill/>
-                </a:ln>
-                <a:solidFill>
-                  <a:prstClr val="black"/>
-                </a:solidFill>
-                <a:effectLst/>
-                <a:uLnTx/>
-                <a:uFillTx/>
-                <a:latin typeface="Calibri" panose="020F0502020204030204"/>
-                <a:ea typeface="+mn-ea"/>
-                <a:cs typeface="+mn-cs"/>
-              </a:rPr>
-              <a:t>0.1825</a:t>
-            </a:r>
-          </a:p>
-        </p:txBody>
-      </p:sp>
-      <p:sp>
-        <p:nvSpPr>
-          <p:cNvPr id="10" name="TextBox 9">
-            <a:extLst>
-              <a:ext uri="{FF2B5EF4-FFF2-40B4-BE49-F238E27FC236}">
-                <a16:creationId xmlns:a16="http://schemas.microsoft.com/office/drawing/2014/main" id="{118F478A-C678-7216-1A9E-1D1A71C34AB9}"/>
-              </a:ext>
-            </a:extLst>
-          </p:cNvPr>
-          <p:cNvSpPr txBox="1"/>
-          <p:nvPr/>
-        </p:nvSpPr>
-        <p:spPr>
-          <a:xfrm>
-            <a:off x="8037572" y="3580290"/>
-            <a:ext cx="1093819" cy="584775"/>
-          </a:xfrm>
-          <a:prstGeom prst="rect">
-            <a:avLst/>
-          </a:prstGeom>
-          <a:noFill/>
-        </p:spPr>
-        <p:txBody>
-          <a:bodyPr wrap="square" rtlCol="0">
-            <a:spAutoFit/>
-          </a:bodyPr>
-          <a:lstStyle/>
-          <a:p>
-            <a:pPr marL="0" marR="0" lvl="0" indent="0" algn="l" defTabSz="914400" rtl="0" eaLnBrk="1" fontAlgn="auto" latinLnBrk="0" hangingPunct="1">
-              <a:lnSpc>
-                <a:spcPct val="100000"/>
-              </a:lnSpc>
-              <a:spcBef>
-                <a:spcPts val="0"/>
-              </a:spcBef>
-              <a:spcAft>
-                <a:spcPts val="0"/>
-              </a:spcAft>
-              <a:buClrTx/>
-              <a:buSzTx/>
-              <a:buFontTx/>
-              <a:buNone/>
-              <a:tabLst/>
-              <a:defRPr/>
-            </a:pPr>
-            <a:r>
-              <a:rPr kumimoji="0" lang="en-US" sz="3200" b="1" i="0" u="none" strike="noStrike" kern="1200" cap="none" spc="0" normalizeH="0" baseline="0" noProof="0" dirty="0">
-                <a:ln>
-                  <a:noFill/>
-                </a:ln>
-                <a:solidFill>
-                  <a:prstClr val="black"/>
-                </a:solidFill>
-                <a:effectLst/>
-                <a:uLnTx/>
-                <a:uFillTx/>
-                <a:latin typeface="Calibri" panose="020F0502020204030204"/>
-                <a:ea typeface="+mn-ea"/>
-                <a:cs typeface="+mn-cs"/>
-              </a:rPr>
-              <a:t>0.39</a:t>
-            </a:r>
-          </a:p>
-        </p:txBody>
-      </p:sp>
-      <p:sp>
-        <p:nvSpPr>
-          <p:cNvPr id="11" name="TextBox 10">
-            <a:extLst>
-              <a:ext uri="{FF2B5EF4-FFF2-40B4-BE49-F238E27FC236}">
-                <a16:creationId xmlns:a16="http://schemas.microsoft.com/office/drawing/2014/main" id="{CBD2BC6D-E002-76EA-F0A5-BD206B010518}"/>
-              </a:ext>
-            </a:extLst>
-          </p:cNvPr>
-          <p:cNvSpPr txBox="1"/>
-          <p:nvPr/>
-        </p:nvSpPr>
-        <p:spPr>
-          <a:xfrm>
-            <a:off x="8067704" y="2295305"/>
-            <a:ext cx="1519982" cy="584775"/>
-          </a:xfrm>
-          <a:prstGeom prst="rect">
-            <a:avLst/>
-          </a:prstGeom>
-          <a:noFill/>
-        </p:spPr>
-        <p:txBody>
-          <a:bodyPr wrap="square" rtlCol="0">
-            <a:spAutoFit/>
-          </a:bodyPr>
-          <a:lstStyle/>
-          <a:p>
-            <a:pPr marL="0" marR="0" lvl="0" indent="0" algn="l" defTabSz="914400" rtl="0" eaLnBrk="1" fontAlgn="auto" latinLnBrk="0" hangingPunct="1">
-              <a:lnSpc>
-                <a:spcPct val="100000"/>
-              </a:lnSpc>
-              <a:spcBef>
-                <a:spcPts val="0"/>
-              </a:spcBef>
-              <a:spcAft>
-                <a:spcPts val="0"/>
-              </a:spcAft>
-              <a:buClrTx/>
-              <a:buSzTx/>
-              <a:buFontTx/>
-              <a:buNone/>
-              <a:tabLst/>
-              <a:defRPr/>
-            </a:pPr>
-            <a:r>
-              <a:rPr kumimoji="0" lang="en-US" sz="3200" b="1" i="0" u="none" strike="noStrike" kern="1200" cap="none" spc="0" normalizeH="0" baseline="0" noProof="0" dirty="0">
-                <a:ln>
-                  <a:noFill/>
-                </a:ln>
-                <a:solidFill>
-                  <a:prstClr val="black"/>
-                </a:solidFill>
-                <a:effectLst/>
-                <a:uLnTx/>
-                <a:uFillTx/>
-                <a:latin typeface="Calibri" panose="020F0502020204030204"/>
-                <a:ea typeface="+mn-ea"/>
-                <a:cs typeface="+mn-cs"/>
-              </a:rPr>
-              <a:t>0.165</a:t>
-            </a:r>
-          </a:p>
-        </p:txBody>
-      </p:sp>
-      <p:sp>
-        <p:nvSpPr>
-          <p:cNvPr id="12" name="TextBox 11">
-            <a:extLst>
-              <a:ext uri="{FF2B5EF4-FFF2-40B4-BE49-F238E27FC236}">
-                <a16:creationId xmlns:a16="http://schemas.microsoft.com/office/drawing/2014/main" id="{0A68A798-D518-1DC1-10E2-C25421ACC8D2}"/>
-              </a:ext>
-            </a:extLst>
-          </p:cNvPr>
-          <p:cNvSpPr txBox="1"/>
-          <p:nvPr/>
-        </p:nvSpPr>
-        <p:spPr>
-          <a:xfrm>
-            <a:off x="8206317" y="4917004"/>
-            <a:ext cx="1519982" cy="584775"/>
-          </a:xfrm>
-          <a:prstGeom prst="rect">
-            <a:avLst/>
-          </a:prstGeom>
-          <a:noFill/>
-        </p:spPr>
-        <p:txBody>
-          <a:bodyPr wrap="square" rtlCol="0">
-            <a:spAutoFit/>
-          </a:bodyPr>
-          <a:lstStyle/>
-          <a:p>
-            <a:pPr marL="0" marR="0" lvl="0" indent="0" algn="l" defTabSz="914400" rtl="0" eaLnBrk="1" fontAlgn="auto" latinLnBrk="0" hangingPunct="1">
-              <a:lnSpc>
-                <a:spcPct val="100000"/>
-              </a:lnSpc>
-              <a:spcBef>
-                <a:spcPts val="0"/>
-              </a:spcBef>
-              <a:spcAft>
-                <a:spcPts val="0"/>
-              </a:spcAft>
-              <a:buClrTx/>
-              <a:buSzTx/>
-              <a:buFontTx/>
-              <a:buNone/>
-              <a:tabLst/>
-              <a:defRPr/>
-            </a:pPr>
-            <a:r>
-              <a:rPr kumimoji="0" lang="en-US" sz="3200" b="1" i="0" u="none" strike="noStrike" kern="1200" cap="none" spc="0" normalizeH="0" baseline="0" noProof="0" dirty="0">
-                <a:ln>
-                  <a:noFill/>
-                </a:ln>
-                <a:solidFill>
-                  <a:prstClr val="black"/>
-                </a:solidFill>
-                <a:effectLst/>
-                <a:uLnTx/>
-                <a:uFillTx/>
-                <a:latin typeface="Calibri" panose="020F0502020204030204"/>
-                <a:ea typeface="+mn-ea"/>
-                <a:cs typeface="+mn-cs"/>
-              </a:rPr>
-              <a:t>0.29</a:t>
-            </a:r>
-          </a:p>
-        </p:txBody>
-      </p:sp>
-      <p:sp>
-        <p:nvSpPr>
-          <p:cNvPr id="13" name="TextBox 12">
-            <a:extLst>
-              <a:ext uri="{FF2B5EF4-FFF2-40B4-BE49-F238E27FC236}">
-                <a16:creationId xmlns:a16="http://schemas.microsoft.com/office/drawing/2014/main" id="{5C579F48-E01D-589B-0AB6-222704EB2010}"/>
-              </a:ext>
-            </a:extLst>
-          </p:cNvPr>
-          <p:cNvSpPr txBox="1"/>
-          <p:nvPr/>
-        </p:nvSpPr>
-        <p:spPr>
-          <a:xfrm>
-            <a:off x="10383833" y="2302673"/>
-            <a:ext cx="1519982" cy="584775"/>
-          </a:xfrm>
-          <a:prstGeom prst="rect">
-            <a:avLst/>
-          </a:prstGeom>
-          <a:noFill/>
-        </p:spPr>
-        <p:txBody>
-          <a:bodyPr wrap="square" rtlCol="0">
-            <a:spAutoFit/>
-          </a:bodyPr>
-          <a:lstStyle/>
-          <a:p>
-            <a:pPr marL="0" marR="0" lvl="0" indent="0" algn="l" defTabSz="914400" rtl="0" eaLnBrk="1" fontAlgn="auto" latinLnBrk="0" hangingPunct="1">
-              <a:lnSpc>
-                <a:spcPct val="100000"/>
-              </a:lnSpc>
-              <a:spcBef>
-                <a:spcPts val="0"/>
-              </a:spcBef>
-              <a:spcAft>
-                <a:spcPts val="0"/>
-              </a:spcAft>
-              <a:buClrTx/>
-              <a:buSzTx/>
-              <a:buFontTx/>
-              <a:buNone/>
-              <a:tabLst/>
-              <a:defRPr/>
-            </a:pPr>
-            <a:r>
-              <a:rPr kumimoji="0" lang="en-US" sz="3200" b="1" i="0" u="none" strike="noStrike" kern="1200" cap="none" spc="0" normalizeH="0" baseline="0" noProof="0" dirty="0">
-                <a:ln>
-                  <a:noFill/>
-                </a:ln>
-                <a:solidFill>
-                  <a:prstClr val="black"/>
-                </a:solidFill>
-                <a:effectLst/>
-                <a:uLnTx/>
-                <a:uFillTx/>
-                <a:latin typeface="Calibri" panose="020F0502020204030204"/>
-                <a:ea typeface="+mn-ea"/>
-                <a:cs typeface="+mn-cs"/>
-              </a:rPr>
-              <a:t>0.1825</a:t>
-            </a:r>
-          </a:p>
-        </p:txBody>
-      </p:sp>
-      <p:sp>
-        <p:nvSpPr>
-          <p:cNvPr id="14" name="TextBox 13">
-            <a:extLst>
-              <a:ext uri="{FF2B5EF4-FFF2-40B4-BE49-F238E27FC236}">
-                <a16:creationId xmlns:a16="http://schemas.microsoft.com/office/drawing/2014/main" id="{A714FC9D-B733-CF92-4051-4618106C7A9B}"/>
-              </a:ext>
-            </a:extLst>
-          </p:cNvPr>
-          <p:cNvSpPr txBox="1"/>
-          <p:nvPr/>
-        </p:nvSpPr>
-        <p:spPr>
-          <a:xfrm>
-            <a:off x="6064616" y="3661364"/>
-            <a:ext cx="1519982" cy="584775"/>
-          </a:xfrm>
-          <a:prstGeom prst="rect">
-            <a:avLst/>
-          </a:prstGeom>
-          <a:noFill/>
-        </p:spPr>
-        <p:txBody>
-          <a:bodyPr wrap="square" rtlCol="0">
-            <a:spAutoFit/>
-          </a:bodyPr>
-          <a:lstStyle/>
-          <a:p>
-            <a:pPr marL="0" marR="0" lvl="0" indent="0" algn="l" defTabSz="914400" rtl="0" eaLnBrk="1" fontAlgn="auto" latinLnBrk="0" hangingPunct="1">
-              <a:lnSpc>
-                <a:spcPct val="100000"/>
-              </a:lnSpc>
-              <a:spcBef>
-                <a:spcPts val="0"/>
-              </a:spcBef>
-              <a:spcAft>
-                <a:spcPts val="0"/>
-              </a:spcAft>
-              <a:buClrTx/>
-              <a:buSzTx/>
-              <a:buFontTx/>
-              <a:buNone/>
-              <a:tabLst/>
-              <a:defRPr/>
-            </a:pPr>
-            <a:r>
-              <a:rPr kumimoji="0" lang="en-US" sz="3200" b="1" i="0" u="none" strike="noStrike" kern="1200" cap="none" spc="0" normalizeH="0" baseline="0" noProof="0" dirty="0">
-                <a:ln>
-                  <a:noFill/>
-                </a:ln>
-                <a:solidFill>
-                  <a:prstClr val="black"/>
-                </a:solidFill>
-                <a:effectLst/>
-                <a:uLnTx/>
-                <a:uFillTx/>
-                <a:latin typeface="Calibri" panose="020F0502020204030204"/>
-                <a:ea typeface="+mn-ea"/>
-                <a:cs typeface="+mn-cs"/>
-              </a:rPr>
-              <a:t>0.3075</a:t>
-            </a:r>
-          </a:p>
-        </p:txBody>
-      </p:sp>
-      <p:sp>
-        <p:nvSpPr>
-          <p:cNvPr id="15" name="TextBox 14">
-            <a:extLst>
-              <a:ext uri="{FF2B5EF4-FFF2-40B4-BE49-F238E27FC236}">
-                <a16:creationId xmlns:a16="http://schemas.microsoft.com/office/drawing/2014/main" id="{20101914-8EC1-4BF3-D61A-9DE245186DAB}"/>
-              </a:ext>
-            </a:extLst>
-          </p:cNvPr>
-          <p:cNvSpPr txBox="1"/>
-          <p:nvPr/>
-        </p:nvSpPr>
-        <p:spPr>
-          <a:xfrm>
-            <a:off x="6025450" y="4868798"/>
-            <a:ext cx="1519982" cy="584775"/>
-          </a:xfrm>
-          <a:prstGeom prst="rect">
-            <a:avLst/>
-          </a:prstGeom>
-          <a:noFill/>
-        </p:spPr>
-        <p:txBody>
-          <a:bodyPr wrap="square" rtlCol="0">
-            <a:spAutoFit/>
-          </a:bodyPr>
-          <a:lstStyle/>
-          <a:p>
-            <a:pPr marL="0" marR="0" lvl="0" indent="0" algn="l" defTabSz="914400" rtl="0" eaLnBrk="1" fontAlgn="auto" latinLnBrk="0" hangingPunct="1">
-              <a:lnSpc>
-                <a:spcPct val="100000"/>
-              </a:lnSpc>
-              <a:spcBef>
-                <a:spcPts val="0"/>
-              </a:spcBef>
-              <a:spcAft>
-                <a:spcPts val="0"/>
-              </a:spcAft>
-              <a:buClrTx/>
-              <a:buSzTx/>
-              <a:buFontTx/>
-              <a:buNone/>
-              <a:tabLst/>
-              <a:defRPr/>
-            </a:pPr>
-            <a:r>
-              <a:rPr kumimoji="0" lang="en-US" sz="3200" b="1" i="0" u="none" strike="noStrike" kern="1200" cap="none" spc="0" normalizeH="0" baseline="0" noProof="0" dirty="0">
-                <a:ln>
-                  <a:noFill/>
-                </a:ln>
-                <a:solidFill>
-                  <a:prstClr val="black"/>
-                </a:solidFill>
-                <a:effectLst/>
-                <a:uLnTx/>
-                <a:uFillTx/>
-                <a:latin typeface="Calibri" panose="020F0502020204030204"/>
-                <a:ea typeface="+mn-ea"/>
-                <a:cs typeface="+mn-cs"/>
-              </a:rPr>
-              <a:t>0.2075</a:t>
-            </a:r>
-          </a:p>
-        </p:txBody>
-      </p:sp>
-      <p:sp>
-        <p:nvSpPr>
-          <p:cNvPr id="16" name="TextBox 15">
-            <a:extLst>
-              <a:ext uri="{FF2B5EF4-FFF2-40B4-BE49-F238E27FC236}">
-                <a16:creationId xmlns:a16="http://schemas.microsoft.com/office/drawing/2014/main" id="{B4F50B5D-8A6C-6E04-E31C-73711B146937}"/>
-              </a:ext>
-            </a:extLst>
-          </p:cNvPr>
-          <p:cNvSpPr txBox="1"/>
-          <p:nvPr/>
-        </p:nvSpPr>
-        <p:spPr>
-          <a:xfrm>
-            <a:off x="10379748" y="3695445"/>
-            <a:ext cx="1519982" cy="584775"/>
-          </a:xfrm>
-          <a:prstGeom prst="rect">
-            <a:avLst/>
-          </a:prstGeom>
-          <a:noFill/>
-        </p:spPr>
-        <p:txBody>
-          <a:bodyPr wrap="square" rtlCol="0">
-            <a:spAutoFit/>
-          </a:bodyPr>
-          <a:lstStyle/>
-          <a:p>
-            <a:pPr marL="0" marR="0" lvl="0" indent="0" algn="l" defTabSz="914400" rtl="0" eaLnBrk="1" fontAlgn="auto" latinLnBrk="0" hangingPunct="1">
-              <a:lnSpc>
-                <a:spcPct val="100000"/>
-              </a:lnSpc>
-              <a:spcBef>
-                <a:spcPts val="0"/>
-              </a:spcBef>
-              <a:spcAft>
-                <a:spcPts val="0"/>
-              </a:spcAft>
-              <a:buClrTx/>
-              <a:buSzTx/>
-              <a:buFontTx/>
-              <a:buNone/>
-              <a:tabLst/>
-              <a:defRPr/>
-            </a:pPr>
-            <a:r>
-              <a:rPr kumimoji="0" lang="en-US" sz="3200" b="1" i="0" u="none" strike="noStrike" kern="1200" cap="none" spc="0" normalizeH="0" baseline="0" noProof="0" dirty="0">
-                <a:ln>
-                  <a:noFill/>
-                </a:ln>
-                <a:solidFill>
-                  <a:prstClr val="black"/>
-                </a:solidFill>
-                <a:effectLst/>
-                <a:uLnTx/>
-                <a:uFillTx/>
-                <a:latin typeface="Calibri" panose="020F0502020204030204"/>
-                <a:ea typeface="+mn-ea"/>
-                <a:cs typeface="+mn-cs"/>
-              </a:rPr>
-              <a:t>0.3075</a:t>
-            </a:r>
-          </a:p>
-        </p:txBody>
-      </p:sp>
-      <p:sp>
-        <p:nvSpPr>
-          <p:cNvPr id="17" name="TextBox 16">
-            <a:extLst>
-              <a:ext uri="{FF2B5EF4-FFF2-40B4-BE49-F238E27FC236}">
-                <a16:creationId xmlns:a16="http://schemas.microsoft.com/office/drawing/2014/main" id="{85DD03A1-DDC1-30F8-F516-596279C46586}"/>
-              </a:ext>
-            </a:extLst>
-          </p:cNvPr>
-          <p:cNvSpPr txBox="1"/>
-          <p:nvPr/>
-        </p:nvSpPr>
-        <p:spPr>
-          <a:xfrm>
-            <a:off x="10368380" y="4882660"/>
-            <a:ext cx="1519982" cy="584775"/>
-          </a:xfrm>
-          <a:prstGeom prst="rect">
-            <a:avLst/>
-          </a:prstGeom>
-          <a:noFill/>
-        </p:spPr>
-        <p:txBody>
-          <a:bodyPr wrap="square" rtlCol="0">
-            <a:spAutoFit/>
-          </a:bodyPr>
-          <a:lstStyle/>
-          <a:p>
-            <a:pPr marL="0" marR="0" lvl="0" indent="0" algn="l" defTabSz="914400" rtl="0" eaLnBrk="1" fontAlgn="auto" latinLnBrk="0" hangingPunct="1">
-              <a:lnSpc>
-                <a:spcPct val="100000"/>
-              </a:lnSpc>
-              <a:spcBef>
-                <a:spcPts val="0"/>
-              </a:spcBef>
-              <a:spcAft>
-                <a:spcPts val="0"/>
-              </a:spcAft>
-              <a:buClrTx/>
-              <a:buSzTx/>
-              <a:buFontTx/>
-              <a:buNone/>
-              <a:tabLst/>
-              <a:defRPr/>
-            </a:pPr>
-            <a:r>
-              <a:rPr kumimoji="0" lang="en-US" sz="3200" b="1" i="0" u="none" strike="noStrike" kern="1200" cap="none" spc="0" normalizeH="0" baseline="0" noProof="0" dirty="0">
-                <a:ln>
-                  <a:noFill/>
-                </a:ln>
-                <a:solidFill>
-                  <a:prstClr val="black"/>
-                </a:solidFill>
-                <a:effectLst/>
-                <a:uLnTx/>
-                <a:uFillTx/>
-                <a:latin typeface="Calibri" panose="020F0502020204030204"/>
-                <a:ea typeface="+mn-ea"/>
-                <a:cs typeface="+mn-cs"/>
-              </a:rPr>
-              <a:t>0.2075</a:t>
-            </a:r>
-          </a:p>
-        </p:txBody>
-      </p:sp>
-    </p:spTree>
-    <p:extLst>
-      <p:ext uri="{BB962C8B-B14F-4D97-AF65-F5344CB8AC3E}">
-        <p14:creationId xmlns:p14="http://schemas.microsoft.com/office/powerpoint/2010/main" val="1573972866"/>
-      </p:ext>
-    </p:extLst>
-  </p:cSld>
-  <p:clrMapOvr>
-    <a:masterClrMapping/>
-  </p:clrMapOvr>
-</p:sld>
-</file>
-
-<file path=ppt/slides/slide17.xml><?xml version="1.0" encoding="utf-8"?>
-<p:sld xmlns:a="http://schemas.openxmlformats.org/drawingml/2006/main" xmlns:r="http://schemas.openxmlformats.org/officeDocument/2006/relationships" xmlns:p="http://schemas.openxmlformats.org/presentationml/2006/main">
-  <p:cSld>
-    <p:spTree>
-      <p:nvGrpSpPr>
-        <p:cNvPr id="1" name=""/>
-        <p:cNvGrpSpPr/>
-        <p:nvPr/>
-      </p:nvGrpSpPr>
-      <p:grpSpPr>
-        <a:xfrm>
-          <a:off x="0" y="0"/>
-          <a:ext cx="0" cy="0"/>
-          <a:chOff x="0" y="0"/>
-          <a:chExt cx="0" cy="0"/>
-        </a:xfrm>
-      </p:grpSpPr>
-      <p:sp>
-        <p:nvSpPr>
-          <p:cNvPr id="2" name="Title 1">
-            <a:extLst>
-              <a:ext uri="{FF2B5EF4-FFF2-40B4-BE49-F238E27FC236}">
-                <a16:creationId xmlns:a16="http://schemas.microsoft.com/office/drawing/2014/main" id="{38AD36AB-AA77-30AC-1262-AAB8697C7AEC}"/>
-              </a:ext>
-            </a:extLst>
-          </p:cNvPr>
-          <p:cNvSpPr>
-            <a:spLocks noGrp="1"/>
-          </p:cNvSpPr>
-          <p:nvPr>
-            <p:ph type="title"/>
-          </p:nvPr>
-        </p:nvSpPr>
-        <p:spPr/>
-        <p:txBody>
-          <a:bodyPr/>
-          <a:lstStyle/>
-          <a:p>
-            <a:r>
-              <a:rPr lang="en-US" dirty="0"/>
-              <a:t>Practice Computing AUC</a:t>
-            </a:r>
-          </a:p>
-        </p:txBody>
-      </p:sp>
-      <mc:AlternateContent xmlns:mc="http://schemas.openxmlformats.org/markup-compatibility/2006" xmlns:a14="http://schemas.microsoft.com/office/drawing/2010/main">
-        <mc:Choice Requires="a14">
-          <p:sp>
-            <p:nvSpPr>
-              <p:cNvPr id="3" name="Content Placeholder 2">
-                <a:extLst>
-                  <a:ext uri="{FF2B5EF4-FFF2-40B4-BE49-F238E27FC236}">
-                    <a16:creationId xmlns:a16="http://schemas.microsoft.com/office/drawing/2014/main" id="{69FEC08B-830D-DDAD-7E2A-74533C9D636A}"/>
-                  </a:ext>
-                </a:extLst>
-              </p:cNvPr>
-              <p:cNvSpPr>
-                <a:spLocks noGrp="1"/>
-              </p:cNvSpPr>
-              <p:nvPr>
-                <p:ph idx="1"/>
-              </p:nvPr>
-            </p:nvSpPr>
-            <p:spPr>
-              <a:xfrm>
-                <a:off x="838200" y="1825625"/>
-                <a:ext cx="4342466" cy="4351338"/>
-              </a:xfrm>
-            </p:spPr>
-            <p:txBody>
-              <a:bodyPr/>
-              <a:lstStyle/>
-              <a:p>
-                <a:r>
-                  <a:rPr lang="en-US" dirty="0"/>
-                  <a:t>Fourth threshold is 0.30</a:t>
-                </a:r>
-              </a:p>
-              <a:p>
-                <a:pPr lvl="1"/>
-                <a14:m>
-                  <m:oMath xmlns:m="http://schemas.openxmlformats.org/officeDocument/2006/math">
-                    <m:r>
-                      <a:rPr lang="en-US" b="0" i="1" smtClean="0">
-                        <a:latin typeface="Cambria Math" panose="02040503050406030204" pitchFamily="18" charset="0"/>
-                      </a:rPr>
-                      <m:t>𝑇𝑃𝑅</m:t>
-                    </m:r>
-                    <m:r>
-                      <a:rPr lang="en-US" b="0" i="1" smtClean="0">
-                        <a:latin typeface="Cambria Math" panose="02040503050406030204" pitchFamily="18" charset="0"/>
-                      </a:rPr>
-                      <m:t>=</m:t>
-                    </m:r>
-                    <m:f>
-                      <m:fPr>
-                        <m:ctrlPr>
-                          <a:rPr lang="en-US" b="0" i="1" smtClean="0">
-                            <a:latin typeface="Cambria Math" panose="02040503050406030204" pitchFamily="18" charset="0"/>
-                          </a:rPr>
-                        </m:ctrlPr>
-                      </m:fPr>
-                      <m:num>
-                        <m:r>
-                          <a:rPr lang="en-US" b="0" i="1" smtClean="0">
-                            <a:latin typeface="Cambria Math" panose="02040503050406030204" pitchFamily="18" charset="0"/>
-                          </a:rPr>
-                          <m:t>50</m:t>
-                        </m:r>
-                      </m:num>
-                      <m:den>
-                        <m:r>
-                          <a:rPr lang="en-US" b="0" i="1" smtClean="0">
-                            <a:latin typeface="Cambria Math" panose="02040503050406030204" pitchFamily="18" charset="0"/>
-                          </a:rPr>
-                          <m:t>50</m:t>
-                        </m:r>
-                      </m:den>
-                    </m:f>
-                    <m:r>
-                      <a:rPr lang="en-US" b="0" i="1" smtClean="0">
-                        <a:latin typeface="Cambria Math" panose="02040503050406030204" pitchFamily="18" charset="0"/>
-                      </a:rPr>
-                      <m:t>=1</m:t>
-                    </m:r>
-                  </m:oMath>
-                </a14:m>
-                <a:endParaRPr lang="en-US" b="0" dirty="0"/>
-              </a:p>
-              <a:p>
-                <a:pPr lvl="1"/>
-                <a14:m>
-                  <m:oMath xmlns:m="http://schemas.openxmlformats.org/officeDocument/2006/math">
-                    <m:r>
-                      <a:rPr lang="en-US" b="0" i="1" smtClean="0">
-                        <a:latin typeface="Cambria Math" panose="02040503050406030204" pitchFamily="18" charset="0"/>
-                      </a:rPr>
-                      <m:t>𝐹𝑃𝑅</m:t>
-                    </m:r>
-                    <m:r>
-                      <a:rPr lang="en-US" b="0" i="1" smtClean="0">
-                        <a:latin typeface="Cambria Math" panose="02040503050406030204" pitchFamily="18" charset="0"/>
-                      </a:rPr>
-                      <m:t>=</m:t>
-                    </m:r>
-                    <m:f>
-                      <m:fPr>
-                        <m:ctrlPr>
-                          <a:rPr lang="en-US" b="0" i="1" smtClean="0">
-                            <a:latin typeface="Cambria Math" panose="02040503050406030204" pitchFamily="18" charset="0"/>
-                          </a:rPr>
-                        </m:ctrlPr>
-                      </m:fPr>
-                      <m:num>
-                        <m:r>
-                          <a:rPr lang="en-US" b="0" i="1" smtClean="0">
-                            <a:latin typeface="Cambria Math" panose="02040503050406030204" pitchFamily="18" charset="0"/>
-                          </a:rPr>
-                          <m:t>100</m:t>
-                        </m:r>
-                      </m:num>
-                      <m:den>
-                        <m:r>
-                          <a:rPr lang="en-US" b="0" i="1" smtClean="0">
-                            <a:latin typeface="Cambria Math" panose="02040503050406030204" pitchFamily="18" charset="0"/>
-                          </a:rPr>
-                          <m:t>400</m:t>
-                        </m:r>
-                      </m:den>
-                    </m:f>
-                    <m:r>
-                      <a:rPr lang="en-US" b="0" i="1" smtClean="0">
-                        <a:latin typeface="Cambria Math" panose="02040503050406030204" pitchFamily="18" charset="0"/>
-                      </a:rPr>
-                      <m:t>=0.25</m:t>
-                    </m:r>
-                  </m:oMath>
-                </a14:m>
-                <a:endParaRPr lang="en-US" dirty="0"/>
-              </a:p>
-            </p:txBody>
-          </p:sp>
-        </mc:Choice>
-        <mc:Fallback xmlns="">
-          <p:sp>
-            <p:nvSpPr>
-              <p:cNvPr id="3" name="Content Placeholder 2">
-                <a:extLst>
-                  <a:ext uri="{FF2B5EF4-FFF2-40B4-BE49-F238E27FC236}">
-                    <a16:creationId xmlns:a16="http://schemas.microsoft.com/office/drawing/2014/main" id="{69FEC08B-830D-DDAD-7E2A-74533C9D636A}"/>
-                  </a:ext>
-                </a:extLst>
-              </p:cNvPr>
-              <p:cNvSpPr>
-                <a:spLocks noGrp="1" noRot="1" noChangeAspect="1" noMove="1" noResize="1" noEditPoints="1" noAdjustHandles="1" noChangeArrowheads="1" noChangeShapeType="1" noTextEdit="1"/>
-              </p:cNvSpPr>
-              <p:nvPr>
-                <p:ph idx="1"/>
-              </p:nvPr>
-            </p:nvSpPr>
-            <p:spPr>
-              <a:xfrm>
-                <a:off x="838200" y="1825625"/>
-                <a:ext cx="4342466" cy="4351338"/>
-              </a:xfrm>
-              <a:blipFill>
-                <a:blip r:embed="rId2"/>
-                <a:stretch>
-                  <a:fillRect l="-2528" t="-2381"/>
-                </a:stretch>
-              </a:blipFill>
-            </p:spPr>
-            <p:txBody>
-              <a:bodyPr/>
-              <a:lstStyle/>
-              <a:p>
-                <a:r>
-                  <a:rPr lang="en-US">
-                    <a:noFill/>
-                  </a:rPr>
-                  <a:t> </a:t>
-                </a:r>
-              </a:p>
-            </p:txBody>
-          </p:sp>
-        </mc:Fallback>
-      </mc:AlternateContent>
-      <p:pic>
-        <p:nvPicPr>
-          <p:cNvPr id="4" name="Picture 2">
-            <a:extLst>
-              <a:ext uri="{FF2B5EF4-FFF2-40B4-BE49-F238E27FC236}">
-                <a16:creationId xmlns:a16="http://schemas.microsoft.com/office/drawing/2014/main" id="{A1F17147-DC3E-3B8B-1D59-C318551DB2C4}"/>
-              </a:ext>
-            </a:extLst>
-          </p:cNvPr>
-          <p:cNvPicPr>
-            <a:picLocks noChangeAspect="1" noChangeArrowheads="1"/>
-          </p:cNvPicPr>
-          <p:nvPr/>
-        </p:nvPicPr>
-        <p:blipFill>
-          <a:blip r:embed="rId3">
-            <a:alphaModFix amt="57000"/>
-            <a:extLst>
-              <a:ext uri="{28A0092B-C50C-407E-A947-70E740481C1C}">
-                <a14:useLocalDpi xmlns:a14="http://schemas.microsoft.com/office/drawing/2010/main" val="0"/>
-              </a:ext>
-            </a:extLst>
-          </a:blip>
-          <a:srcRect/>
-          <a:stretch>
-            <a:fillRect/>
-          </a:stretch>
-        </p:blipFill>
-        <p:spPr bwMode="auto">
-          <a:xfrm>
-            <a:off x="5742804" y="2245421"/>
-            <a:ext cx="5946616" cy="3418265"/>
-          </a:xfrm>
-          <a:prstGeom prst="rect">
-            <a:avLst/>
-          </a:prstGeom>
-          <a:noFill/>
-          <a:extLst>
-            <a:ext uri="{909E8E84-426E-40DD-AFC4-6F175D3DCCD1}">
-              <a14:hiddenFill xmlns:a14="http://schemas.microsoft.com/office/drawing/2010/main">
-                <a:solidFill>
-                  <a:srgbClr val="FFFFFF"/>
-                </a:solidFill>
-              </a14:hiddenFill>
-            </a:ext>
-          </a:extLst>
-        </p:spPr>
-      </p:pic>
-      <p:cxnSp>
-        <p:nvCxnSpPr>
-          <p:cNvPr id="5" name="Straight Connector 4">
-            <a:extLst>
-              <a:ext uri="{FF2B5EF4-FFF2-40B4-BE49-F238E27FC236}">
-                <a16:creationId xmlns:a16="http://schemas.microsoft.com/office/drawing/2014/main" id="{93AC20D3-2C9A-84D7-6ACD-F099213C501D}"/>
-              </a:ext>
-            </a:extLst>
-          </p:cNvPr>
-          <p:cNvCxnSpPr>
-            <a:cxnSpLocks/>
-          </p:cNvCxnSpPr>
-          <p:nvPr/>
-        </p:nvCxnSpPr>
-        <p:spPr>
-          <a:xfrm>
-            <a:off x="5976813" y="3617678"/>
-            <a:ext cx="5784351" cy="0"/>
-          </a:xfrm>
-          <a:prstGeom prst="line">
-            <a:avLst/>
-          </a:prstGeom>
-          <a:ln w="53975">
-            <a:solidFill>
-              <a:schemeClr val="accent6"/>
-            </a:solidFill>
-          </a:ln>
-        </p:spPr>
-        <p:style>
-          <a:lnRef idx="1">
-            <a:schemeClr val="accent1"/>
-          </a:lnRef>
-          <a:fillRef idx="0">
-            <a:schemeClr val="accent1"/>
-          </a:fillRef>
-          <a:effectRef idx="0">
-            <a:schemeClr val="accent1"/>
-          </a:effectRef>
-          <a:fontRef idx="minor">
-            <a:schemeClr val="tx1"/>
-          </a:fontRef>
-        </p:style>
-      </p:cxnSp>
-      <p:cxnSp>
-        <p:nvCxnSpPr>
-          <p:cNvPr id="6" name="Straight Connector 5">
-            <a:extLst>
-              <a:ext uri="{FF2B5EF4-FFF2-40B4-BE49-F238E27FC236}">
-                <a16:creationId xmlns:a16="http://schemas.microsoft.com/office/drawing/2014/main" id="{EAA8A685-36D2-3E5E-C9C7-05F762E8639B}"/>
-              </a:ext>
-            </a:extLst>
-          </p:cNvPr>
-          <p:cNvCxnSpPr>
-            <a:cxnSpLocks/>
-          </p:cNvCxnSpPr>
-          <p:nvPr/>
-        </p:nvCxnSpPr>
-        <p:spPr>
-          <a:xfrm>
-            <a:off x="5955299" y="4398570"/>
-            <a:ext cx="5784351" cy="0"/>
-          </a:xfrm>
-          <a:prstGeom prst="line">
-            <a:avLst/>
-          </a:prstGeom>
-          <a:ln w="53975">
-            <a:solidFill>
-              <a:schemeClr val="accent6"/>
-            </a:solidFill>
-          </a:ln>
-        </p:spPr>
-        <p:style>
-          <a:lnRef idx="1">
-            <a:schemeClr val="accent1"/>
-          </a:lnRef>
-          <a:fillRef idx="0">
-            <a:schemeClr val="accent1"/>
-          </a:fillRef>
-          <a:effectRef idx="0">
-            <a:schemeClr val="accent1"/>
-          </a:effectRef>
-          <a:fontRef idx="minor">
-            <a:schemeClr val="tx1"/>
-          </a:fontRef>
-        </p:style>
-      </p:cxnSp>
-      <p:cxnSp>
-        <p:nvCxnSpPr>
-          <p:cNvPr id="7" name="Straight Connector 6">
-            <a:extLst>
-              <a:ext uri="{FF2B5EF4-FFF2-40B4-BE49-F238E27FC236}">
-                <a16:creationId xmlns:a16="http://schemas.microsoft.com/office/drawing/2014/main" id="{B22E7F41-C3D3-0E39-7BDF-81D37816D9E1}"/>
-              </a:ext>
-            </a:extLst>
-          </p:cNvPr>
-          <p:cNvCxnSpPr>
-            <a:cxnSpLocks/>
-          </p:cNvCxnSpPr>
-          <p:nvPr/>
-        </p:nvCxnSpPr>
-        <p:spPr>
-          <a:xfrm flipV="1">
-            <a:off x="8040130" y="2352697"/>
-            <a:ext cx="0" cy="3193227"/>
-          </a:xfrm>
-          <a:prstGeom prst="line">
-            <a:avLst/>
-          </a:prstGeom>
-          <a:ln w="53975">
-            <a:solidFill>
-              <a:schemeClr val="accent6"/>
-            </a:solidFill>
-          </a:ln>
-        </p:spPr>
-        <p:style>
-          <a:lnRef idx="1">
-            <a:schemeClr val="accent1"/>
-          </a:lnRef>
-          <a:fillRef idx="0">
-            <a:schemeClr val="accent1"/>
-          </a:fillRef>
-          <a:effectRef idx="0">
-            <a:schemeClr val="accent1"/>
-          </a:effectRef>
-          <a:fontRef idx="minor">
-            <a:schemeClr val="tx1"/>
-          </a:fontRef>
-        </p:style>
-      </p:cxnSp>
-      <p:cxnSp>
-        <p:nvCxnSpPr>
-          <p:cNvPr id="8" name="Straight Connector 7">
-            <a:extLst>
-              <a:ext uri="{FF2B5EF4-FFF2-40B4-BE49-F238E27FC236}">
-                <a16:creationId xmlns:a16="http://schemas.microsoft.com/office/drawing/2014/main" id="{55A732EF-4B9F-E31C-EA68-E177A80DC2F6}"/>
-              </a:ext>
-            </a:extLst>
-          </p:cNvPr>
-          <p:cNvCxnSpPr>
-            <a:cxnSpLocks/>
-          </p:cNvCxnSpPr>
-          <p:nvPr/>
-        </p:nvCxnSpPr>
-        <p:spPr>
-          <a:xfrm>
-            <a:off x="9490372" y="2352697"/>
-            <a:ext cx="0" cy="3193227"/>
-          </a:xfrm>
-          <a:prstGeom prst="line">
-            <a:avLst/>
-          </a:prstGeom>
-          <a:ln w="53975">
-            <a:solidFill>
-              <a:schemeClr val="accent6"/>
-            </a:solidFill>
-          </a:ln>
-        </p:spPr>
-        <p:style>
-          <a:lnRef idx="1">
-            <a:schemeClr val="accent1"/>
-          </a:lnRef>
-          <a:fillRef idx="0">
-            <a:schemeClr val="accent1"/>
-          </a:fillRef>
-          <a:effectRef idx="0">
-            <a:schemeClr val="accent1"/>
-          </a:effectRef>
-          <a:fontRef idx="minor">
-            <a:schemeClr val="tx1"/>
-          </a:fontRef>
-        </p:style>
-      </p:cxnSp>
-      <p:sp>
-        <p:nvSpPr>
-          <p:cNvPr id="9" name="TextBox 8">
-            <a:extLst>
-              <a:ext uri="{FF2B5EF4-FFF2-40B4-BE49-F238E27FC236}">
-                <a16:creationId xmlns:a16="http://schemas.microsoft.com/office/drawing/2014/main" id="{040CA625-BB1A-13B1-ABE8-4A4FD9BD6FD9}"/>
-              </a:ext>
-            </a:extLst>
-          </p:cNvPr>
-          <p:cNvSpPr txBox="1"/>
-          <p:nvPr/>
-        </p:nvSpPr>
-        <p:spPr>
-          <a:xfrm>
-            <a:off x="6094818" y="2292535"/>
-            <a:ext cx="1519982" cy="584775"/>
-          </a:xfrm>
-          <a:prstGeom prst="rect">
-            <a:avLst/>
-          </a:prstGeom>
-          <a:noFill/>
-        </p:spPr>
-        <p:txBody>
-          <a:bodyPr wrap="square" rtlCol="0">
-            <a:spAutoFit/>
-          </a:bodyPr>
-          <a:lstStyle/>
-          <a:p>
-            <a:pPr marL="0" marR="0" lvl="0" indent="0" algn="l" defTabSz="914400" rtl="0" eaLnBrk="1" fontAlgn="auto" latinLnBrk="0" hangingPunct="1">
-              <a:lnSpc>
-                <a:spcPct val="100000"/>
-              </a:lnSpc>
-              <a:spcBef>
-                <a:spcPts val="0"/>
-              </a:spcBef>
-              <a:spcAft>
-                <a:spcPts val="0"/>
-              </a:spcAft>
-              <a:buClrTx/>
-              <a:buSzTx/>
-              <a:buFontTx/>
-              <a:buNone/>
-              <a:tabLst/>
-              <a:defRPr/>
-            </a:pPr>
-            <a:r>
-              <a:rPr kumimoji="0" lang="en-US" sz="3200" b="1" i="0" u="none" strike="noStrike" kern="1200" cap="none" spc="0" normalizeH="0" baseline="0" noProof="0" dirty="0">
-                <a:ln>
-                  <a:noFill/>
-                </a:ln>
-                <a:solidFill>
-                  <a:prstClr val="black"/>
-                </a:solidFill>
-                <a:effectLst/>
-                <a:uLnTx/>
-                <a:uFillTx/>
-                <a:latin typeface="Calibri" panose="020F0502020204030204"/>
-                <a:ea typeface="+mn-ea"/>
-                <a:cs typeface="+mn-cs"/>
-              </a:rPr>
-              <a:t>0.1825</a:t>
-            </a:r>
-          </a:p>
-        </p:txBody>
-      </p:sp>
-      <p:sp>
-        <p:nvSpPr>
-          <p:cNvPr id="10" name="TextBox 9">
-            <a:extLst>
-              <a:ext uri="{FF2B5EF4-FFF2-40B4-BE49-F238E27FC236}">
-                <a16:creationId xmlns:a16="http://schemas.microsoft.com/office/drawing/2014/main" id="{118F478A-C678-7216-1A9E-1D1A71C34AB9}"/>
-              </a:ext>
-            </a:extLst>
-          </p:cNvPr>
-          <p:cNvSpPr txBox="1"/>
-          <p:nvPr/>
-        </p:nvSpPr>
-        <p:spPr>
-          <a:xfrm>
-            <a:off x="8037572" y="3580290"/>
-            <a:ext cx="1093819" cy="584775"/>
-          </a:xfrm>
-          <a:prstGeom prst="rect">
-            <a:avLst/>
-          </a:prstGeom>
-          <a:noFill/>
-        </p:spPr>
-        <p:txBody>
-          <a:bodyPr wrap="square" rtlCol="0">
-            <a:spAutoFit/>
-          </a:bodyPr>
-          <a:lstStyle/>
-          <a:p>
-            <a:pPr marL="0" marR="0" lvl="0" indent="0" algn="l" defTabSz="914400" rtl="0" eaLnBrk="1" fontAlgn="auto" latinLnBrk="0" hangingPunct="1">
-              <a:lnSpc>
-                <a:spcPct val="100000"/>
-              </a:lnSpc>
-              <a:spcBef>
-                <a:spcPts val="0"/>
-              </a:spcBef>
-              <a:spcAft>
-                <a:spcPts val="0"/>
-              </a:spcAft>
-              <a:buClrTx/>
-              <a:buSzTx/>
-              <a:buFontTx/>
-              <a:buNone/>
-              <a:tabLst/>
-              <a:defRPr/>
-            </a:pPr>
-            <a:r>
-              <a:rPr kumimoji="0" lang="en-US" sz="3200" b="1" i="0" u="none" strike="noStrike" kern="1200" cap="none" spc="0" normalizeH="0" baseline="0" noProof="0" dirty="0">
-                <a:ln>
-                  <a:noFill/>
-                </a:ln>
-                <a:solidFill>
-                  <a:prstClr val="black"/>
-                </a:solidFill>
-                <a:effectLst/>
-                <a:uLnTx/>
-                <a:uFillTx/>
-                <a:latin typeface="Calibri" panose="020F0502020204030204"/>
-                <a:ea typeface="+mn-ea"/>
-                <a:cs typeface="+mn-cs"/>
-              </a:rPr>
-              <a:t>0.39</a:t>
-            </a:r>
-          </a:p>
-        </p:txBody>
-      </p:sp>
-      <p:sp>
-        <p:nvSpPr>
-          <p:cNvPr id="11" name="TextBox 10">
-            <a:extLst>
-              <a:ext uri="{FF2B5EF4-FFF2-40B4-BE49-F238E27FC236}">
-                <a16:creationId xmlns:a16="http://schemas.microsoft.com/office/drawing/2014/main" id="{CBD2BC6D-E002-76EA-F0A5-BD206B010518}"/>
-              </a:ext>
-            </a:extLst>
-          </p:cNvPr>
-          <p:cNvSpPr txBox="1"/>
-          <p:nvPr/>
-        </p:nvSpPr>
-        <p:spPr>
-          <a:xfrm>
-            <a:off x="8067704" y="2295305"/>
-            <a:ext cx="1519982" cy="584775"/>
-          </a:xfrm>
-          <a:prstGeom prst="rect">
-            <a:avLst/>
-          </a:prstGeom>
-          <a:noFill/>
-        </p:spPr>
-        <p:txBody>
-          <a:bodyPr wrap="square" rtlCol="0">
-            <a:spAutoFit/>
-          </a:bodyPr>
-          <a:lstStyle/>
-          <a:p>
-            <a:pPr marL="0" marR="0" lvl="0" indent="0" algn="l" defTabSz="914400" rtl="0" eaLnBrk="1" fontAlgn="auto" latinLnBrk="0" hangingPunct="1">
-              <a:lnSpc>
-                <a:spcPct val="100000"/>
-              </a:lnSpc>
-              <a:spcBef>
-                <a:spcPts val="0"/>
-              </a:spcBef>
-              <a:spcAft>
-                <a:spcPts val="0"/>
-              </a:spcAft>
-              <a:buClrTx/>
-              <a:buSzTx/>
-              <a:buFontTx/>
-              <a:buNone/>
-              <a:tabLst/>
-              <a:defRPr/>
-            </a:pPr>
-            <a:r>
-              <a:rPr kumimoji="0" lang="en-US" sz="3200" b="1" i="0" u="none" strike="noStrike" kern="1200" cap="none" spc="0" normalizeH="0" baseline="0" noProof="0" dirty="0">
-                <a:ln>
-                  <a:noFill/>
-                </a:ln>
-                <a:solidFill>
-                  <a:prstClr val="black"/>
-                </a:solidFill>
-                <a:effectLst/>
-                <a:uLnTx/>
-                <a:uFillTx/>
-                <a:latin typeface="Calibri" panose="020F0502020204030204"/>
-                <a:ea typeface="+mn-ea"/>
-                <a:cs typeface="+mn-cs"/>
-              </a:rPr>
-              <a:t>0.165</a:t>
-            </a:r>
-          </a:p>
-        </p:txBody>
-      </p:sp>
-      <p:sp>
-        <p:nvSpPr>
-          <p:cNvPr id="12" name="TextBox 11">
-            <a:extLst>
-              <a:ext uri="{FF2B5EF4-FFF2-40B4-BE49-F238E27FC236}">
-                <a16:creationId xmlns:a16="http://schemas.microsoft.com/office/drawing/2014/main" id="{0A68A798-D518-1DC1-10E2-C25421ACC8D2}"/>
-              </a:ext>
-            </a:extLst>
-          </p:cNvPr>
-          <p:cNvSpPr txBox="1"/>
-          <p:nvPr/>
-        </p:nvSpPr>
-        <p:spPr>
-          <a:xfrm>
-            <a:off x="8206317" y="4917004"/>
-            <a:ext cx="1519982" cy="584775"/>
-          </a:xfrm>
-          <a:prstGeom prst="rect">
-            <a:avLst/>
-          </a:prstGeom>
-          <a:noFill/>
-        </p:spPr>
-        <p:txBody>
-          <a:bodyPr wrap="square" rtlCol="0">
-            <a:spAutoFit/>
-          </a:bodyPr>
-          <a:lstStyle/>
-          <a:p>
-            <a:pPr marL="0" marR="0" lvl="0" indent="0" algn="l" defTabSz="914400" rtl="0" eaLnBrk="1" fontAlgn="auto" latinLnBrk="0" hangingPunct="1">
-              <a:lnSpc>
-                <a:spcPct val="100000"/>
-              </a:lnSpc>
-              <a:spcBef>
-                <a:spcPts val="0"/>
-              </a:spcBef>
-              <a:spcAft>
-                <a:spcPts val="0"/>
-              </a:spcAft>
-              <a:buClrTx/>
-              <a:buSzTx/>
-              <a:buFontTx/>
-              <a:buNone/>
-              <a:tabLst/>
-              <a:defRPr/>
-            </a:pPr>
-            <a:r>
-              <a:rPr kumimoji="0" lang="en-US" sz="3200" b="1" i="0" u="none" strike="noStrike" kern="1200" cap="none" spc="0" normalizeH="0" baseline="0" noProof="0" dirty="0">
-                <a:ln>
-                  <a:noFill/>
-                </a:ln>
-                <a:solidFill>
-                  <a:prstClr val="black"/>
-                </a:solidFill>
-                <a:effectLst/>
-                <a:uLnTx/>
-                <a:uFillTx/>
-                <a:latin typeface="Calibri" panose="020F0502020204030204"/>
-                <a:ea typeface="+mn-ea"/>
-                <a:cs typeface="+mn-cs"/>
-              </a:rPr>
-              <a:t>0.29</a:t>
-            </a:r>
-          </a:p>
-        </p:txBody>
-      </p:sp>
-      <p:sp>
-        <p:nvSpPr>
-          <p:cNvPr id="13" name="TextBox 12">
-            <a:extLst>
-              <a:ext uri="{FF2B5EF4-FFF2-40B4-BE49-F238E27FC236}">
-                <a16:creationId xmlns:a16="http://schemas.microsoft.com/office/drawing/2014/main" id="{5C579F48-E01D-589B-0AB6-222704EB2010}"/>
-              </a:ext>
-            </a:extLst>
-          </p:cNvPr>
-          <p:cNvSpPr txBox="1"/>
-          <p:nvPr/>
-        </p:nvSpPr>
-        <p:spPr>
-          <a:xfrm>
-            <a:off x="10383833" y="2302673"/>
-            <a:ext cx="1519982" cy="584775"/>
-          </a:xfrm>
-          <a:prstGeom prst="rect">
-            <a:avLst/>
-          </a:prstGeom>
-          <a:noFill/>
-        </p:spPr>
-        <p:txBody>
-          <a:bodyPr wrap="square" rtlCol="0">
-            <a:spAutoFit/>
-          </a:bodyPr>
-          <a:lstStyle/>
-          <a:p>
-            <a:pPr marL="0" marR="0" lvl="0" indent="0" algn="l" defTabSz="914400" rtl="0" eaLnBrk="1" fontAlgn="auto" latinLnBrk="0" hangingPunct="1">
-              <a:lnSpc>
-                <a:spcPct val="100000"/>
-              </a:lnSpc>
-              <a:spcBef>
-                <a:spcPts val="0"/>
-              </a:spcBef>
-              <a:spcAft>
-                <a:spcPts val="0"/>
-              </a:spcAft>
-              <a:buClrTx/>
-              <a:buSzTx/>
-              <a:buFontTx/>
-              <a:buNone/>
-              <a:tabLst/>
-              <a:defRPr/>
-            </a:pPr>
-            <a:r>
-              <a:rPr kumimoji="0" lang="en-US" sz="3200" b="1" i="0" u="none" strike="noStrike" kern="1200" cap="none" spc="0" normalizeH="0" baseline="0" noProof="0" dirty="0">
-                <a:ln>
-                  <a:noFill/>
-                </a:ln>
-                <a:solidFill>
-                  <a:prstClr val="black"/>
-                </a:solidFill>
-                <a:effectLst/>
-                <a:uLnTx/>
-                <a:uFillTx/>
-                <a:latin typeface="Calibri" panose="020F0502020204030204"/>
-                <a:ea typeface="+mn-ea"/>
-                <a:cs typeface="+mn-cs"/>
-              </a:rPr>
-              <a:t>0.1825</a:t>
-            </a:r>
-          </a:p>
-        </p:txBody>
-      </p:sp>
-      <p:sp>
-        <p:nvSpPr>
-          <p:cNvPr id="14" name="TextBox 13">
-            <a:extLst>
-              <a:ext uri="{FF2B5EF4-FFF2-40B4-BE49-F238E27FC236}">
-                <a16:creationId xmlns:a16="http://schemas.microsoft.com/office/drawing/2014/main" id="{A714FC9D-B733-CF92-4051-4618106C7A9B}"/>
-              </a:ext>
-            </a:extLst>
-          </p:cNvPr>
-          <p:cNvSpPr txBox="1"/>
-          <p:nvPr/>
-        </p:nvSpPr>
-        <p:spPr>
-          <a:xfrm>
-            <a:off x="6064616" y="3661364"/>
-            <a:ext cx="1519982" cy="584775"/>
-          </a:xfrm>
-          <a:prstGeom prst="rect">
-            <a:avLst/>
-          </a:prstGeom>
-          <a:noFill/>
-        </p:spPr>
-        <p:txBody>
-          <a:bodyPr wrap="square" rtlCol="0">
-            <a:spAutoFit/>
-          </a:bodyPr>
-          <a:lstStyle/>
-          <a:p>
-            <a:pPr marL="0" marR="0" lvl="0" indent="0" algn="l" defTabSz="914400" rtl="0" eaLnBrk="1" fontAlgn="auto" latinLnBrk="0" hangingPunct="1">
-              <a:lnSpc>
-                <a:spcPct val="100000"/>
-              </a:lnSpc>
-              <a:spcBef>
-                <a:spcPts val="0"/>
-              </a:spcBef>
-              <a:spcAft>
-                <a:spcPts val="0"/>
-              </a:spcAft>
-              <a:buClrTx/>
-              <a:buSzTx/>
-              <a:buFontTx/>
-              <a:buNone/>
-              <a:tabLst/>
-              <a:defRPr/>
-            </a:pPr>
-            <a:r>
-              <a:rPr kumimoji="0" lang="en-US" sz="3200" b="1" i="0" u="none" strike="noStrike" kern="1200" cap="none" spc="0" normalizeH="0" baseline="0" noProof="0" dirty="0">
-                <a:ln>
-                  <a:noFill/>
-                </a:ln>
-                <a:solidFill>
-                  <a:prstClr val="black"/>
-                </a:solidFill>
-                <a:effectLst/>
-                <a:uLnTx/>
-                <a:uFillTx/>
-                <a:latin typeface="Calibri" panose="020F0502020204030204"/>
-                <a:ea typeface="+mn-ea"/>
-                <a:cs typeface="+mn-cs"/>
-              </a:rPr>
-              <a:t>0.3075</a:t>
-            </a:r>
-          </a:p>
-        </p:txBody>
-      </p:sp>
-      <p:sp>
-        <p:nvSpPr>
-          <p:cNvPr id="15" name="TextBox 14">
-            <a:extLst>
-              <a:ext uri="{FF2B5EF4-FFF2-40B4-BE49-F238E27FC236}">
-                <a16:creationId xmlns:a16="http://schemas.microsoft.com/office/drawing/2014/main" id="{20101914-8EC1-4BF3-D61A-9DE245186DAB}"/>
-              </a:ext>
-            </a:extLst>
-          </p:cNvPr>
-          <p:cNvSpPr txBox="1"/>
-          <p:nvPr/>
-        </p:nvSpPr>
-        <p:spPr>
-          <a:xfrm>
-            <a:off x="6025450" y="4868798"/>
-            <a:ext cx="1519982" cy="584775"/>
-          </a:xfrm>
-          <a:prstGeom prst="rect">
-            <a:avLst/>
-          </a:prstGeom>
-          <a:noFill/>
-        </p:spPr>
-        <p:txBody>
-          <a:bodyPr wrap="square" rtlCol="0">
-            <a:spAutoFit/>
-          </a:bodyPr>
-          <a:lstStyle/>
-          <a:p>
-            <a:pPr marL="0" marR="0" lvl="0" indent="0" algn="l" defTabSz="914400" rtl="0" eaLnBrk="1" fontAlgn="auto" latinLnBrk="0" hangingPunct="1">
-              <a:lnSpc>
-                <a:spcPct val="100000"/>
-              </a:lnSpc>
-              <a:spcBef>
-                <a:spcPts val="0"/>
-              </a:spcBef>
-              <a:spcAft>
-                <a:spcPts val="0"/>
-              </a:spcAft>
-              <a:buClrTx/>
-              <a:buSzTx/>
-              <a:buFontTx/>
-              <a:buNone/>
-              <a:tabLst/>
-              <a:defRPr/>
-            </a:pPr>
-            <a:r>
-              <a:rPr kumimoji="0" lang="en-US" sz="3200" b="1" i="0" u="none" strike="noStrike" kern="1200" cap="none" spc="0" normalizeH="0" baseline="0" noProof="0" dirty="0">
-                <a:ln>
-                  <a:noFill/>
-                </a:ln>
-                <a:solidFill>
-                  <a:prstClr val="black"/>
-                </a:solidFill>
-                <a:effectLst/>
-                <a:uLnTx/>
-                <a:uFillTx/>
-                <a:latin typeface="Calibri" panose="020F0502020204030204"/>
-                <a:ea typeface="+mn-ea"/>
-                <a:cs typeface="+mn-cs"/>
-              </a:rPr>
-              <a:t>0.2075</a:t>
-            </a:r>
-          </a:p>
-        </p:txBody>
-      </p:sp>
-      <p:sp>
-        <p:nvSpPr>
-          <p:cNvPr id="16" name="TextBox 15">
-            <a:extLst>
-              <a:ext uri="{FF2B5EF4-FFF2-40B4-BE49-F238E27FC236}">
-                <a16:creationId xmlns:a16="http://schemas.microsoft.com/office/drawing/2014/main" id="{B4F50B5D-8A6C-6E04-E31C-73711B146937}"/>
-              </a:ext>
-            </a:extLst>
-          </p:cNvPr>
-          <p:cNvSpPr txBox="1"/>
-          <p:nvPr/>
-        </p:nvSpPr>
-        <p:spPr>
-          <a:xfrm>
-            <a:off x="10379748" y="3695445"/>
-            <a:ext cx="1519982" cy="584775"/>
-          </a:xfrm>
-          <a:prstGeom prst="rect">
-            <a:avLst/>
-          </a:prstGeom>
-          <a:noFill/>
-        </p:spPr>
-        <p:txBody>
-          <a:bodyPr wrap="square" rtlCol="0">
-            <a:spAutoFit/>
-          </a:bodyPr>
-          <a:lstStyle/>
-          <a:p>
-            <a:pPr marL="0" marR="0" lvl="0" indent="0" algn="l" defTabSz="914400" rtl="0" eaLnBrk="1" fontAlgn="auto" latinLnBrk="0" hangingPunct="1">
-              <a:lnSpc>
-                <a:spcPct val="100000"/>
-              </a:lnSpc>
-              <a:spcBef>
-                <a:spcPts val="0"/>
-              </a:spcBef>
-              <a:spcAft>
-                <a:spcPts val="0"/>
-              </a:spcAft>
-              <a:buClrTx/>
-              <a:buSzTx/>
-              <a:buFontTx/>
-              <a:buNone/>
-              <a:tabLst/>
-              <a:defRPr/>
-            </a:pPr>
-            <a:r>
-              <a:rPr kumimoji="0" lang="en-US" sz="3200" b="1" i="0" u="none" strike="noStrike" kern="1200" cap="none" spc="0" normalizeH="0" baseline="0" noProof="0" dirty="0">
-                <a:ln>
-                  <a:noFill/>
-                </a:ln>
-                <a:solidFill>
-                  <a:prstClr val="black"/>
-                </a:solidFill>
-                <a:effectLst/>
-                <a:uLnTx/>
-                <a:uFillTx/>
-                <a:latin typeface="Calibri" panose="020F0502020204030204"/>
-                <a:ea typeface="+mn-ea"/>
-                <a:cs typeface="+mn-cs"/>
-              </a:rPr>
-              <a:t>0.3075</a:t>
-            </a:r>
-          </a:p>
-        </p:txBody>
-      </p:sp>
-      <p:sp>
-        <p:nvSpPr>
-          <p:cNvPr id="17" name="TextBox 16">
-            <a:extLst>
-              <a:ext uri="{FF2B5EF4-FFF2-40B4-BE49-F238E27FC236}">
-                <a16:creationId xmlns:a16="http://schemas.microsoft.com/office/drawing/2014/main" id="{85DD03A1-DDC1-30F8-F516-596279C46586}"/>
-              </a:ext>
-            </a:extLst>
-          </p:cNvPr>
-          <p:cNvSpPr txBox="1"/>
-          <p:nvPr/>
-        </p:nvSpPr>
-        <p:spPr>
-          <a:xfrm>
-            <a:off x="10368380" y="4882660"/>
-            <a:ext cx="1519982" cy="584775"/>
-          </a:xfrm>
-          <a:prstGeom prst="rect">
-            <a:avLst/>
-          </a:prstGeom>
-          <a:noFill/>
-        </p:spPr>
-        <p:txBody>
-          <a:bodyPr wrap="square" rtlCol="0">
-            <a:spAutoFit/>
-          </a:bodyPr>
-          <a:lstStyle/>
-          <a:p>
-            <a:pPr marL="0" marR="0" lvl="0" indent="0" algn="l" defTabSz="914400" rtl="0" eaLnBrk="1" fontAlgn="auto" latinLnBrk="0" hangingPunct="1">
-              <a:lnSpc>
-                <a:spcPct val="100000"/>
-              </a:lnSpc>
-              <a:spcBef>
-                <a:spcPts val="0"/>
-              </a:spcBef>
-              <a:spcAft>
-                <a:spcPts val="0"/>
-              </a:spcAft>
-              <a:buClrTx/>
-              <a:buSzTx/>
-              <a:buFontTx/>
-              <a:buNone/>
-              <a:tabLst/>
-              <a:defRPr/>
-            </a:pPr>
-            <a:r>
-              <a:rPr kumimoji="0" lang="en-US" sz="3200" b="1" i="0" u="none" strike="noStrike" kern="1200" cap="none" spc="0" normalizeH="0" baseline="0" noProof="0" dirty="0">
-                <a:ln>
-                  <a:noFill/>
-                </a:ln>
-                <a:solidFill>
-                  <a:prstClr val="black"/>
-                </a:solidFill>
-                <a:effectLst/>
-                <a:uLnTx/>
-                <a:uFillTx/>
-                <a:latin typeface="Calibri" panose="020F0502020204030204"/>
-                <a:ea typeface="+mn-ea"/>
-                <a:cs typeface="+mn-cs"/>
-              </a:rPr>
-              <a:t>0.2075</a:t>
-            </a:r>
-          </a:p>
-        </p:txBody>
-      </p:sp>
-    </p:spTree>
-    <p:extLst>
-      <p:ext uri="{BB962C8B-B14F-4D97-AF65-F5344CB8AC3E}">
-        <p14:creationId xmlns:p14="http://schemas.microsoft.com/office/powerpoint/2010/main" val="2380952136"/>
-      </p:ext>
-    </p:extLst>
-  </p:cSld>
-  <p:clrMapOvr>
-    <a:masterClrMapping/>
-  </p:clrMapOvr>
-</p:sld>
-</file>
-
-<file path=ppt/slides/slide18.xml><?xml version="1.0" encoding="utf-8"?>
-<p:sld xmlns:a="http://schemas.openxmlformats.org/drawingml/2006/main" xmlns:r="http://schemas.openxmlformats.org/officeDocument/2006/relationships" xmlns:p="http://schemas.openxmlformats.org/presentationml/2006/main">
-  <p:cSld>
-    <p:spTree>
-      <p:nvGrpSpPr>
-        <p:cNvPr id="1" name=""/>
-        <p:cNvGrpSpPr/>
-        <p:nvPr/>
-      </p:nvGrpSpPr>
-      <p:grpSpPr>
-        <a:xfrm>
-          <a:off x="0" y="0"/>
-          <a:ext cx="0" cy="0"/>
-          <a:chOff x="0" y="0"/>
-          <a:chExt cx="0" cy="0"/>
-        </a:xfrm>
-      </p:grpSpPr>
-      <p:sp>
-        <p:nvSpPr>
-          <p:cNvPr id="2" name="Title 1">
-            <a:extLst>
-              <a:ext uri="{FF2B5EF4-FFF2-40B4-BE49-F238E27FC236}">
-                <a16:creationId xmlns:a16="http://schemas.microsoft.com/office/drawing/2014/main" id="{38AD36AB-AA77-30AC-1262-AAB8697C7AEC}"/>
-              </a:ext>
-            </a:extLst>
-          </p:cNvPr>
-          <p:cNvSpPr>
-            <a:spLocks noGrp="1"/>
-          </p:cNvSpPr>
-          <p:nvPr>
-            <p:ph type="title"/>
-          </p:nvPr>
-        </p:nvSpPr>
-        <p:spPr/>
-        <p:txBody>
-          <a:bodyPr/>
-          <a:lstStyle/>
-          <a:p>
-            <a:r>
-              <a:rPr lang="en-US" dirty="0"/>
-              <a:t>Practice Computing AUC</a:t>
-            </a:r>
-          </a:p>
-        </p:txBody>
-      </p:sp>
-      <mc:AlternateContent xmlns:mc="http://schemas.openxmlformats.org/markup-compatibility/2006" xmlns:a14="http://schemas.microsoft.com/office/drawing/2010/main">
-        <mc:Choice Requires="a14">
-          <p:sp>
-            <p:nvSpPr>
-              <p:cNvPr id="3" name="Content Placeholder 2">
-                <a:extLst>
-                  <a:ext uri="{FF2B5EF4-FFF2-40B4-BE49-F238E27FC236}">
-                    <a16:creationId xmlns:a16="http://schemas.microsoft.com/office/drawing/2014/main" id="{69FEC08B-830D-DDAD-7E2A-74533C9D636A}"/>
-                  </a:ext>
-                </a:extLst>
-              </p:cNvPr>
-              <p:cNvSpPr>
-                <a:spLocks noGrp="1"/>
-              </p:cNvSpPr>
-              <p:nvPr>
-                <p:ph idx="1"/>
-              </p:nvPr>
-            </p:nvSpPr>
-            <p:spPr>
-              <a:xfrm>
-                <a:off x="838200" y="1825625"/>
-                <a:ext cx="4342466" cy="4351338"/>
-              </a:xfrm>
-            </p:spPr>
-            <p:txBody>
-              <a:bodyPr/>
-              <a:lstStyle/>
-              <a:p>
-                <a:r>
-                  <a:rPr lang="en-US" dirty="0"/>
-                  <a:t>Fifth threshold is 0.35</a:t>
-                </a:r>
-              </a:p>
-              <a:p>
-                <a:pPr lvl="1"/>
-                <a14:m>
-                  <m:oMath xmlns:m="http://schemas.openxmlformats.org/officeDocument/2006/math">
-                    <m:r>
-                      <a:rPr lang="en-US" b="0" i="1" smtClean="0">
-                        <a:latin typeface="Cambria Math" panose="02040503050406030204" pitchFamily="18" charset="0"/>
-                      </a:rPr>
-                      <m:t>𝑇𝑃𝑅</m:t>
-                    </m:r>
-                    <m:r>
-                      <a:rPr lang="en-US" b="0" i="1" smtClean="0">
-                        <a:latin typeface="Cambria Math" panose="02040503050406030204" pitchFamily="18" charset="0"/>
-                      </a:rPr>
-                      <m:t>=</m:t>
-                    </m:r>
-                    <m:f>
-                      <m:fPr>
-                        <m:ctrlPr>
-                          <a:rPr lang="en-US" b="0" i="1" smtClean="0">
-                            <a:latin typeface="Cambria Math" panose="02040503050406030204" pitchFamily="18" charset="0"/>
-                          </a:rPr>
-                        </m:ctrlPr>
-                      </m:fPr>
-                      <m:num>
-                        <m:r>
-                          <a:rPr lang="en-US" b="0" i="1" smtClean="0">
-                            <a:latin typeface="Cambria Math" panose="02040503050406030204" pitchFamily="18" charset="0"/>
-                          </a:rPr>
-                          <m:t>50</m:t>
-                        </m:r>
-                      </m:num>
-                      <m:den>
-                        <m:r>
-                          <a:rPr lang="en-US" b="0" i="1" smtClean="0">
-                            <a:latin typeface="Cambria Math" panose="02040503050406030204" pitchFamily="18" charset="0"/>
-                          </a:rPr>
-                          <m:t>50</m:t>
-                        </m:r>
-                      </m:den>
-                    </m:f>
-                    <m:r>
-                      <a:rPr lang="en-US" b="0" i="1" smtClean="0">
-                        <a:latin typeface="Cambria Math" panose="02040503050406030204" pitchFamily="18" charset="0"/>
-                      </a:rPr>
-                      <m:t>=.95</m:t>
-                    </m:r>
-                  </m:oMath>
-                </a14:m>
-                <a:endParaRPr lang="en-US" b="0" dirty="0"/>
-              </a:p>
-              <a:p>
-                <a:pPr lvl="1"/>
-                <a14:m>
-                  <m:oMath xmlns:m="http://schemas.openxmlformats.org/officeDocument/2006/math">
-                    <m:r>
-                      <a:rPr lang="en-US" b="0" i="1" smtClean="0">
-                        <a:latin typeface="Cambria Math" panose="02040503050406030204" pitchFamily="18" charset="0"/>
-                      </a:rPr>
-                      <m:t>𝐹𝑃𝑅</m:t>
-                    </m:r>
-                    <m:r>
-                      <a:rPr lang="en-US" b="0" i="1" smtClean="0">
-                        <a:latin typeface="Cambria Math" panose="02040503050406030204" pitchFamily="18" charset="0"/>
-                      </a:rPr>
-                      <m:t>=</m:t>
-                    </m:r>
-                    <m:f>
-                      <m:fPr>
-                        <m:ctrlPr>
-                          <a:rPr lang="en-US" b="0" i="1" smtClean="0">
-                            <a:latin typeface="Cambria Math" panose="02040503050406030204" pitchFamily="18" charset="0"/>
-                          </a:rPr>
-                        </m:ctrlPr>
-                      </m:fPr>
-                      <m:num>
-                        <m:r>
-                          <a:rPr lang="en-US" b="0" i="1" smtClean="0">
-                            <a:latin typeface="Cambria Math" panose="02040503050406030204" pitchFamily="18" charset="0"/>
-                          </a:rPr>
-                          <m:t>0</m:t>
-                        </m:r>
-                      </m:num>
-                      <m:den>
-                        <m:r>
-                          <a:rPr lang="en-US" b="0" i="1" smtClean="0">
-                            <a:latin typeface="Cambria Math" panose="02040503050406030204" pitchFamily="18" charset="0"/>
-                          </a:rPr>
-                          <m:t>400</m:t>
-                        </m:r>
-                      </m:den>
-                    </m:f>
-                    <m:r>
-                      <a:rPr lang="en-US" b="0" i="1" smtClean="0">
-                        <a:latin typeface="Cambria Math" panose="02040503050406030204" pitchFamily="18" charset="0"/>
-                      </a:rPr>
-                      <m:t>=0</m:t>
-                    </m:r>
-                  </m:oMath>
-                </a14:m>
-                <a:endParaRPr lang="en-US" dirty="0"/>
-              </a:p>
-            </p:txBody>
-          </p:sp>
-        </mc:Choice>
-        <mc:Fallback xmlns="">
-          <p:sp>
-            <p:nvSpPr>
-              <p:cNvPr id="3" name="Content Placeholder 2">
-                <a:extLst>
-                  <a:ext uri="{FF2B5EF4-FFF2-40B4-BE49-F238E27FC236}">
-                    <a16:creationId xmlns:a16="http://schemas.microsoft.com/office/drawing/2014/main" id="{69FEC08B-830D-DDAD-7E2A-74533C9D636A}"/>
-                  </a:ext>
-                </a:extLst>
-              </p:cNvPr>
-              <p:cNvSpPr>
-                <a:spLocks noGrp="1" noRot="1" noChangeAspect="1" noMove="1" noResize="1" noEditPoints="1" noAdjustHandles="1" noChangeArrowheads="1" noChangeShapeType="1" noTextEdit="1"/>
-              </p:cNvSpPr>
-              <p:nvPr>
-                <p:ph idx="1"/>
-              </p:nvPr>
-            </p:nvSpPr>
-            <p:spPr>
-              <a:xfrm>
-                <a:off x="838200" y="1825625"/>
-                <a:ext cx="4342466" cy="4351338"/>
-              </a:xfrm>
-              <a:blipFill>
-                <a:blip r:embed="rId2"/>
-                <a:stretch>
-                  <a:fillRect l="-2528" t="-2381"/>
-                </a:stretch>
-              </a:blipFill>
-            </p:spPr>
-            <p:txBody>
-              <a:bodyPr/>
-              <a:lstStyle/>
-              <a:p>
-                <a:r>
-                  <a:rPr lang="en-US">
-                    <a:noFill/>
-                  </a:rPr>
-                  <a:t> </a:t>
-                </a:r>
-              </a:p>
-            </p:txBody>
-          </p:sp>
-        </mc:Fallback>
-      </mc:AlternateContent>
-      <p:pic>
-        <p:nvPicPr>
-          <p:cNvPr id="4" name="Picture 2">
-            <a:extLst>
-              <a:ext uri="{FF2B5EF4-FFF2-40B4-BE49-F238E27FC236}">
-                <a16:creationId xmlns:a16="http://schemas.microsoft.com/office/drawing/2014/main" id="{A1F17147-DC3E-3B8B-1D59-C318551DB2C4}"/>
-              </a:ext>
-            </a:extLst>
-          </p:cNvPr>
-          <p:cNvPicPr>
-            <a:picLocks noChangeAspect="1" noChangeArrowheads="1"/>
-          </p:cNvPicPr>
-          <p:nvPr/>
-        </p:nvPicPr>
-        <p:blipFill>
-          <a:blip r:embed="rId3">
-            <a:alphaModFix amt="57000"/>
-            <a:extLst>
-              <a:ext uri="{28A0092B-C50C-407E-A947-70E740481C1C}">
-                <a14:useLocalDpi xmlns:a14="http://schemas.microsoft.com/office/drawing/2010/main" val="0"/>
-              </a:ext>
-            </a:extLst>
-          </a:blip>
-          <a:srcRect/>
-          <a:stretch>
-            <a:fillRect/>
-          </a:stretch>
-        </p:blipFill>
-        <p:spPr bwMode="auto">
-          <a:xfrm>
-            <a:off x="5742804" y="2245421"/>
-            <a:ext cx="5946616" cy="3418265"/>
-          </a:xfrm>
-          <a:prstGeom prst="rect">
-            <a:avLst/>
-          </a:prstGeom>
-          <a:noFill/>
-          <a:extLst>
-            <a:ext uri="{909E8E84-426E-40DD-AFC4-6F175D3DCCD1}">
-              <a14:hiddenFill xmlns:a14="http://schemas.microsoft.com/office/drawing/2010/main">
-                <a:solidFill>
-                  <a:srgbClr val="FFFFFF"/>
-                </a:solidFill>
-              </a14:hiddenFill>
-            </a:ext>
-          </a:extLst>
-        </p:spPr>
-      </p:pic>
-      <p:cxnSp>
-        <p:nvCxnSpPr>
-          <p:cNvPr id="5" name="Straight Connector 4">
-            <a:extLst>
-              <a:ext uri="{FF2B5EF4-FFF2-40B4-BE49-F238E27FC236}">
-                <a16:creationId xmlns:a16="http://schemas.microsoft.com/office/drawing/2014/main" id="{93AC20D3-2C9A-84D7-6ACD-F099213C501D}"/>
-              </a:ext>
-            </a:extLst>
-          </p:cNvPr>
-          <p:cNvCxnSpPr>
-            <a:cxnSpLocks/>
-          </p:cNvCxnSpPr>
-          <p:nvPr/>
-        </p:nvCxnSpPr>
-        <p:spPr>
-          <a:xfrm>
-            <a:off x="5976813" y="3617678"/>
-            <a:ext cx="5784351" cy="0"/>
-          </a:xfrm>
-          <a:prstGeom prst="line">
-            <a:avLst/>
-          </a:prstGeom>
-          <a:ln w="53975">
-            <a:solidFill>
-              <a:schemeClr val="accent6"/>
-            </a:solidFill>
-          </a:ln>
-        </p:spPr>
-        <p:style>
-          <a:lnRef idx="1">
-            <a:schemeClr val="accent1"/>
-          </a:lnRef>
-          <a:fillRef idx="0">
-            <a:schemeClr val="accent1"/>
-          </a:fillRef>
-          <a:effectRef idx="0">
-            <a:schemeClr val="accent1"/>
-          </a:effectRef>
-          <a:fontRef idx="minor">
-            <a:schemeClr val="tx1"/>
-          </a:fontRef>
-        </p:style>
-      </p:cxnSp>
-      <p:cxnSp>
-        <p:nvCxnSpPr>
-          <p:cNvPr id="6" name="Straight Connector 5">
-            <a:extLst>
-              <a:ext uri="{FF2B5EF4-FFF2-40B4-BE49-F238E27FC236}">
-                <a16:creationId xmlns:a16="http://schemas.microsoft.com/office/drawing/2014/main" id="{EAA8A685-36D2-3E5E-C9C7-05F762E8639B}"/>
-              </a:ext>
-            </a:extLst>
-          </p:cNvPr>
-          <p:cNvCxnSpPr>
-            <a:cxnSpLocks/>
-          </p:cNvCxnSpPr>
-          <p:nvPr/>
-        </p:nvCxnSpPr>
-        <p:spPr>
-          <a:xfrm>
-            <a:off x="5955299" y="4398570"/>
-            <a:ext cx="5784351" cy="0"/>
-          </a:xfrm>
-          <a:prstGeom prst="line">
-            <a:avLst/>
-          </a:prstGeom>
-          <a:ln w="53975">
-            <a:solidFill>
-              <a:schemeClr val="accent6"/>
-            </a:solidFill>
-          </a:ln>
-        </p:spPr>
-        <p:style>
-          <a:lnRef idx="1">
-            <a:schemeClr val="accent1"/>
-          </a:lnRef>
-          <a:fillRef idx="0">
-            <a:schemeClr val="accent1"/>
-          </a:fillRef>
-          <a:effectRef idx="0">
-            <a:schemeClr val="accent1"/>
-          </a:effectRef>
-          <a:fontRef idx="minor">
-            <a:schemeClr val="tx1"/>
-          </a:fontRef>
-        </p:style>
-      </p:cxnSp>
-      <p:cxnSp>
-        <p:nvCxnSpPr>
-          <p:cNvPr id="7" name="Straight Connector 6">
-            <a:extLst>
-              <a:ext uri="{FF2B5EF4-FFF2-40B4-BE49-F238E27FC236}">
-                <a16:creationId xmlns:a16="http://schemas.microsoft.com/office/drawing/2014/main" id="{B22E7F41-C3D3-0E39-7BDF-81D37816D9E1}"/>
-              </a:ext>
-            </a:extLst>
-          </p:cNvPr>
-          <p:cNvCxnSpPr>
-            <a:cxnSpLocks/>
-          </p:cNvCxnSpPr>
-          <p:nvPr/>
-        </p:nvCxnSpPr>
-        <p:spPr>
-          <a:xfrm flipV="1">
-            <a:off x="8040130" y="2352697"/>
-            <a:ext cx="0" cy="3193227"/>
-          </a:xfrm>
-          <a:prstGeom prst="line">
-            <a:avLst/>
-          </a:prstGeom>
-          <a:ln w="53975">
-            <a:solidFill>
-              <a:schemeClr val="accent6"/>
-            </a:solidFill>
-          </a:ln>
-        </p:spPr>
-        <p:style>
-          <a:lnRef idx="1">
-            <a:schemeClr val="accent1"/>
-          </a:lnRef>
-          <a:fillRef idx="0">
-            <a:schemeClr val="accent1"/>
-          </a:fillRef>
-          <a:effectRef idx="0">
-            <a:schemeClr val="accent1"/>
-          </a:effectRef>
-          <a:fontRef idx="minor">
-            <a:schemeClr val="tx1"/>
-          </a:fontRef>
-        </p:style>
-      </p:cxnSp>
-      <p:cxnSp>
-        <p:nvCxnSpPr>
-          <p:cNvPr id="8" name="Straight Connector 7">
-            <a:extLst>
-              <a:ext uri="{FF2B5EF4-FFF2-40B4-BE49-F238E27FC236}">
-                <a16:creationId xmlns:a16="http://schemas.microsoft.com/office/drawing/2014/main" id="{55A732EF-4B9F-E31C-EA68-E177A80DC2F6}"/>
-              </a:ext>
-            </a:extLst>
-          </p:cNvPr>
-          <p:cNvCxnSpPr>
-            <a:cxnSpLocks/>
-          </p:cNvCxnSpPr>
-          <p:nvPr/>
-        </p:nvCxnSpPr>
-        <p:spPr>
-          <a:xfrm>
-            <a:off x="9490372" y="2352697"/>
-            <a:ext cx="0" cy="3193227"/>
-          </a:xfrm>
-          <a:prstGeom prst="line">
-            <a:avLst/>
-          </a:prstGeom>
-          <a:ln w="53975">
-            <a:solidFill>
-              <a:schemeClr val="accent6"/>
-            </a:solidFill>
-          </a:ln>
-        </p:spPr>
-        <p:style>
-          <a:lnRef idx="1">
-            <a:schemeClr val="accent1"/>
-          </a:lnRef>
-          <a:fillRef idx="0">
-            <a:schemeClr val="accent1"/>
-          </a:fillRef>
-          <a:effectRef idx="0">
-            <a:schemeClr val="accent1"/>
-          </a:effectRef>
-          <a:fontRef idx="minor">
-            <a:schemeClr val="tx1"/>
-          </a:fontRef>
-        </p:style>
-      </p:cxnSp>
-      <p:sp>
-        <p:nvSpPr>
-          <p:cNvPr id="9" name="TextBox 8">
-            <a:extLst>
-              <a:ext uri="{FF2B5EF4-FFF2-40B4-BE49-F238E27FC236}">
-                <a16:creationId xmlns:a16="http://schemas.microsoft.com/office/drawing/2014/main" id="{040CA625-BB1A-13B1-ABE8-4A4FD9BD6FD9}"/>
-              </a:ext>
-            </a:extLst>
-          </p:cNvPr>
-          <p:cNvSpPr txBox="1"/>
-          <p:nvPr/>
-        </p:nvSpPr>
-        <p:spPr>
-          <a:xfrm>
-            <a:off x="6094818" y="2292535"/>
-            <a:ext cx="1519982" cy="584775"/>
-          </a:xfrm>
-          <a:prstGeom prst="rect">
-            <a:avLst/>
-          </a:prstGeom>
-          <a:noFill/>
-        </p:spPr>
-        <p:txBody>
-          <a:bodyPr wrap="square" rtlCol="0">
-            <a:spAutoFit/>
-          </a:bodyPr>
-          <a:lstStyle/>
-          <a:p>
-            <a:pPr marL="0" marR="0" lvl="0" indent="0" algn="l" defTabSz="914400" rtl="0" eaLnBrk="1" fontAlgn="auto" latinLnBrk="0" hangingPunct="1">
-              <a:lnSpc>
-                <a:spcPct val="100000"/>
-              </a:lnSpc>
-              <a:spcBef>
-                <a:spcPts val="0"/>
-              </a:spcBef>
-              <a:spcAft>
-                <a:spcPts val="0"/>
-              </a:spcAft>
-              <a:buClrTx/>
-              <a:buSzTx/>
-              <a:buFontTx/>
-              <a:buNone/>
-              <a:tabLst/>
-              <a:defRPr/>
-            </a:pPr>
-            <a:r>
-              <a:rPr kumimoji="0" lang="en-US" sz="3200" b="1" i="0" u="none" strike="noStrike" kern="1200" cap="none" spc="0" normalizeH="0" baseline="0" noProof="0" dirty="0">
-                <a:ln>
-                  <a:noFill/>
-                </a:ln>
-                <a:solidFill>
-                  <a:prstClr val="black"/>
-                </a:solidFill>
-                <a:effectLst/>
-                <a:uLnTx/>
-                <a:uFillTx/>
-                <a:latin typeface="Calibri" panose="020F0502020204030204"/>
-                <a:ea typeface="+mn-ea"/>
-                <a:cs typeface="+mn-cs"/>
-              </a:rPr>
-              <a:t>0.1825</a:t>
-            </a:r>
-          </a:p>
-        </p:txBody>
-      </p:sp>
-      <p:sp>
-        <p:nvSpPr>
-          <p:cNvPr id="10" name="TextBox 9">
-            <a:extLst>
-              <a:ext uri="{FF2B5EF4-FFF2-40B4-BE49-F238E27FC236}">
-                <a16:creationId xmlns:a16="http://schemas.microsoft.com/office/drawing/2014/main" id="{118F478A-C678-7216-1A9E-1D1A71C34AB9}"/>
-              </a:ext>
-            </a:extLst>
-          </p:cNvPr>
-          <p:cNvSpPr txBox="1"/>
-          <p:nvPr/>
-        </p:nvSpPr>
-        <p:spPr>
-          <a:xfrm>
-            <a:off x="8037572" y="3580290"/>
-            <a:ext cx="1093819" cy="584775"/>
-          </a:xfrm>
-          <a:prstGeom prst="rect">
-            <a:avLst/>
-          </a:prstGeom>
-          <a:noFill/>
-        </p:spPr>
-        <p:txBody>
-          <a:bodyPr wrap="square" rtlCol="0">
-            <a:spAutoFit/>
-          </a:bodyPr>
-          <a:lstStyle/>
-          <a:p>
-            <a:pPr marL="0" marR="0" lvl="0" indent="0" algn="l" defTabSz="914400" rtl="0" eaLnBrk="1" fontAlgn="auto" latinLnBrk="0" hangingPunct="1">
-              <a:lnSpc>
-                <a:spcPct val="100000"/>
-              </a:lnSpc>
-              <a:spcBef>
-                <a:spcPts val="0"/>
-              </a:spcBef>
-              <a:spcAft>
-                <a:spcPts val="0"/>
-              </a:spcAft>
-              <a:buClrTx/>
-              <a:buSzTx/>
-              <a:buFontTx/>
-              <a:buNone/>
-              <a:tabLst/>
-              <a:defRPr/>
-            </a:pPr>
-            <a:r>
-              <a:rPr kumimoji="0" lang="en-US" sz="3200" b="1" i="0" u="none" strike="noStrike" kern="1200" cap="none" spc="0" normalizeH="0" baseline="0" noProof="0" dirty="0">
-                <a:ln>
-                  <a:noFill/>
-                </a:ln>
-                <a:solidFill>
-                  <a:prstClr val="black"/>
-                </a:solidFill>
-                <a:effectLst/>
-                <a:uLnTx/>
-                <a:uFillTx/>
-                <a:latin typeface="Calibri" panose="020F0502020204030204"/>
-                <a:ea typeface="+mn-ea"/>
-                <a:cs typeface="+mn-cs"/>
-              </a:rPr>
-              <a:t>0.39</a:t>
-            </a:r>
-          </a:p>
-        </p:txBody>
-      </p:sp>
-      <p:sp>
-        <p:nvSpPr>
-          <p:cNvPr id="11" name="TextBox 10">
-            <a:extLst>
-              <a:ext uri="{FF2B5EF4-FFF2-40B4-BE49-F238E27FC236}">
-                <a16:creationId xmlns:a16="http://schemas.microsoft.com/office/drawing/2014/main" id="{CBD2BC6D-E002-76EA-F0A5-BD206B010518}"/>
-              </a:ext>
-            </a:extLst>
-          </p:cNvPr>
-          <p:cNvSpPr txBox="1"/>
-          <p:nvPr/>
-        </p:nvSpPr>
-        <p:spPr>
-          <a:xfrm>
-            <a:off x="8067704" y="2295305"/>
-            <a:ext cx="1519982" cy="584775"/>
-          </a:xfrm>
-          <a:prstGeom prst="rect">
-            <a:avLst/>
-          </a:prstGeom>
-          <a:noFill/>
-        </p:spPr>
-        <p:txBody>
-          <a:bodyPr wrap="square" rtlCol="0">
-            <a:spAutoFit/>
-          </a:bodyPr>
-          <a:lstStyle/>
-          <a:p>
-            <a:pPr marL="0" marR="0" lvl="0" indent="0" algn="l" defTabSz="914400" rtl="0" eaLnBrk="1" fontAlgn="auto" latinLnBrk="0" hangingPunct="1">
-              <a:lnSpc>
-                <a:spcPct val="100000"/>
-              </a:lnSpc>
-              <a:spcBef>
-                <a:spcPts val="0"/>
-              </a:spcBef>
-              <a:spcAft>
-                <a:spcPts val="0"/>
-              </a:spcAft>
-              <a:buClrTx/>
-              <a:buSzTx/>
-              <a:buFontTx/>
-              <a:buNone/>
-              <a:tabLst/>
-              <a:defRPr/>
-            </a:pPr>
-            <a:r>
-              <a:rPr kumimoji="0" lang="en-US" sz="3200" b="1" i="0" u="none" strike="noStrike" kern="1200" cap="none" spc="0" normalizeH="0" baseline="0" noProof="0" dirty="0">
-                <a:ln>
-                  <a:noFill/>
-                </a:ln>
-                <a:solidFill>
-                  <a:prstClr val="black"/>
-                </a:solidFill>
-                <a:effectLst/>
-                <a:uLnTx/>
-                <a:uFillTx/>
-                <a:latin typeface="Calibri" panose="020F0502020204030204"/>
-                <a:ea typeface="+mn-ea"/>
-                <a:cs typeface="+mn-cs"/>
-              </a:rPr>
-              <a:t>0.165</a:t>
-            </a:r>
-          </a:p>
-        </p:txBody>
-      </p:sp>
-      <p:sp>
-        <p:nvSpPr>
-          <p:cNvPr id="12" name="TextBox 11">
-            <a:extLst>
-              <a:ext uri="{FF2B5EF4-FFF2-40B4-BE49-F238E27FC236}">
-                <a16:creationId xmlns:a16="http://schemas.microsoft.com/office/drawing/2014/main" id="{0A68A798-D518-1DC1-10E2-C25421ACC8D2}"/>
-              </a:ext>
-            </a:extLst>
-          </p:cNvPr>
-          <p:cNvSpPr txBox="1"/>
-          <p:nvPr/>
-        </p:nvSpPr>
-        <p:spPr>
-          <a:xfrm>
-            <a:off x="8206317" y="4917004"/>
-            <a:ext cx="1519982" cy="584775"/>
-          </a:xfrm>
-          <a:prstGeom prst="rect">
-            <a:avLst/>
-          </a:prstGeom>
-          <a:noFill/>
-        </p:spPr>
-        <p:txBody>
-          <a:bodyPr wrap="square" rtlCol="0">
-            <a:spAutoFit/>
-          </a:bodyPr>
-          <a:lstStyle/>
-          <a:p>
-            <a:pPr marL="0" marR="0" lvl="0" indent="0" algn="l" defTabSz="914400" rtl="0" eaLnBrk="1" fontAlgn="auto" latinLnBrk="0" hangingPunct="1">
-              <a:lnSpc>
-                <a:spcPct val="100000"/>
-              </a:lnSpc>
-              <a:spcBef>
-                <a:spcPts val="0"/>
-              </a:spcBef>
-              <a:spcAft>
-                <a:spcPts val="0"/>
-              </a:spcAft>
-              <a:buClrTx/>
-              <a:buSzTx/>
-              <a:buFontTx/>
-              <a:buNone/>
-              <a:tabLst/>
-              <a:defRPr/>
-            </a:pPr>
-            <a:r>
-              <a:rPr kumimoji="0" lang="en-US" sz="3200" b="1" i="0" u="none" strike="noStrike" kern="1200" cap="none" spc="0" normalizeH="0" baseline="0" noProof="0" dirty="0">
-                <a:ln>
-                  <a:noFill/>
-                </a:ln>
-                <a:solidFill>
-                  <a:prstClr val="black"/>
-                </a:solidFill>
-                <a:effectLst/>
-                <a:uLnTx/>
-                <a:uFillTx/>
-                <a:latin typeface="Calibri" panose="020F0502020204030204"/>
-                <a:ea typeface="+mn-ea"/>
-                <a:cs typeface="+mn-cs"/>
-              </a:rPr>
-              <a:t>0.29</a:t>
-            </a:r>
-          </a:p>
-        </p:txBody>
-      </p:sp>
-      <p:sp>
-        <p:nvSpPr>
-          <p:cNvPr id="13" name="TextBox 12">
-            <a:extLst>
-              <a:ext uri="{FF2B5EF4-FFF2-40B4-BE49-F238E27FC236}">
-                <a16:creationId xmlns:a16="http://schemas.microsoft.com/office/drawing/2014/main" id="{5C579F48-E01D-589B-0AB6-222704EB2010}"/>
-              </a:ext>
-            </a:extLst>
-          </p:cNvPr>
-          <p:cNvSpPr txBox="1"/>
-          <p:nvPr/>
-        </p:nvSpPr>
-        <p:spPr>
-          <a:xfrm>
-            <a:off x="10383833" y="2302673"/>
-            <a:ext cx="1519982" cy="584775"/>
-          </a:xfrm>
-          <a:prstGeom prst="rect">
-            <a:avLst/>
-          </a:prstGeom>
-          <a:noFill/>
-        </p:spPr>
-        <p:txBody>
-          <a:bodyPr wrap="square" rtlCol="0">
-            <a:spAutoFit/>
-          </a:bodyPr>
-          <a:lstStyle/>
-          <a:p>
-            <a:pPr marL="0" marR="0" lvl="0" indent="0" algn="l" defTabSz="914400" rtl="0" eaLnBrk="1" fontAlgn="auto" latinLnBrk="0" hangingPunct="1">
-              <a:lnSpc>
-                <a:spcPct val="100000"/>
-              </a:lnSpc>
-              <a:spcBef>
-                <a:spcPts val="0"/>
-              </a:spcBef>
-              <a:spcAft>
-                <a:spcPts val="0"/>
-              </a:spcAft>
-              <a:buClrTx/>
-              <a:buSzTx/>
-              <a:buFontTx/>
-              <a:buNone/>
-              <a:tabLst/>
-              <a:defRPr/>
-            </a:pPr>
-            <a:r>
-              <a:rPr kumimoji="0" lang="en-US" sz="3200" b="1" i="0" u="none" strike="noStrike" kern="1200" cap="none" spc="0" normalizeH="0" baseline="0" noProof="0" dirty="0">
-                <a:ln>
-                  <a:noFill/>
-                </a:ln>
-                <a:solidFill>
-                  <a:prstClr val="black"/>
-                </a:solidFill>
-                <a:effectLst/>
-                <a:uLnTx/>
-                <a:uFillTx/>
-                <a:latin typeface="Calibri" panose="020F0502020204030204"/>
-                <a:ea typeface="+mn-ea"/>
-                <a:cs typeface="+mn-cs"/>
-              </a:rPr>
-              <a:t>0.1825</a:t>
-            </a:r>
-          </a:p>
-        </p:txBody>
-      </p:sp>
-      <p:sp>
-        <p:nvSpPr>
-          <p:cNvPr id="14" name="TextBox 13">
-            <a:extLst>
-              <a:ext uri="{FF2B5EF4-FFF2-40B4-BE49-F238E27FC236}">
-                <a16:creationId xmlns:a16="http://schemas.microsoft.com/office/drawing/2014/main" id="{A714FC9D-B733-CF92-4051-4618106C7A9B}"/>
-              </a:ext>
-            </a:extLst>
-          </p:cNvPr>
-          <p:cNvSpPr txBox="1"/>
-          <p:nvPr/>
-        </p:nvSpPr>
-        <p:spPr>
-          <a:xfrm>
-            <a:off x="6064616" y="3661364"/>
-            <a:ext cx="1519982" cy="584775"/>
-          </a:xfrm>
-          <a:prstGeom prst="rect">
-            <a:avLst/>
-          </a:prstGeom>
-          <a:noFill/>
-        </p:spPr>
-        <p:txBody>
-          <a:bodyPr wrap="square" rtlCol="0">
-            <a:spAutoFit/>
-          </a:bodyPr>
-          <a:lstStyle/>
-          <a:p>
-            <a:pPr marL="0" marR="0" lvl="0" indent="0" algn="l" defTabSz="914400" rtl="0" eaLnBrk="1" fontAlgn="auto" latinLnBrk="0" hangingPunct="1">
-              <a:lnSpc>
-                <a:spcPct val="100000"/>
-              </a:lnSpc>
-              <a:spcBef>
-                <a:spcPts val="0"/>
-              </a:spcBef>
-              <a:spcAft>
-                <a:spcPts val="0"/>
-              </a:spcAft>
-              <a:buClrTx/>
-              <a:buSzTx/>
-              <a:buFontTx/>
-              <a:buNone/>
-              <a:tabLst/>
-              <a:defRPr/>
-            </a:pPr>
-            <a:r>
-              <a:rPr kumimoji="0" lang="en-US" sz="3200" b="1" i="0" u="none" strike="noStrike" kern="1200" cap="none" spc="0" normalizeH="0" baseline="0" noProof="0" dirty="0">
-                <a:ln>
-                  <a:noFill/>
-                </a:ln>
-                <a:solidFill>
-                  <a:prstClr val="black"/>
-                </a:solidFill>
-                <a:effectLst/>
-                <a:uLnTx/>
-                <a:uFillTx/>
-                <a:latin typeface="Calibri" panose="020F0502020204030204"/>
-                <a:ea typeface="+mn-ea"/>
-                <a:cs typeface="+mn-cs"/>
-              </a:rPr>
-              <a:t>0.3075</a:t>
-            </a:r>
-          </a:p>
-        </p:txBody>
-      </p:sp>
-      <p:sp>
-        <p:nvSpPr>
-          <p:cNvPr id="15" name="TextBox 14">
-            <a:extLst>
-              <a:ext uri="{FF2B5EF4-FFF2-40B4-BE49-F238E27FC236}">
-                <a16:creationId xmlns:a16="http://schemas.microsoft.com/office/drawing/2014/main" id="{20101914-8EC1-4BF3-D61A-9DE245186DAB}"/>
-              </a:ext>
-            </a:extLst>
-          </p:cNvPr>
-          <p:cNvSpPr txBox="1"/>
-          <p:nvPr/>
-        </p:nvSpPr>
-        <p:spPr>
-          <a:xfrm>
-            <a:off x="6025450" y="4868798"/>
-            <a:ext cx="1519982" cy="584775"/>
-          </a:xfrm>
-          <a:prstGeom prst="rect">
-            <a:avLst/>
-          </a:prstGeom>
-          <a:noFill/>
-        </p:spPr>
-        <p:txBody>
-          <a:bodyPr wrap="square" rtlCol="0">
-            <a:spAutoFit/>
-          </a:bodyPr>
-          <a:lstStyle/>
-          <a:p>
-            <a:pPr marL="0" marR="0" lvl="0" indent="0" algn="l" defTabSz="914400" rtl="0" eaLnBrk="1" fontAlgn="auto" latinLnBrk="0" hangingPunct="1">
-              <a:lnSpc>
-                <a:spcPct val="100000"/>
-              </a:lnSpc>
-              <a:spcBef>
-                <a:spcPts val="0"/>
-              </a:spcBef>
-              <a:spcAft>
-                <a:spcPts val="0"/>
-              </a:spcAft>
-              <a:buClrTx/>
-              <a:buSzTx/>
-              <a:buFontTx/>
-              <a:buNone/>
-              <a:tabLst/>
-              <a:defRPr/>
-            </a:pPr>
-            <a:r>
-              <a:rPr kumimoji="0" lang="en-US" sz="3200" b="1" i="0" u="none" strike="noStrike" kern="1200" cap="none" spc="0" normalizeH="0" baseline="0" noProof="0" dirty="0">
-                <a:ln>
-                  <a:noFill/>
-                </a:ln>
-                <a:solidFill>
-                  <a:prstClr val="black"/>
-                </a:solidFill>
-                <a:effectLst/>
-                <a:uLnTx/>
-                <a:uFillTx/>
-                <a:latin typeface="Calibri" panose="020F0502020204030204"/>
-                <a:ea typeface="+mn-ea"/>
-                <a:cs typeface="+mn-cs"/>
-              </a:rPr>
-              <a:t>0.2075</a:t>
-            </a:r>
-          </a:p>
-        </p:txBody>
-      </p:sp>
-      <p:sp>
-        <p:nvSpPr>
-          <p:cNvPr id="16" name="TextBox 15">
-            <a:extLst>
-              <a:ext uri="{FF2B5EF4-FFF2-40B4-BE49-F238E27FC236}">
-                <a16:creationId xmlns:a16="http://schemas.microsoft.com/office/drawing/2014/main" id="{B4F50B5D-8A6C-6E04-E31C-73711B146937}"/>
-              </a:ext>
-            </a:extLst>
-          </p:cNvPr>
-          <p:cNvSpPr txBox="1"/>
-          <p:nvPr/>
-        </p:nvSpPr>
-        <p:spPr>
-          <a:xfrm>
-            <a:off x="10379748" y="3695445"/>
-            <a:ext cx="1519982" cy="584775"/>
-          </a:xfrm>
-          <a:prstGeom prst="rect">
-            <a:avLst/>
-          </a:prstGeom>
-          <a:noFill/>
-        </p:spPr>
-        <p:txBody>
-          <a:bodyPr wrap="square" rtlCol="0">
-            <a:spAutoFit/>
-          </a:bodyPr>
-          <a:lstStyle/>
-          <a:p>
-            <a:pPr marL="0" marR="0" lvl="0" indent="0" algn="l" defTabSz="914400" rtl="0" eaLnBrk="1" fontAlgn="auto" latinLnBrk="0" hangingPunct="1">
-              <a:lnSpc>
-                <a:spcPct val="100000"/>
-              </a:lnSpc>
-              <a:spcBef>
-                <a:spcPts val="0"/>
-              </a:spcBef>
-              <a:spcAft>
-                <a:spcPts val="0"/>
-              </a:spcAft>
-              <a:buClrTx/>
-              <a:buSzTx/>
-              <a:buFontTx/>
-              <a:buNone/>
-              <a:tabLst/>
-              <a:defRPr/>
-            </a:pPr>
-            <a:r>
-              <a:rPr kumimoji="0" lang="en-US" sz="3200" b="1" i="0" u="none" strike="noStrike" kern="1200" cap="none" spc="0" normalizeH="0" baseline="0" noProof="0" dirty="0">
-                <a:ln>
-                  <a:noFill/>
-                </a:ln>
-                <a:solidFill>
-                  <a:prstClr val="black"/>
-                </a:solidFill>
-                <a:effectLst/>
-                <a:uLnTx/>
-                <a:uFillTx/>
-                <a:latin typeface="Calibri" panose="020F0502020204030204"/>
-                <a:ea typeface="+mn-ea"/>
-                <a:cs typeface="+mn-cs"/>
-              </a:rPr>
-              <a:t>0.3075</a:t>
-            </a:r>
-          </a:p>
-        </p:txBody>
-      </p:sp>
-      <p:sp>
-        <p:nvSpPr>
-          <p:cNvPr id="17" name="TextBox 16">
-            <a:extLst>
-              <a:ext uri="{FF2B5EF4-FFF2-40B4-BE49-F238E27FC236}">
-                <a16:creationId xmlns:a16="http://schemas.microsoft.com/office/drawing/2014/main" id="{85DD03A1-DDC1-30F8-F516-596279C46586}"/>
-              </a:ext>
-            </a:extLst>
-          </p:cNvPr>
-          <p:cNvSpPr txBox="1"/>
-          <p:nvPr/>
-        </p:nvSpPr>
-        <p:spPr>
-          <a:xfrm>
-            <a:off x="10368380" y="4882660"/>
-            <a:ext cx="1519982" cy="584775"/>
-          </a:xfrm>
-          <a:prstGeom prst="rect">
-            <a:avLst/>
-          </a:prstGeom>
-          <a:noFill/>
-        </p:spPr>
-        <p:txBody>
-          <a:bodyPr wrap="square" rtlCol="0">
-            <a:spAutoFit/>
-          </a:bodyPr>
-          <a:lstStyle/>
-          <a:p>
-            <a:pPr marL="0" marR="0" lvl="0" indent="0" algn="l" defTabSz="914400" rtl="0" eaLnBrk="1" fontAlgn="auto" latinLnBrk="0" hangingPunct="1">
-              <a:lnSpc>
-                <a:spcPct val="100000"/>
-              </a:lnSpc>
-              <a:spcBef>
-                <a:spcPts val="0"/>
-              </a:spcBef>
-              <a:spcAft>
-                <a:spcPts val="0"/>
-              </a:spcAft>
-              <a:buClrTx/>
-              <a:buSzTx/>
-              <a:buFontTx/>
-              <a:buNone/>
-              <a:tabLst/>
-              <a:defRPr/>
-            </a:pPr>
-            <a:r>
-              <a:rPr kumimoji="0" lang="en-US" sz="3200" b="1" i="0" u="none" strike="noStrike" kern="1200" cap="none" spc="0" normalizeH="0" baseline="0" noProof="0" dirty="0">
-                <a:ln>
-                  <a:noFill/>
-                </a:ln>
-                <a:solidFill>
-                  <a:prstClr val="black"/>
-                </a:solidFill>
-                <a:effectLst/>
-                <a:uLnTx/>
-                <a:uFillTx/>
-                <a:latin typeface="Calibri" panose="020F0502020204030204"/>
-                <a:ea typeface="+mn-ea"/>
-                <a:cs typeface="+mn-cs"/>
-              </a:rPr>
-              <a:t>0.2075</a:t>
-            </a:r>
-          </a:p>
-        </p:txBody>
-      </p:sp>
-    </p:spTree>
-    <p:extLst>
-      <p:ext uri="{BB962C8B-B14F-4D97-AF65-F5344CB8AC3E}">
-        <p14:creationId xmlns:p14="http://schemas.microsoft.com/office/powerpoint/2010/main" val="1315545172"/>
-      </p:ext>
-    </p:extLst>
-  </p:cSld>
-  <p:clrMapOvr>
-    <a:masterClrMapping/>
-  </p:clrMapOvr>
 </p:sld>
 </file>
 
